--- a/PPTX/DualGeometryIG-Short.pptx
+++ b/PPTX/DualGeometryIG-Short.pptx
@@ -246,7 +246,7 @@
           <a:p>
             <a:fld id="{473339BE-F856-4765-B148-9C669731B5A4}" type="datetimeFigureOut">
               <a:rPr lang="fr-FR" smtClean="0"/>
-              <a:t>24/06/2023</a:t>
+              <a:t>26/06/2026</a:t>
             </a:fld>
             <a:endParaRPr lang="fr-FR"/>
           </a:p>
@@ -310,35 +310,35 @@
           <a:p>
             <a:pPr lvl="0"/>
             <a:r>
-              <a:rPr lang="en-US" smtClean="0"/>
+              <a:rPr lang="en-US"/>
               <a:t>Edit Master text styles</a:t>
             </a:r>
           </a:p>
           <a:p>
             <a:pPr lvl="1"/>
             <a:r>
-              <a:rPr lang="en-US" smtClean="0"/>
+              <a:rPr lang="en-US"/>
               <a:t>Second level</a:t>
             </a:r>
           </a:p>
           <a:p>
             <a:pPr lvl="2"/>
             <a:r>
-              <a:rPr lang="en-US" smtClean="0"/>
+              <a:rPr lang="en-US"/>
               <a:t>Third level</a:t>
             </a:r>
           </a:p>
           <a:p>
             <a:pPr lvl="3"/>
             <a:r>
-              <a:rPr lang="en-US" smtClean="0"/>
+              <a:rPr lang="en-US"/>
               <a:t>Fourth level</a:t>
             </a:r>
           </a:p>
           <a:p>
             <a:pPr lvl="4"/>
             <a:r>
-              <a:rPr lang="en-US" smtClean="0"/>
+              <a:rPr lang="en-US"/>
               <a:t>Fifth level</a:t>
             </a:r>
             <a:endParaRPr lang="fr-FR"/>
@@ -643,7 +643,7 @@
           <a:lstStyle/>
           <a:p>
             <a:r>
-              <a:rPr lang="en-US" sz="1200" smtClean="0">
+              <a:rPr lang="en-US" sz="1200">
                 <a:solidFill>
                   <a:schemeClr val="accent6"/>
                 </a:solidFill>
@@ -651,7 +651,7 @@
               <a:t> </a:t>
             </a:r>
             <a:r>
-              <a:rPr lang="fr-FR" sz="1200" smtClean="0">
+              <a:rPr lang="fr-FR" sz="1200">
                 <a:solidFill>
                   <a:schemeClr val="accent6"/>
                 </a:solidFill>
@@ -659,7 +659,7 @@
               <a:t>∇*=2∇^g-</a:t>
             </a:r>
             <a:r>
-              <a:rPr lang="en-US" sz="1200" smtClean="0">
+              <a:rPr lang="en-US" sz="1200">
                 <a:solidFill>
                   <a:schemeClr val="accent6"/>
                 </a:solidFill>
@@ -667,7 +667,7 @@
               <a:t> </a:t>
             </a:r>
             <a:r>
-              <a:rPr lang="fr-FR" sz="1200" smtClean="0">
+              <a:rPr lang="fr-FR" sz="1200">
                 <a:solidFill>
                   <a:schemeClr val="accent6"/>
                 </a:solidFill>
@@ -758,175 +758,175 @@
           <a:bodyPr/>
           <a:lstStyle/>
           <a:p>
-            <a:endParaRPr lang="fr-FR" smtClean="0"/>
-          </a:p>
-          <a:p>
-            <a:r>
-              <a:rPr lang="fr-FR" smtClean="0"/>
+            <a:endParaRPr lang="fr-FR"/>
+          </a:p>
+          <a:p>
+            <a:r>
+              <a:rPr lang="fr-FR"/>
               <a:t>$$</a:t>
             </a:r>
           </a:p>
           <a:p>
             <a:r>
-              <a:rPr lang="fr-FR" smtClean="0"/>
+              <a:rPr lang="fr-FR"/>
               <a:t>\Gamma_{ijk}^\nabla</a:t>
             </a:r>
           </a:p>
           <a:p>
             <a:r>
-              <a:rPr lang="fr-FR" smtClean="0"/>
+              <a:rPr lang="fr-FR"/>
               <a:t>$$</a:t>
             </a:r>
           </a:p>
           <a:p>
-            <a:endParaRPr lang="fr-FR" smtClean="0"/>
-          </a:p>
-          <a:p>
-            <a:r>
-              <a:rPr lang="fr-FR" smtClean="0"/>
+            <a:endParaRPr lang="fr-FR"/>
+          </a:p>
+          <a:p>
+            <a:r>
+              <a:rPr lang="fr-FR"/>
               <a:t>$$</a:t>
             </a:r>
           </a:p>
           <a:p>
             <a:r>
-              <a:rPr lang="fr-FR" smtClean="0"/>
+              <a:rPr lang="fr-FR"/>
               <a:t>T_{ijk}=\Gamma_{ijk}^*-\Gamma_{ijk}</a:t>
             </a:r>
           </a:p>
           <a:p>
             <a:r>
-              <a:rPr lang="fr-FR" smtClean="0"/>
+              <a:rPr lang="fr-FR"/>
               <a:t>$$</a:t>
             </a:r>
           </a:p>
           <a:p>
-            <a:endParaRPr lang="fr-FR" smtClean="0"/>
-          </a:p>
-          <a:p>
-            <a:r>
-              <a:rPr lang="fr-FR" smtClean="0"/>
+            <a:endParaRPr lang="fr-FR"/>
+          </a:p>
+          <a:p>
+            <a:r>
+              <a:rPr lang="fr-FR"/>
               <a:t>$$</a:t>
             </a:r>
           </a:p>
           <a:p>
             <a:r>
-              <a:rPr lang="fr-FR" smtClean="0"/>
+              <a:rPr lang="fr-FR"/>
               <a:t>T_{ijk}=\nabla_i g_{jk}</a:t>
             </a:r>
           </a:p>
           <a:p>
             <a:r>
-              <a:rPr lang="fr-FR" smtClean="0"/>
+              <a:rPr lang="fr-FR"/>
               <a:t>$$</a:t>
             </a:r>
           </a:p>
           <a:p>
-            <a:endParaRPr lang="fr-FR" smtClean="0"/>
-          </a:p>
-          <a:p>
-            <a:r>
-              <a:rPr lang="fr-FR" smtClean="0"/>
+            <a:endParaRPr lang="fr-FR"/>
+          </a:p>
+          <a:p>
+            <a:r>
+              <a:rPr lang="fr-FR"/>
               <a:t>$$</a:t>
             </a:r>
           </a:p>
           <a:p>
             <a:r>
-              <a:rPr lang="fr-FR" smtClean="0"/>
+              <a:rPr lang="fr-FR"/>
               <a:t>\nabla^\alpha=\bar{\Gamma}_{ijk}-\frac{\alpha}{2}T_{ijk}</a:t>
             </a:r>
           </a:p>
           <a:p>
             <a:r>
-              <a:rPr lang="fr-FR" smtClean="0"/>
+              <a:rPr lang="fr-FR"/>
               <a:t>$$</a:t>
             </a:r>
           </a:p>
           <a:p>
-            <a:endParaRPr lang="fr-FR" smtClean="0"/>
-          </a:p>
-          <a:p>
-            <a:r>
-              <a:rPr lang="fr-FR" smtClean="0"/>
+            <a:endParaRPr lang="fr-FR"/>
+          </a:p>
+          <a:p>
+            <a:r>
+              <a:rPr lang="fr-FR"/>
               <a:t>$$</a:t>
             </a:r>
           </a:p>
           <a:p>
             <a:r>
-              <a:rPr lang="fr-FR" smtClean="0"/>
+              <a:rPr lang="fr-FR"/>
               <a:t>\nabla^{-\alpha}=\bar{\Gamma}_{ijk}+\frac{\alpha}{2}T_{ijk}</a:t>
             </a:r>
           </a:p>
           <a:p>
             <a:r>
-              <a:rPr lang="fr-FR" smtClean="0"/>
+              <a:rPr lang="fr-FR"/>
               <a:t>$$</a:t>
             </a:r>
           </a:p>
           <a:p>
-            <a:endParaRPr lang="fr-FR" smtClean="0"/>
-          </a:p>
-          <a:p>
-            <a:r>
-              <a:rPr lang="fr-FR" smtClean="0"/>
+            <a:endParaRPr lang="fr-FR"/>
+          </a:p>
+          <a:p>
+            <a:r>
+              <a:rPr lang="fr-FR"/>
               <a:t>$$</a:t>
             </a:r>
           </a:p>
           <a:p>
             <a:r>
-              <a:rPr lang="fr-FR" smtClean="0"/>
+              <a:rPr lang="fr-FR"/>
               <a:t>(M,g,\nabla^\alpha,\nabla^{-\alpha})</a:t>
             </a:r>
           </a:p>
           <a:p>
             <a:r>
-              <a:rPr lang="fr-FR" smtClean="0"/>
+              <a:rPr lang="fr-FR"/>
               <a:t>$$</a:t>
             </a:r>
           </a:p>
           <a:p>
-            <a:endParaRPr lang="fr-FR" smtClean="0"/>
-          </a:p>
-          <a:p>
-            <a:r>
-              <a:rPr lang="fr-FR" smtClean="0"/>
+            <a:endParaRPr lang="fr-FR"/>
+          </a:p>
+          <a:p>
+            <a:r>
+              <a:rPr lang="fr-FR"/>
               <a:t>$$</a:t>
             </a:r>
           </a:p>
           <a:p>
             <a:r>
-              <a:rPr lang="fr-FR" smtClean="0"/>
+              <a:rPr lang="fr-FR"/>
               <a:t>T_{ijk}(\theta)=E[\partial_i l\partial_j l\partial_k l]</a:t>
             </a:r>
           </a:p>
           <a:p>
             <a:r>
-              <a:rPr lang="fr-FR" smtClean="0"/>
+              <a:rPr lang="fr-FR"/>
               <a:t>$$</a:t>
             </a:r>
           </a:p>
           <a:p>
-            <a:endParaRPr lang="fr-FR" smtClean="0"/>
-          </a:p>
-          <a:p>
-            <a:r>
-              <a:rPr lang="fr-FR" smtClean="0"/>
+            <a:endParaRPr lang="fr-FR"/>
+          </a:p>
+          <a:p>
+            <a:r>
+              <a:rPr lang="fr-FR"/>
               <a:t>$$</a:t>
             </a:r>
           </a:p>
           <a:p>
             <a:r>
-              <a:rPr lang="fr-FR" smtClean="0"/>
+              <a:rPr lang="fr-FR"/>
               <a:t>T_{ijk}(\theta)=\partial_i \partial_j\partial_k F(\theta)</a:t>
             </a:r>
           </a:p>
           <a:p>
             <a:r>
-              <a:rPr lang="fr-FR" smtClean="0"/>
+              <a:rPr lang="fr-FR"/>
               <a:t>$$</a:t>
             </a:r>
           </a:p>
           <a:p>
-            <a:endParaRPr lang="fr-FR" smtClean="0"/>
+            <a:endParaRPr lang="fr-FR"/>
           </a:p>
           <a:p>
             <a:endParaRPr lang="fr-FR"/>
@@ -1014,7 +1014,7 @@
           <a:lstStyle/>
           <a:p>
             <a:r>
-              <a:rPr lang="en-US" smtClean="0"/>
+              <a:rPr lang="en-US"/>
               <a:t>also called skewness tensor</a:t>
             </a:r>
             <a:endParaRPr lang="fr-FR"/>
@@ -1304,7 +1304,7 @@
           <a:lstStyle/>
           <a:p>
             <a:r>
-              <a:rPr lang="en-US" sz="1200" b="0" i="0" kern="1200" dirty="0" smtClean="0">
+              <a:rPr lang="en-US" sz="1200" b="0" i="0" kern="1200" dirty="0">
                 <a:solidFill>
                   <a:schemeClr val="tx1"/>
                 </a:solidFill>
@@ -1316,7 +1316,7 @@
               <a:t> </a:t>
             </a:r>
             <a:r>
-              <a:rPr lang="en-US" sz="1200" b="0" i="0" u="none" strike="noStrike" kern="1200" dirty="0" smtClean="0">
+              <a:rPr lang="en-US" sz="1200" b="0" i="0" u="none" strike="noStrike" kern="1200" dirty="0">
                 <a:solidFill>
                   <a:schemeClr val="tx1"/>
                 </a:solidFill>
@@ -1329,7 +1329,7 @@
               <a:t>proper</a:t>
             </a:r>
             <a:r>
-              <a:rPr lang="en-US" sz="1200" b="0" i="0" kern="1200" dirty="0" smtClean="0">
+              <a:rPr lang="en-US" sz="1200" b="0" i="0" kern="1200" dirty="0">
                 <a:solidFill>
                   <a:schemeClr val="tx1"/>
                 </a:solidFill>
@@ -1341,7 +1341,7 @@
               <a:t>, </a:t>
             </a:r>
             <a:r>
-              <a:rPr lang="en-US" sz="1200" b="0" i="0" u="none" strike="noStrike" kern="1200" dirty="0" smtClean="0">
+              <a:rPr lang="en-US" sz="1200" b="0" i="0" u="none" strike="noStrike" kern="1200" dirty="0">
                 <a:solidFill>
                   <a:schemeClr val="tx1"/>
                 </a:solidFill>
@@ -1354,7 +1354,7 @@
               <a:t>lower semi-continuous</a:t>
             </a:r>
             <a:r>
-              <a:rPr lang="en-US" sz="1200" b="0" i="0" kern="1200" dirty="0" smtClean="0">
+              <a:rPr lang="en-US" sz="1200" b="0" i="0" kern="1200" dirty="0">
                 <a:solidFill>
                   <a:schemeClr val="tx1"/>
                 </a:solidFill>
@@ -1366,7 +1366,7 @@
               <a:t>, and </a:t>
             </a:r>
             <a:r>
-              <a:rPr lang="en-US" sz="1200" b="0" i="0" u="none" strike="noStrike" kern="1200" dirty="0" smtClean="0">
+              <a:rPr lang="en-US" sz="1200" b="0" i="0" u="none" strike="noStrike" kern="1200" dirty="0">
                 <a:solidFill>
                   <a:schemeClr val="tx1"/>
                 </a:solidFill>
@@ -1379,7 +1379,7 @@
               <a:t>convex function</a:t>
             </a:r>
             <a:r>
-              <a:rPr lang="en-US" sz="1200" b="0" i="0" kern="1200" dirty="0" smtClean="0">
+              <a:rPr lang="en-US" sz="1200" b="0" i="0" kern="1200" dirty="0">
                 <a:solidFill>
                   <a:schemeClr val="tx1"/>
                 </a:solidFill>
@@ -1673,7 +1673,7 @@
           </a:lstStyle>
           <a:p>
             <a:r>
-              <a:rPr lang="en-US" smtClean="0"/>
+              <a:rPr lang="en-US"/>
               <a:t>Click to edit Master title style</a:t>
             </a:r>
             <a:endParaRPr lang="fr-FR"/>
@@ -1738,7 +1738,7 @@
           </a:lstStyle>
           <a:p>
             <a:r>
-              <a:rPr lang="en-US" smtClean="0"/>
+              <a:rPr lang="en-US"/>
               <a:t>Click to edit Master subtitle style</a:t>
             </a:r>
             <a:endParaRPr lang="fr-FR"/>
@@ -1762,7 +1762,7 @@
           <a:p>
             <a:fld id="{23E1006D-E687-4C48-97EE-62BA972439B3}" type="datetimeFigureOut">
               <a:rPr lang="fr-FR" smtClean="0"/>
-              <a:t>24/06/2023</a:t>
+              <a:t>26/06/2026</a:t>
             </a:fld>
             <a:endParaRPr lang="fr-FR"/>
           </a:p>
@@ -1856,7 +1856,7 @@
           <a:lstStyle/>
           <a:p>
             <a:r>
-              <a:rPr lang="en-US" smtClean="0"/>
+              <a:rPr lang="en-US"/>
               <a:t>Click to edit Master title style</a:t>
             </a:r>
             <a:endParaRPr lang="fr-FR"/>
@@ -1880,35 +1880,35 @@
           <a:p>
             <a:pPr lvl="0"/>
             <a:r>
-              <a:rPr lang="en-US" smtClean="0"/>
+              <a:rPr lang="en-US"/>
               <a:t>Edit Master text styles</a:t>
             </a:r>
           </a:p>
           <a:p>
             <a:pPr lvl="1"/>
             <a:r>
-              <a:rPr lang="en-US" smtClean="0"/>
+              <a:rPr lang="en-US"/>
               <a:t>Second level</a:t>
             </a:r>
           </a:p>
           <a:p>
             <a:pPr lvl="2"/>
             <a:r>
-              <a:rPr lang="en-US" smtClean="0"/>
+              <a:rPr lang="en-US"/>
               <a:t>Third level</a:t>
             </a:r>
           </a:p>
           <a:p>
             <a:pPr lvl="3"/>
             <a:r>
-              <a:rPr lang="en-US" smtClean="0"/>
+              <a:rPr lang="en-US"/>
               <a:t>Fourth level</a:t>
             </a:r>
           </a:p>
           <a:p>
             <a:pPr lvl="4"/>
             <a:r>
-              <a:rPr lang="en-US" smtClean="0"/>
+              <a:rPr lang="en-US"/>
               <a:t>Fifth level</a:t>
             </a:r>
             <a:endParaRPr lang="fr-FR"/>
@@ -1932,7 +1932,7 @@
           <a:p>
             <a:fld id="{23E1006D-E687-4C48-97EE-62BA972439B3}" type="datetimeFigureOut">
               <a:rPr lang="fr-FR" smtClean="0"/>
-              <a:t>24/06/2023</a:t>
+              <a:t>26/06/2026</a:t>
             </a:fld>
             <a:endParaRPr lang="fr-FR"/>
           </a:p>
@@ -2031,7 +2031,7 @@
           <a:lstStyle/>
           <a:p>
             <a:r>
-              <a:rPr lang="en-US" smtClean="0"/>
+              <a:rPr lang="en-US"/>
               <a:t>Click to edit Master title style</a:t>
             </a:r>
             <a:endParaRPr lang="fr-FR"/>
@@ -2060,35 +2060,35 @@
           <a:p>
             <a:pPr lvl="0"/>
             <a:r>
-              <a:rPr lang="en-US" smtClean="0"/>
+              <a:rPr lang="en-US"/>
               <a:t>Edit Master text styles</a:t>
             </a:r>
           </a:p>
           <a:p>
             <a:pPr lvl="1"/>
             <a:r>
-              <a:rPr lang="en-US" smtClean="0"/>
+              <a:rPr lang="en-US"/>
               <a:t>Second level</a:t>
             </a:r>
           </a:p>
           <a:p>
             <a:pPr lvl="2"/>
             <a:r>
-              <a:rPr lang="en-US" smtClean="0"/>
+              <a:rPr lang="en-US"/>
               <a:t>Third level</a:t>
             </a:r>
           </a:p>
           <a:p>
             <a:pPr lvl="3"/>
             <a:r>
-              <a:rPr lang="en-US" smtClean="0"/>
+              <a:rPr lang="en-US"/>
               <a:t>Fourth level</a:t>
             </a:r>
           </a:p>
           <a:p>
             <a:pPr lvl="4"/>
             <a:r>
-              <a:rPr lang="en-US" smtClean="0"/>
+              <a:rPr lang="en-US"/>
               <a:t>Fifth level</a:t>
             </a:r>
             <a:endParaRPr lang="fr-FR"/>
@@ -2112,7 +2112,7 @@
           <a:p>
             <a:fld id="{23E1006D-E687-4C48-97EE-62BA972439B3}" type="datetimeFigureOut">
               <a:rPr lang="fr-FR" smtClean="0"/>
-              <a:t>24/06/2023</a:t>
+              <a:t>26/06/2026</a:t>
             </a:fld>
             <a:endParaRPr lang="fr-FR"/>
           </a:p>
@@ -2213,7 +2213,7 @@
           <a:lstStyle/>
           <a:p>
             <a:r>
-              <a:rPr lang="fr-FR" sz="800" b="0" i="0" kern="1200" smtClean="0">
+              <a:rPr lang="fr-FR" sz="800" b="0" i="0" kern="1200">
                 <a:solidFill>
                   <a:srgbClr val="F7F7F7"/>
                 </a:solidFill>
@@ -2225,7 +2225,7 @@
               <a:t>© </a:t>
             </a:r>
             <a:r>
-              <a:rPr lang="en-US" sz="800" smtClean="0">
+              <a:rPr lang="en-US" sz="800">
                 <a:solidFill>
                   <a:srgbClr val="F7F7F7"/>
                 </a:solidFill>
@@ -2258,7 +2258,7 @@
           <a:lstStyle/>
           <a:p>
             <a:r>
-              <a:rPr lang="en-US" smtClean="0"/>
+              <a:rPr lang="en-US"/>
               <a:t>Click to edit Master title style</a:t>
             </a:r>
             <a:endParaRPr lang="fr-FR"/>
@@ -2282,35 +2282,35 @@
           <a:p>
             <a:pPr lvl="0"/>
             <a:r>
-              <a:rPr lang="en-US" smtClean="0"/>
+              <a:rPr lang="en-US"/>
               <a:t>Edit Master text styles</a:t>
             </a:r>
           </a:p>
           <a:p>
             <a:pPr lvl="1"/>
             <a:r>
-              <a:rPr lang="en-US" smtClean="0"/>
+              <a:rPr lang="en-US"/>
               <a:t>Second level</a:t>
             </a:r>
           </a:p>
           <a:p>
             <a:pPr lvl="2"/>
             <a:r>
-              <a:rPr lang="en-US" smtClean="0"/>
+              <a:rPr lang="en-US"/>
               <a:t>Third level</a:t>
             </a:r>
           </a:p>
           <a:p>
             <a:pPr lvl="3"/>
             <a:r>
-              <a:rPr lang="en-US" smtClean="0"/>
+              <a:rPr lang="en-US"/>
               <a:t>Fourth level</a:t>
             </a:r>
           </a:p>
           <a:p>
             <a:pPr lvl="4"/>
             <a:r>
-              <a:rPr lang="en-US" smtClean="0"/>
+              <a:rPr lang="en-US"/>
               <a:t>Fifth level</a:t>
             </a:r>
             <a:endParaRPr lang="fr-FR"/>
@@ -2334,7 +2334,7 @@
           <a:p>
             <a:fld id="{23E1006D-E687-4C48-97EE-62BA972439B3}" type="datetimeFigureOut">
               <a:rPr lang="fr-FR" smtClean="0"/>
-              <a:t>24/06/2023</a:t>
+              <a:t>26/06/2026</a:t>
             </a:fld>
             <a:endParaRPr lang="fr-FR"/>
           </a:p>
@@ -2392,13 +2392,6 @@
   <p:clrMapOvr>
     <a:masterClrMapping/>
   </p:clrMapOvr>
-  <p:timing>
-    <p:tnLst>
-      <p:par>
-        <p:cTn id="1" dur="indefinite" restart="never" nodeType="tmRoot"/>
-      </p:par>
-    </p:tnLst>
-  </p:timing>
 </p:sldLayout>
 </file>
 
@@ -2444,7 +2437,7 @@
           </a:lstStyle>
           <a:p>
             <a:r>
-              <a:rPr lang="en-US" smtClean="0"/>
+              <a:rPr lang="en-US"/>
               <a:t>Click to edit Master title style</a:t>
             </a:r>
             <a:endParaRPr lang="fr-FR"/>
@@ -2564,7 +2557,7 @@
           <a:p>
             <a:pPr lvl="0"/>
             <a:r>
-              <a:rPr lang="en-US" smtClean="0"/>
+              <a:rPr lang="en-US"/>
               <a:t>Edit Master text styles</a:t>
             </a:r>
           </a:p>
@@ -2587,7 +2580,7 @@
           <a:p>
             <a:fld id="{23E1006D-E687-4C48-97EE-62BA972439B3}" type="datetimeFigureOut">
               <a:rPr lang="fr-FR" smtClean="0"/>
-              <a:t>24/06/2023</a:t>
+              <a:t>26/06/2026</a:t>
             </a:fld>
             <a:endParaRPr lang="fr-FR"/>
           </a:p>
@@ -2681,7 +2674,7 @@
           <a:lstStyle/>
           <a:p>
             <a:r>
-              <a:rPr lang="en-US" smtClean="0"/>
+              <a:rPr lang="en-US"/>
               <a:t>Click to edit Master title style</a:t>
             </a:r>
             <a:endParaRPr lang="fr-FR"/>
@@ -2710,35 +2703,35 @@
           <a:p>
             <a:pPr lvl="0"/>
             <a:r>
-              <a:rPr lang="en-US" smtClean="0"/>
+              <a:rPr lang="en-US"/>
               <a:t>Edit Master text styles</a:t>
             </a:r>
           </a:p>
           <a:p>
             <a:pPr lvl="1"/>
             <a:r>
-              <a:rPr lang="en-US" smtClean="0"/>
+              <a:rPr lang="en-US"/>
               <a:t>Second level</a:t>
             </a:r>
           </a:p>
           <a:p>
             <a:pPr lvl="2"/>
             <a:r>
-              <a:rPr lang="en-US" smtClean="0"/>
+              <a:rPr lang="en-US"/>
               <a:t>Third level</a:t>
             </a:r>
           </a:p>
           <a:p>
             <a:pPr lvl="3"/>
             <a:r>
-              <a:rPr lang="en-US" smtClean="0"/>
+              <a:rPr lang="en-US"/>
               <a:t>Fourth level</a:t>
             </a:r>
           </a:p>
           <a:p>
             <a:pPr lvl="4"/>
             <a:r>
-              <a:rPr lang="en-US" smtClean="0"/>
+              <a:rPr lang="en-US"/>
               <a:t>Fifth level</a:t>
             </a:r>
             <a:endParaRPr lang="fr-FR"/>
@@ -2767,35 +2760,35 @@
           <a:p>
             <a:pPr lvl="0"/>
             <a:r>
-              <a:rPr lang="en-US" smtClean="0"/>
+              <a:rPr lang="en-US"/>
               <a:t>Edit Master text styles</a:t>
             </a:r>
           </a:p>
           <a:p>
             <a:pPr lvl="1"/>
             <a:r>
-              <a:rPr lang="en-US" smtClean="0"/>
+              <a:rPr lang="en-US"/>
               <a:t>Second level</a:t>
             </a:r>
           </a:p>
           <a:p>
             <a:pPr lvl="2"/>
             <a:r>
-              <a:rPr lang="en-US" smtClean="0"/>
+              <a:rPr lang="en-US"/>
               <a:t>Third level</a:t>
             </a:r>
           </a:p>
           <a:p>
             <a:pPr lvl="3"/>
             <a:r>
-              <a:rPr lang="en-US" smtClean="0"/>
+              <a:rPr lang="en-US"/>
               <a:t>Fourth level</a:t>
             </a:r>
           </a:p>
           <a:p>
             <a:pPr lvl="4"/>
             <a:r>
-              <a:rPr lang="en-US" smtClean="0"/>
+              <a:rPr lang="en-US"/>
               <a:t>Fifth level</a:t>
             </a:r>
             <a:endParaRPr lang="fr-FR"/>
@@ -2819,7 +2812,7 @@
           <a:p>
             <a:fld id="{23E1006D-E687-4C48-97EE-62BA972439B3}" type="datetimeFigureOut">
               <a:rPr lang="fr-FR" smtClean="0"/>
-              <a:t>24/06/2023</a:t>
+              <a:t>26/06/2026</a:t>
             </a:fld>
             <a:endParaRPr lang="fr-FR"/>
           </a:p>
@@ -2918,7 +2911,7 @@
           <a:lstStyle/>
           <a:p>
             <a:r>
-              <a:rPr lang="en-US" smtClean="0"/>
+              <a:rPr lang="en-US"/>
               <a:t>Click to edit Master title style</a:t>
             </a:r>
             <a:endParaRPr lang="fr-FR"/>
@@ -2984,7 +2977,7 @@
           <a:p>
             <a:pPr lvl="0"/>
             <a:r>
-              <a:rPr lang="en-US" smtClean="0"/>
+              <a:rPr lang="en-US"/>
               <a:t>Edit Master text styles</a:t>
             </a:r>
           </a:p>
@@ -3012,35 +3005,35 @@
           <a:p>
             <a:pPr lvl="0"/>
             <a:r>
-              <a:rPr lang="en-US" smtClean="0"/>
+              <a:rPr lang="en-US"/>
               <a:t>Edit Master text styles</a:t>
             </a:r>
           </a:p>
           <a:p>
             <a:pPr lvl="1"/>
             <a:r>
-              <a:rPr lang="en-US" smtClean="0"/>
+              <a:rPr lang="en-US"/>
               <a:t>Second level</a:t>
             </a:r>
           </a:p>
           <a:p>
             <a:pPr lvl="2"/>
             <a:r>
-              <a:rPr lang="en-US" smtClean="0"/>
+              <a:rPr lang="en-US"/>
               <a:t>Third level</a:t>
             </a:r>
           </a:p>
           <a:p>
             <a:pPr lvl="3"/>
             <a:r>
-              <a:rPr lang="en-US" smtClean="0"/>
+              <a:rPr lang="en-US"/>
               <a:t>Fourth level</a:t>
             </a:r>
           </a:p>
           <a:p>
             <a:pPr lvl="4"/>
             <a:r>
-              <a:rPr lang="en-US" smtClean="0"/>
+              <a:rPr lang="en-US"/>
               <a:t>Fifth level</a:t>
             </a:r>
             <a:endParaRPr lang="fr-FR"/>
@@ -3106,7 +3099,7 @@
           <a:p>
             <a:pPr lvl="0"/>
             <a:r>
-              <a:rPr lang="en-US" smtClean="0"/>
+              <a:rPr lang="en-US"/>
               <a:t>Edit Master text styles</a:t>
             </a:r>
           </a:p>
@@ -3134,35 +3127,35 @@
           <a:p>
             <a:pPr lvl="0"/>
             <a:r>
-              <a:rPr lang="en-US" smtClean="0"/>
+              <a:rPr lang="en-US"/>
               <a:t>Edit Master text styles</a:t>
             </a:r>
           </a:p>
           <a:p>
             <a:pPr lvl="1"/>
             <a:r>
-              <a:rPr lang="en-US" smtClean="0"/>
+              <a:rPr lang="en-US"/>
               <a:t>Second level</a:t>
             </a:r>
           </a:p>
           <a:p>
             <a:pPr lvl="2"/>
             <a:r>
-              <a:rPr lang="en-US" smtClean="0"/>
+              <a:rPr lang="en-US"/>
               <a:t>Third level</a:t>
             </a:r>
           </a:p>
           <a:p>
             <a:pPr lvl="3"/>
             <a:r>
-              <a:rPr lang="en-US" smtClean="0"/>
+              <a:rPr lang="en-US"/>
               <a:t>Fourth level</a:t>
             </a:r>
           </a:p>
           <a:p>
             <a:pPr lvl="4"/>
             <a:r>
-              <a:rPr lang="en-US" smtClean="0"/>
+              <a:rPr lang="en-US"/>
               <a:t>Fifth level</a:t>
             </a:r>
             <a:endParaRPr lang="fr-FR"/>
@@ -3186,7 +3179,7 @@
           <a:p>
             <a:fld id="{23E1006D-E687-4C48-97EE-62BA972439B3}" type="datetimeFigureOut">
               <a:rPr lang="fr-FR" smtClean="0"/>
-              <a:t>24/06/2023</a:t>
+              <a:t>26/06/2026</a:t>
             </a:fld>
             <a:endParaRPr lang="fr-FR"/>
           </a:p>
@@ -3280,7 +3273,7 @@
           <a:lstStyle/>
           <a:p>
             <a:r>
-              <a:rPr lang="en-US" smtClean="0"/>
+              <a:rPr lang="en-US"/>
               <a:t>Click to edit Master title style</a:t>
             </a:r>
             <a:endParaRPr lang="fr-FR"/>
@@ -3304,7 +3297,7 @@
           <a:p>
             <a:fld id="{23E1006D-E687-4C48-97EE-62BA972439B3}" type="datetimeFigureOut">
               <a:rPr lang="fr-FR" smtClean="0"/>
-              <a:t>24/06/2023</a:t>
+              <a:t>26/06/2026</a:t>
             </a:fld>
             <a:endParaRPr lang="fr-FR"/>
           </a:p>
@@ -3399,7 +3392,7 @@
           <a:p>
             <a:fld id="{23E1006D-E687-4C48-97EE-62BA972439B3}" type="datetimeFigureOut">
               <a:rPr lang="fr-FR" smtClean="0"/>
-              <a:t>24/06/2023</a:t>
+              <a:t>26/06/2026</a:t>
             </a:fld>
             <a:endParaRPr lang="fr-FR"/>
           </a:p>
@@ -3502,7 +3495,7 @@
           </a:lstStyle>
           <a:p>
             <a:r>
-              <a:rPr lang="en-US" smtClean="0"/>
+              <a:rPr lang="en-US"/>
               <a:t>Click to edit Master title style</a:t>
             </a:r>
             <a:endParaRPr lang="fr-FR"/>
@@ -3559,35 +3552,35 @@
           <a:p>
             <a:pPr lvl="0"/>
             <a:r>
-              <a:rPr lang="en-US" smtClean="0"/>
+              <a:rPr lang="en-US"/>
               <a:t>Edit Master text styles</a:t>
             </a:r>
           </a:p>
           <a:p>
             <a:pPr lvl="1"/>
             <a:r>
-              <a:rPr lang="en-US" smtClean="0"/>
+              <a:rPr lang="en-US"/>
               <a:t>Second level</a:t>
             </a:r>
           </a:p>
           <a:p>
             <a:pPr lvl="2"/>
             <a:r>
-              <a:rPr lang="en-US" smtClean="0"/>
+              <a:rPr lang="en-US"/>
               <a:t>Third level</a:t>
             </a:r>
           </a:p>
           <a:p>
             <a:pPr lvl="3"/>
             <a:r>
-              <a:rPr lang="en-US" smtClean="0"/>
+              <a:rPr lang="en-US"/>
               <a:t>Fourth level</a:t>
             </a:r>
           </a:p>
           <a:p>
             <a:pPr lvl="4"/>
             <a:r>
-              <a:rPr lang="en-US" smtClean="0"/>
+              <a:rPr lang="en-US"/>
               <a:t>Fifth level</a:t>
             </a:r>
             <a:endParaRPr lang="fr-FR"/>
@@ -3653,7 +3646,7 @@
           <a:p>
             <a:pPr lvl="0"/>
             <a:r>
-              <a:rPr lang="en-US" smtClean="0"/>
+              <a:rPr lang="en-US"/>
               <a:t>Edit Master text styles</a:t>
             </a:r>
           </a:p>
@@ -3676,7 +3669,7 @@
           <a:p>
             <a:fld id="{23E1006D-E687-4C48-97EE-62BA972439B3}" type="datetimeFigureOut">
               <a:rPr lang="fr-FR" smtClean="0"/>
-              <a:t>24/06/2023</a:t>
+              <a:t>26/06/2026</a:t>
             </a:fld>
             <a:endParaRPr lang="fr-FR"/>
           </a:p>
@@ -3779,7 +3772,7 @@
           </a:lstStyle>
           <a:p>
             <a:r>
-              <a:rPr lang="en-US" smtClean="0"/>
+              <a:rPr lang="en-US"/>
               <a:t>Click to edit Master title style</a:t>
             </a:r>
             <a:endParaRPr lang="fr-FR"/>
@@ -3906,7 +3899,7 @@
           <a:p>
             <a:pPr lvl="0"/>
             <a:r>
-              <a:rPr lang="en-US" smtClean="0"/>
+              <a:rPr lang="en-US"/>
               <a:t>Edit Master text styles</a:t>
             </a:r>
           </a:p>
@@ -3929,7 +3922,7 @@
           <a:p>
             <a:fld id="{23E1006D-E687-4C48-97EE-62BA972439B3}" type="datetimeFigureOut">
               <a:rPr lang="fr-FR" smtClean="0"/>
-              <a:t>24/06/2023</a:t>
+              <a:t>26/06/2026</a:t>
             </a:fld>
             <a:endParaRPr lang="fr-FR"/>
           </a:p>
@@ -4038,7 +4031,7 @@
           <a:lstStyle/>
           <a:p>
             <a:r>
-              <a:rPr lang="en-US" smtClean="0"/>
+              <a:rPr lang="en-US"/>
               <a:t>Click to edit Master title style</a:t>
             </a:r>
             <a:endParaRPr lang="fr-FR"/>
@@ -4072,35 +4065,35 @@
           <a:p>
             <a:pPr lvl="0"/>
             <a:r>
-              <a:rPr lang="en-US" smtClean="0"/>
+              <a:rPr lang="en-US"/>
               <a:t>Edit Master text styles</a:t>
             </a:r>
           </a:p>
           <a:p>
             <a:pPr lvl="1"/>
             <a:r>
-              <a:rPr lang="en-US" smtClean="0"/>
+              <a:rPr lang="en-US"/>
               <a:t>Second level</a:t>
             </a:r>
           </a:p>
           <a:p>
             <a:pPr lvl="2"/>
             <a:r>
-              <a:rPr lang="en-US" smtClean="0"/>
+              <a:rPr lang="en-US"/>
               <a:t>Third level</a:t>
             </a:r>
           </a:p>
           <a:p>
             <a:pPr lvl="3"/>
             <a:r>
-              <a:rPr lang="en-US" smtClean="0"/>
+              <a:rPr lang="en-US"/>
               <a:t>Fourth level</a:t>
             </a:r>
           </a:p>
           <a:p>
             <a:pPr lvl="4"/>
             <a:r>
-              <a:rPr lang="en-US" smtClean="0"/>
+              <a:rPr lang="en-US"/>
               <a:t>Fifth level</a:t>
             </a:r>
             <a:endParaRPr lang="fr-FR"/>
@@ -4142,7 +4135,7 @@
           <a:p>
             <a:fld id="{23E1006D-E687-4C48-97EE-62BA972439B3}" type="datetimeFigureOut">
               <a:rPr lang="fr-FR" smtClean="0"/>
-              <a:t>24/06/2023</a:t>
+              <a:t>26/06/2026</a:t>
             </a:fld>
             <a:endParaRPr lang="fr-FR"/>
           </a:p>
@@ -4567,12 +4560,8 @@
           <a:bodyPr/>
           <a:lstStyle/>
           <a:p>
-            <a:r>
-              <a:rPr lang="en-US" smtClean="0"/>
-              <a:t/>
-            </a:r>
             <a:br>
-              <a:rPr lang="en-US" smtClean="0"/>
+              <a:rPr lang="en-US"/>
             </a:br>
             <a:r>
               <a:rPr lang="en-US" b="1">
@@ -4595,63 +4584,31 @@
                   <a:schemeClr val="accent1"/>
                 </a:solidFill>
               </a:rPr>
-              <a:t>Geometry of dual </a:t>
-            </a:r>
-            <a:r>
-              <a:rPr lang="en-US" b="1" smtClean="0">
+              <a:t>Geometry of dual structures</a:t>
+            </a:r>
+            <a:br>
+              <a:rPr lang="en-US" b="1">
                 <a:solidFill>
                   <a:schemeClr val="accent1"/>
                 </a:solidFill>
               </a:rPr>
-              <a:t>structures</a:t>
-            </a:r>
+            </a:br>
             <a:br>
-              <a:rPr lang="en-US" b="1" smtClean="0">
+              <a:rPr lang="en-US" b="1">
                 <a:solidFill>
                   <a:schemeClr val="accent1"/>
                 </a:solidFill>
               </a:rPr>
             </a:br>
-            <a:r>
-              <a:rPr lang="en-US" b="1" smtClean="0">
+            <a:br>
+              <a:rPr lang="en-US" sz="4800" b="1">
                 <a:solidFill>
                   <a:schemeClr val="accent1"/>
                 </a:solidFill>
               </a:rPr>
-              <a:t/>
-            </a:r>
+            </a:br>
             <a:br>
-              <a:rPr lang="en-US" b="1" smtClean="0">
-                <a:solidFill>
-                  <a:schemeClr val="accent1"/>
-                </a:solidFill>
-              </a:rPr>
-            </a:br>
-            <a:r>
-              <a:rPr lang="en-US" sz="4800" b="1" smtClean="0">
-                <a:solidFill>
-                  <a:schemeClr val="accent1"/>
-                </a:solidFill>
-              </a:rPr>
-              <a:t/>
-            </a:r>
-            <a:br>
-              <a:rPr lang="en-US" sz="4800" b="1" smtClean="0">
-                <a:solidFill>
-                  <a:schemeClr val="accent1"/>
-                </a:solidFill>
-              </a:rPr>
-            </a:br>
-            <a:r>
-              <a:rPr lang="en-US" sz="5400" b="1" smtClean="0">
-                <a:solidFill>
-                  <a:schemeClr val="accent1"/>
-                </a:solidFill>
-              </a:rPr>
-              <a:t/>
-            </a:r>
-            <a:br>
-              <a:rPr lang="en-US" sz="5400" b="1" smtClean="0">
+              <a:rPr lang="en-US" sz="5400" b="1">
                 <a:solidFill>
                   <a:schemeClr val="accent1"/>
                 </a:solidFill>
@@ -4686,7 +4643,7 @@
           <a:lstStyle/>
           <a:p>
             <a:r>
-              <a:rPr lang="en-US" sz="3600" smtClean="0"/>
+              <a:rPr lang="en-US" sz="3600"/>
               <a:t>Frank Nielsen</a:t>
             </a:r>
           </a:p>
@@ -4695,13 +4652,13 @@
           </a:p>
           <a:p>
             <a:r>
-              <a:rPr lang="en-US" smtClean="0"/>
+              <a:rPr lang="en-US"/>
               <a:t>Sony Computer Science Laboratories Inc</a:t>
             </a:r>
           </a:p>
           <a:p>
             <a:r>
-              <a:rPr lang="en-US" smtClean="0"/>
+              <a:rPr lang="en-US"/>
               <a:t>Tokyo, Japan</a:t>
             </a:r>
             <a:endParaRPr lang="fr-FR"/>
@@ -4761,7 +4718,7 @@
           <a:lstStyle/>
           <a:p>
             <a:r>
-              <a:rPr lang="en-US" sz="2400" smtClean="0"/>
+              <a:rPr lang="en-US" sz="2400"/>
               <a:t>2023</a:t>
             </a:r>
             <a:endParaRPr lang="fr-FR" sz="2400"/>
@@ -4790,28 +4747,12 @@
           <a:lstStyle/>
           <a:p>
             <a:r>
-              <a:rPr lang="en-US" sz="2800" b="1" smtClean="0">
+              <a:rPr lang="en-US" sz="2800" b="1">
                 <a:solidFill>
                   <a:schemeClr val="accent1"/>
                 </a:solidFill>
               </a:rPr>
-              <a:t>- A </a:t>
-            </a:r>
-            <a:r>
-              <a:rPr lang="en-US" sz="2800" b="1">
-                <a:solidFill>
-                  <a:schemeClr val="accent1"/>
-                </a:solidFill>
-              </a:rPr>
-              <a:t>very short </a:t>
-            </a:r>
-            <a:r>
-              <a:rPr lang="en-US" sz="2800" b="1" smtClean="0">
-                <a:solidFill>
-                  <a:schemeClr val="accent1"/>
-                </a:solidFill>
-              </a:rPr>
-              <a:t>introduction - </a:t>
+              <a:t>- A very short introduction - </a:t>
             </a:r>
             <a:endParaRPr lang="fr-FR" sz="2800"/>
           </a:p>
@@ -4827,13 +4768,6 @@
   <p:clrMapOvr>
     <a:masterClrMapping/>
   </p:clrMapOvr>
-  <p:timing>
-    <p:tnLst>
-      <p:par>
-        <p:cTn id="1" dur="indefinite" restart="never" nodeType="tmRoot"/>
-      </p:par>
-    </p:tnLst>
-  </p:timing>
 </p:sld>
 </file>
 
@@ -4875,7 +4809,7 @@
           <a:lstStyle/>
           <a:p>
             <a:r>
-              <a:rPr lang="en-US" b="1" smtClean="0">
+              <a:rPr lang="en-US" b="1">
                 <a:solidFill>
                   <a:schemeClr val="accent1"/>
                 </a:solidFill>
@@ -4919,11 +4853,11 @@
           <a:lstStyle/>
           <a:p>
             <a:r>
-              <a:rPr lang="en-US" smtClean="0"/>
+              <a:rPr lang="en-US"/>
               <a:t>For Riemannian structure (M,g), use default </a:t>
             </a:r>
             <a:r>
-              <a:rPr lang="en-US" b="1" smtClean="0">
+              <a:rPr lang="en-US" b="1">
                 <a:solidFill>
                   <a:srgbClr val="FF0000"/>
                 </a:solidFill>
@@ -4931,7 +4865,7 @@
               <a:t>Levi-Civita connection </a:t>
             </a:r>
             <a:r>
-              <a:rPr lang="fr-FR" b="1" smtClean="0">
+              <a:rPr lang="fr-FR" b="1">
                 <a:solidFill>
                   <a:srgbClr val="FF0000"/>
                 </a:solidFill>
@@ -4939,7 +4873,7 @@
               <a:t>∇=∇</a:t>
             </a:r>
             <a:r>
-              <a:rPr lang="fr-FR" b="1" baseline="30000" smtClean="0">
+              <a:rPr lang="fr-FR" b="1" baseline="30000">
                 <a:solidFill>
                   <a:srgbClr val="FF0000"/>
                 </a:solidFill>
@@ -4947,39 +4881,39 @@
               <a:t>g</a:t>
             </a:r>
             <a:r>
-              <a:rPr lang="en-US" smtClean="0"/>
+              <a:rPr lang="en-US"/>
               <a:t> </a:t>
             </a:r>
           </a:p>
           <a:p>
             <a:r>
-              <a:rPr lang="en-US" smtClean="0"/>
+              <a:rPr lang="en-US"/>
               <a:t>Riemannian manifolds of dim d can always be embedded into Euclidean spaces E</a:t>
             </a:r>
             <a:r>
-              <a:rPr lang="en-US" baseline="30000" smtClean="0"/>
+              <a:rPr lang="en-US" baseline="30000"/>
               <a:t>D</a:t>
             </a:r>
             <a:r>
-              <a:rPr lang="en-US" smtClean="0"/>
+              <a:rPr lang="en-US"/>
               <a:t> of dim D=O(d</a:t>
             </a:r>
             <a:r>
-              <a:rPr lang="en-US" baseline="30000" smtClean="0"/>
+              <a:rPr lang="en-US" baseline="30000"/>
               <a:t>2</a:t>
             </a:r>
             <a:r>
-              <a:rPr lang="en-US" smtClean="0"/>
+              <a:rPr lang="en-US"/>
               <a:t>)</a:t>
             </a:r>
           </a:p>
           <a:p>
             <a:r>
-              <a:rPr lang="en-US" smtClean="0"/>
+              <a:rPr lang="en-US"/>
               <a:t>Euclidean spaces have a natural affine connection </a:t>
             </a:r>
             <a:r>
-              <a:rPr lang="fr-FR" smtClean="0"/>
+              <a:rPr lang="fr-FR"/>
               <a:t>∇=∇</a:t>
             </a:r>
             <a:r>
@@ -4987,7 +4921,7 @@
               <a:t>E</a:t>
             </a:r>
             <a:r>
-              <a:rPr lang="en-US" smtClean="0"/>
+              <a:rPr lang="en-US"/>
               <a:t> </a:t>
             </a:r>
             <a:endParaRPr lang="fr-FR"/>
@@ -5104,16 +5038,12 @@
             </a:r>
             <a:r>
               <a:rPr lang="en-US" sz="2800"/>
-              <a:t>0 </a:t>
-            </a:r>
-            <a:r>
-              <a:rPr lang="en-US" sz="2800" smtClean="0"/>
-              <a:t>curvature:</a:t>
-            </a:r>
-          </a:p>
-          <a:p>
-            <a:r>
-              <a:rPr lang="en-US" sz="2800" b="1" smtClean="0">
+              <a:t>0 curvature:</a:t>
+            </a:r>
+          </a:p>
+          <a:p>
+            <a:r>
+              <a:rPr lang="en-US" sz="2800" b="1">
                 <a:solidFill>
                   <a:srgbClr val="FF0000"/>
                 </a:solidFill>
@@ -5121,13 +5051,13 @@
               <a:t>Parallel transport</a:t>
             </a:r>
             <a:r>
-              <a:rPr lang="en-US" sz="2800" smtClean="0"/>
+              <a:rPr lang="en-US" sz="2800"/>
               <a:t> along a loop of a vector preserves the orientation</a:t>
             </a:r>
           </a:p>
           <a:p>
             <a:r>
-              <a:rPr lang="en-US" sz="2000" smtClean="0"/>
+              <a:rPr lang="en-US" sz="2000"/>
               <a:t>(PT of flat connection is path independent)</a:t>
             </a:r>
             <a:endParaRPr lang="en-US" sz="2000" dirty="0"/>
@@ -5162,28 +5092,24 @@
             </a:r>
             <a:r>
               <a:rPr lang="en-US" sz="2800"/>
-              <a:t>constant </a:t>
-            </a:r>
-            <a:r>
-              <a:rPr lang="en-US" sz="2800" smtClean="0"/>
-              <a:t>curvature:</a:t>
-            </a:r>
-          </a:p>
-          <a:p>
-            <a:r>
-              <a:rPr lang="en-US" sz="2800" smtClean="0"/>
+              <a:t>constant curvature:</a:t>
+            </a:r>
+          </a:p>
+          <a:p>
+            <a:r>
+              <a:rPr lang="en-US" sz="2800"/>
               <a:t>Parallel transport along a loop exhibits</a:t>
             </a:r>
           </a:p>
           <a:p>
             <a:r>
-              <a:rPr lang="en-US" sz="2800" smtClean="0"/>
+              <a:rPr lang="en-US" sz="2800"/>
               <a:t>an angle defect related to curvature</a:t>
             </a:r>
           </a:p>
           <a:p>
             <a:r>
-              <a:rPr lang="en-US" sz="2000" smtClean="0"/>
+              <a:rPr lang="en-US" sz="2000"/>
               <a:t>(PT is path dependent)</a:t>
             </a:r>
             <a:endParaRPr lang="en-US" sz="2000" dirty="0"/>
@@ -5212,24 +5138,18 @@
           <a:lstStyle/>
           <a:p>
             <a:r>
-              <a:rPr lang="en-US" smtClean="0">
-                <a:latin typeface="Source Sans Pro"/>
-              </a:rPr>
-              <a:t>images courtesy</a:t>
-            </a:r>
-          </a:p>
-          <a:p>
-            <a:r>
-              <a:rPr lang="en-US" smtClean="0">
-                <a:latin typeface="Source Sans Pro"/>
-              </a:rPr>
-              <a:t>© </a:t>
-            </a:r>
-            <a:r>
               <a:rPr lang="en-US">
                 <a:latin typeface="Source Sans Pro"/>
               </a:rPr>
-              <a:t>CNRS</a:t>
+              <a:t>images courtesy</a:t>
+            </a:r>
+          </a:p>
+          <a:p>
+            <a:r>
+              <a:rPr lang="en-US">
+                <a:latin typeface="Source Sans Pro"/>
+              </a:rPr>
+              <a:t>© CNRS</a:t>
             </a:r>
             <a:endParaRPr lang="en-US"/>
           </a:p>
@@ -5245,13 +5165,6 @@
   <p:clrMapOvr>
     <a:masterClrMapping/>
   </p:clrMapOvr>
-  <p:timing>
-    <p:tnLst>
-      <p:par>
-        <p:cTn id="1" dur="indefinite" restart="never" nodeType="tmRoot"/>
-      </p:par>
-    </p:tnLst>
-  </p:timing>
 </p:sld>
 </file>
 
@@ -5360,7 +5273,7 @@
           <a:lstStyle/>
           <a:p>
             <a:r>
-              <a:rPr lang="en-US" b="1" smtClean="0">
+              <a:rPr lang="en-US" b="1">
                 <a:solidFill>
                   <a:schemeClr val="accent1"/>
                 </a:solidFill>
@@ -5368,7 +5281,7 @@
               <a:t>Dually flat spaces (M,g,</a:t>
             </a:r>
             <a:r>
-              <a:rPr lang="fr-FR" smtClean="0">
+              <a:rPr lang="fr-FR">
                 <a:solidFill>
                   <a:schemeClr val="accent1"/>
                 </a:solidFill>
@@ -5404,7 +5317,7 @@
           <a:lstStyle/>
           <a:p>
             <a:r>
-              <a:rPr lang="en-US" b="1" smtClean="0">
+              <a:rPr lang="en-US" b="1">
                 <a:solidFill>
                   <a:srgbClr val="FF0000"/>
                 </a:solidFill>
@@ -5412,11 +5325,11 @@
               <a:t>Fundamental theorem of information geometry</a:t>
             </a:r>
             <a:r>
-              <a:rPr lang="en-US" smtClean="0"/>
+              <a:rPr lang="en-US"/>
               <a:t>: If torsion-free affine connection </a:t>
             </a:r>
             <a:r>
-              <a:rPr lang="fr-FR" smtClean="0"/>
+              <a:rPr lang="fr-FR"/>
               <a:t>∇ is of constant curvature </a:t>
             </a:r>
             <a:r>
@@ -5424,45 +5337,45 @@
               <a:t>κ</a:t>
             </a:r>
             <a:r>
-              <a:rPr lang="fr-FR" smtClean="0"/>
+              <a:rPr lang="fr-FR"/>
               <a:t>, then curvature of dual torsion-free affine connection  ∇* is also constant  </a:t>
             </a:r>
             <a:r>
-              <a:rPr lang="el-GR" smtClean="0"/>
+              <a:rPr lang="el-GR"/>
               <a:t>κ</a:t>
             </a:r>
-            <a:endParaRPr lang="en-US" smtClean="0"/>
-          </a:p>
-          <a:p>
-            <a:endParaRPr lang="en-US" smtClean="0"/>
-          </a:p>
-          <a:p>
-            <a:r>
-              <a:rPr lang="en-US" u="sng" smtClean="0"/>
+            <a:endParaRPr lang="en-US"/>
+          </a:p>
+          <a:p>
+            <a:endParaRPr lang="en-US"/>
+          </a:p>
+          <a:p>
+            <a:r>
+              <a:rPr lang="en-US" u="sng"/>
               <a:t>Corollary</a:t>
             </a:r>
             <a:r>
-              <a:rPr lang="en-US" smtClean="0"/>
+              <a:rPr lang="en-US"/>
               <a:t>: if </a:t>
             </a:r>
             <a:r>
-              <a:rPr lang="fr-FR" smtClean="0"/>
+              <a:rPr lang="fr-FR"/>
               <a:t>∇ is flat  (</a:t>
             </a:r>
             <a:r>
-              <a:rPr lang="el-GR" smtClean="0"/>
+              <a:rPr lang="el-GR"/>
               <a:t>κ</a:t>
             </a:r>
             <a:r>
-              <a:rPr lang="en-US" smtClean="0"/>
+              <a:rPr lang="en-US"/>
               <a:t>=0</a:t>
             </a:r>
             <a:r>
-              <a:rPr lang="fr-FR" smtClean="0"/>
+              <a:rPr lang="fr-FR"/>
               <a:t>) then ∇* is flat             → </a:t>
             </a:r>
             <a:r>
-              <a:rPr lang="fr-FR" b="1" smtClean="0">
+              <a:rPr lang="fr-FR" b="1">
                 <a:solidFill>
                   <a:srgbClr val="FF0000"/>
                 </a:solidFill>
@@ -5470,7 +5383,7 @@
               <a:t>Dually flat space </a:t>
             </a:r>
             <a:r>
-              <a:rPr lang="en-US" b="1" smtClean="0">
+              <a:rPr lang="en-US" b="1">
                 <a:solidFill>
                   <a:srgbClr val="FF0000"/>
                 </a:solidFill>
@@ -5478,7 +5391,7 @@
               <a:t>(M,g,</a:t>
             </a:r>
             <a:r>
-              <a:rPr lang="fr-FR" b="1" smtClean="0">
+              <a:rPr lang="fr-FR" b="1">
                 <a:solidFill>
                   <a:srgbClr val="FF0000"/>
                 </a:solidFill>
@@ -5487,23 +5400,23 @@
             </a:r>
           </a:p>
           <a:p>
-            <a:endParaRPr lang="en-US" smtClean="0"/>
-          </a:p>
-          <a:p>
-            <a:r>
-              <a:rPr lang="en-US" smtClean="0"/>
+            <a:endParaRPr lang="en-US"/>
+          </a:p>
+          <a:p>
+            <a:r>
+              <a:rPr lang="en-US"/>
               <a:t>A connection </a:t>
             </a:r>
             <a:r>
-              <a:rPr lang="fr-FR" smtClean="0"/>
+              <a:rPr lang="fr-FR"/>
               <a:t>∇ is flat if there exists a local coordinate system </a:t>
             </a:r>
             <a:r>
-              <a:rPr lang="el-GR" smtClean="0"/>
+              <a:rPr lang="el-GR"/>
               <a:t>θ</a:t>
             </a:r>
             <a:r>
-              <a:rPr lang="en-US" smtClean="0"/>
+              <a:rPr lang="en-US"/>
               <a:t> such that </a:t>
             </a:r>
             <a:r>
@@ -5511,15 +5424,15 @@
               <a:t>Γ</a:t>
             </a:r>
             <a:r>
-              <a:rPr lang="en-US" smtClean="0"/>
+              <a:rPr lang="en-US"/>
               <a:t>(</a:t>
             </a:r>
             <a:r>
-              <a:rPr lang="el-GR" smtClean="0"/>
+              <a:rPr lang="el-GR"/>
               <a:t>θ</a:t>
             </a:r>
             <a:r>
-              <a:rPr lang="en-US" smtClean="0"/>
+              <a:rPr lang="en-US"/>
               <a:t>)=0</a:t>
             </a:r>
           </a:p>
@@ -5528,22 +5441,21 @@
           </a:p>
           <a:p>
             <a:r>
-              <a:rPr lang="en-US" smtClean="0"/>
+              <a:rPr lang="en-US"/>
               <a:t>In </a:t>
             </a:r>
             <a:r>
-              <a:rPr lang="fr-FR" smtClean="0"/>
+              <a:rPr lang="fr-FR"/>
               <a:t>∇-affine coordinate system </a:t>
             </a:r>
             <a:r>
-              <a:rPr lang="el-GR" smtClean="0"/>
+              <a:rPr lang="el-GR"/>
               <a:t>θ</a:t>
             </a:r>
             <a:r>
-              <a:rPr lang="fr-FR" smtClean="0"/>
+              <a:rPr lang="fr-FR"/>
               <a:t>(.), ∇-geodesics are visualized as line segments</a:t>
             </a:r>
-            <a:endParaRPr lang="fr-FR"/>
           </a:p>
         </p:txBody>
       </p:sp>
@@ -5688,19 +5600,19 @@
           <a:lstStyle/>
           <a:p>
             <a:r>
-              <a:rPr lang="el-GR" smtClean="0"/>
+              <a:rPr lang="el-GR"/>
               <a:t>Γ</a:t>
             </a:r>
             <a:r>
-              <a:rPr lang="en-US" smtClean="0"/>
+              <a:rPr lang="en-US"/>
               <a:t>(</a:t>
             </a:r>
             <a:r>
-              <a:rPr lang="el-GR" smtClean="0"/>
+              <a:rPr lang="el-GR"/>
               <a:t>θ</a:t>
             </a:r>
             <a:r>
-              <a:rPr lang="en-US" smtClean="0"/>
+              <a:rPr lang="en-US"/>
               <a:t>)=0</a:t>
             </a:r>
             <a:endParaRPr lang="fr-FR"/>
@@ -5729,18 +5641,17 @@
           <a:lstStyle/>
           <a:p>
             <a:r>
-              <a:rPr lang="fr-FR" smtClean="0"/>
+              <a:rPr lang="fr-FR"/>
               <a:t>geodesics=line segments in </a:t>
             </a:r>
             <a:r>
-              <a:rPr lang="el-GR" smtClean="0"/>
+              <a:rPr lang="el-GR"/>
               <a:t>θ</a:t>
             </a:r>
             <a:r>
-              <a:rPr lang="fr-FR" smtClean="0"/>
+              <a:rPr lang="fr-FR"/>
               <a:t> </a:t>
             </a:r>
-            <a:endParaRPr lang="fr-FR"/>
           </a:p>
         </p:txBody>
       </p:sp>
@@ -5754,13 +5665,6 @@
   <p:clrMapOvr>
     <a:masterClrMapping/>
   </p:clrMapOvr>
-  <p:timing>
-    <p:tnLst>
-      <p:par>
-        <p:cTn id="1" dur="indefinite" restart="never" nodeType="tmRoot"/>
-      </p:par>
-    </p:tnLst>
-  </p:timing>
 </p:sld>
 </file>
 
@@ -5850,28 +5754,12 @@
           <a:lstStyle/>
           <a:p>
             <a:r>
-              <a:rPr lang="en-US" b="1" smtClean="0">
+              <a:rPr lang="en-US" b="1">
                 <a:solidFill>
                   <a:schemeClr val="accent1"/>
                 </a:solidFill>
               </a:rPr>
-              <a:t>Canonical divergences of DFSs: </a:t>
-            </a:r>
-            <a:r>
-              <a:rPr lang="en-US" b="1">
-                <a:solidFill>
-                  <a:schemeClr val="accent1"/>
-                </a:solidFill>
-              </a:rPr>
-              <a:t>Bregman </a:t>
-            </a:r>
-            <a:r>
-              <a:rPr lang="en-US" b="1" smtClean="0">
-                <a:solidFill>
-                  <a:schemeClr val="accent1"/>
-                </a:solidFill>
-              </a:rPr>
-              <a:t>divergences </a:t>
+              <a:t>Canonical divergences of DFSs: Bregman divergences </a:t>
             </a:r>
             <a:endParaRPr lang="en-US" b="1" dirty="0">
               <a:solidFill>
@@ -5902,15 +5790,15 @@
           <a:lstStyle/>
           <a:p>
             <a:r>
-              <a:rPr lang="en-US" smtClean="0"/>
+              <a:rPr lang="en-US"/>
               <a:t>Dually flat structure (M,g,</a:t>
             </a:r>
             <a:r>
-              <a:rPr lang="fr-FR" smtClean="0"/>
+              <a:rPr lang="fr-FR"/>
               <a:t>∇,∇*) can be realized by a </a:t>
             </a:r>
             <a:r>
-              <a:rPr lang="fr-FR" b="1" smtClean="0">
+              <a:rPr lang="fr-FR" b="1">
                 <a:solidFill>
                   <a:srgbClr val="FF0000"/>
                 </a:solidFill>
@@ -5924,16 +5812,12 @@
             </a:pPr>
             <a:r>
               <a:rPr lang="en-US"/>
-              <a:t> </a:t>
-            </a:r>
-            <a:r>
-              <a:rPr lang="en-US" smtClean="0"/>
-              <a:t> </a:t>
-            </a:r>
-          </a:p>
-          <a:p>
-            <a:r>
-              <a:rPr lang="en-US" smtClean="0"/>
+              <a:t>  </a:t>
+            </a:r>
+          </a:p>
+          <a:p>
+            <a:r>
+              <a:rPr lang="en-US"/>
               <a:t>Let </a:t>
             </a:r>
             <a:r>
@@ -6306,13 +6190,6 @@
       <p:transition spd="slow" advTm="33268"/>
     </mc:Fallback>
   </mc:AlternateContent>
-  <p:timing>
-    <p:tnLst>
-      <p:par>
-        <p:cTn id="1" dur="indefinite" restart="never" nodeType="tmRoot"/>
-      </p:par>
-    </p:tnLst>
-  </p:timing>
 </p:sld>
 </file>
 
@@ -6354,7 +6231,7 @@
           <a:lstStyle/>
           <a:p>
             <a:r>
-              <a:rPr lang="en-US" b="1" smtClean="0">
+              <a:rPr lang="en-US" b="1">
                 <a:solidFill>
                   <a:schemeClr val="accent1"/>
                 </a:solidFill>
@@ -6362,7 +6239,7 @@
               <a:t>Legendre-</a:t>
             </a:r>
             <a:r>
-              <a:rPr lang="en-US" b="1" err="1" smtClean="0">
+              <a:rPr lang="en-US" b="1" err="1">
                 <a:solidFill>
                   <a:schemeClr val="accent1"/>
                 </a:solidFill>
@@ -6370,7 +6247,7 @@
               <a:t>Fenchel</a:t>
             </a:r>
             <a:r>
-              <a:rPr lang="en-US" b="1" smtClean="0">
+              <a:rPr lang="en-US" b="1">
                 <a:solidFill>
                   <a:schemeClr val="accent1"/>
                 </a:solidFill>
@@ -6378,7 +6255,7 @@
               <a:t> transformation: </a:t>
             </a:r>
             <a:r>
-              <a:rPr lang="en-US" sz="4000" b="1" smtClean="0">
+              <a:rPr lang="en-US" sz="4000" b="1">
                 <a:solidFill>
                   <a:schemeClr val="accent1"/>
                 </a:solidFill>
@@ -6416,11 +6293,11 @@
           <a:lstStyle/>
           <a:p>
             <a:r>
-              <a:rPr lang="en-US" dirty="0" smtClean="0"/>
+              <a:rPr lang="en-US" dirty="0"/>
               <a:t>Consider a Bregman generator of </a:t>
             </a:r>
             <a:r>
-              <a:rPr lang="en-US" b="1" dirty="0" smtClean="0">
+              <a:rPr lang="en-US" b="1" dirty="0">
                 <a:solidFill>
                   <a:srgbClr val="FF0000"/>
                 </a:solidFill>
@@ -6428,19 +6305,19 @@
               <a:t>Legendre-type </a:t>
             </a:r>
             <a:r>
-              <a:rPr lang="en-US" dirty="0" smtClean="0"/>
+              <a:rPr lang="en-US" dirty="0"/>
               <a:t>(proper, </a:t>
             </a:r>
             <a:r>
-              <a:rPr lang="en-US" smtClean="0"/>
+              <a:rPr lang="en-US"/>
               <a:t>lower semi-continuous+condition). </a:t>
             </a:r>
             <a:r>
-              <a:rPr lang="en-US" dirty="0" smtClean="0"/>
+              <a:rPr lang="en-US" dirty="0"/>
               <a:t>Then its </a:t>
             </a:r>
             <a:r>
-              <a:rPr lang="en-US" b="1" dirty="0" smtClean="0">
+              <a:rPr lang="en-US" b="1" dirty="0">
                 <a:solidFill>
                   <a:srgbClr val="FF0000"/>
                 </a:solidFill>
@@ -6448,11 +6325,11 @@
               <a:t>convex conjugate </a:t>
             </a:r>
             <a:r>
-              <a:rPr lang="en-US" dirty="0" smtClean="0"/>
+              <a:rPr lang="en-US" dirty="0"/>
               <a:t>obtained from the </a:t>
             </a:r>
             <a:r>
-              <a:rPr lang="en-US" b="1" dirty="0" smtClean="0">
+              <a:rPr lang="en-US" b="1" dirty="0">
                 <a:solidFill>
                   <a:srgbClr val="FF0000"/>
                 </a:solidFill>
@@ -6460,7 +6337,7 @@
               <a:t>Legendre-</a:t>
             </a:r>
             <a:r>
-              <a:rPr lang="en-US" b="1" dirty="0" err="1" smtClean="0">
+              <a:rPr lang="en-US" b="1" dirty="0" err="1">
                 <a:solidFill>
                   <a:srgbClr val="FF0000"/>
                 </a:solidFill>
@@ -6468,7 +6345,7 @@
               <a:t>Fenchel</a:t>
             </a:r>
             <a:r>
-              <a:rPr lang="en-US" b="1" dirty="0" smtClean="0">
+              <a:rPr lang="en-US" b="1" dirty="0">
                 <a:solidFill>
                   <a:srgbClr val="FF0000"/>
                 </a:solidFill>
@@ -6476,7 +6353,7 @@
               <a:t> transformation</a:t>
             </a:r>
             <a:r>
-              <a:rPr lang="en-US" dirty="0" smtClean="0"/>
+              <a:rPr lang="en-US" dirty="0"/>
               <a:t> is a Bregman generator of Legendre type.</a:t>
             </a:r>
           </a:p>
@@ -6484,7 +6361,7 @@
             <a:endParaRPr lang="en-US" dirty="0"/>
           </a:p>
           <a:p>
-            <a:endParaRPr lang="en-US" dirty="0" smtClean="0"/>
+            <a:endParaRPr lang="en-US" dirty="0"/>
           </a:p>
           <a:p>
             <a:endParaRPr lang="en-US" dirty="0"/>
@@ -6493,28 +6370,28 @@
             <a:pPr marL="0" indent="0">
               <a:buNone/>
             </a:pPr>
-            <a:endParaRPr lang="en-US" dirty="0" smtClean="0"/>
+            <a:endParaRPr lang="en-US" dirty="0"/>
           </a:p>
           <a:p>
             <a:pPr marL="0" indent="0">
               <a:buNone/>
             </a:pPr>
-            <a:endParaRPr lang="en-US" dirty="0" smtClean="0"/>
-          </a:p>
-          <a:p>
-            <a:endParaRPr lang="en-US" sz="2400" smtClean="0"/>
-          </a:p>
-          <a:p>
-            <a:r>
-              <a:rPr lang="en-US" sz="2400" smtClean="0"/>
+            <a:endParaRPr lang="en-US" dirty="0"/>
+          </a:p>
+          <a:p>
+            <a:endParaRPr lang="en-US" sz="2400"/>
+          </a:p>
+          <a:p>
+            <a:r>
+              <a:rPr lang="en-US" sz="2400"/>
               <a:t>Analogy </a:t>
             </a:r>
             <a:r>
-              <a:rPr lang="en-US" sz="2400" dirty="0" smtClean="0"/>
+              <a:rPr lang="en-US" sz="2400" dirty="0"/>
               <a:t>of the Halfspace/Vertex representation of the </a:t>
             </a:r>
             <a:r>
-              <a:rPr lang="en-US" sz="2400" b="1" dirty="0" smtClean="0">
+              <a:rPr lang="en-US" sz="2400" b="1" dirty="0">
                 <a:solidFill>
                   <a:srgbClr val="FF0000"/>
                 </a:solidFill>
@@ -6522,26 +6399,21 @@
               <a:t>epigraph</a:t>
             </a:r>
             <a:r>
-              <a:rPr lang="en-US" sz="2400" dirty="0" smtClean="0"/>
+              <a:rPr lang="en-US" sz="2400" dirty="0"/>
               <a:t> of F</a:t>
             </a:r>
-            <a:endParaRPr lang="en-US" sz="2400" dirty="0"/>
-          </a:p>
-          <a:p>
-            <a:r>
-              <a:rPr lang="en-US" dirty="0" err="1" smtClean="0"/>
+          </a:p>
+          <a:p>
+            <a:r>
+              <a:rPr lang="en-US" dirty="0" err="1"/>
               <a:t>Fenchel</a:t>
             </a:r>
             <a:r>
               <a:rPr lang="en-US" dirty="0"/>
-              <a:t>-</a:t>
-            </a:r>
-            <a:r>
-              <a:rPr lang="en-US" dirty="0" smtClean="0"/>
-              <a:t>Moreau’s </a:t>
-            </a:r>
-            <a:r>
-              <a:rPr lang="en-US" b="1" dirty="0" err="1" smtClean="0">
+              <a:t>-Moreau’s </a:t>
+            </a:r>
+            <a:r>
+              <a:rPr lang="en-US" b="1" dirty="0" err="1">
                 <a:solidFill>
                   <a:srgbClr val="FF0000"/>
                 </a:solidFill>
@@ -6549,7 +6421,7 @@
               <a:t>biconjugation</a:t>
             </a:r>
             <a:r>
-              <a:rPr lang="en-US" b="1" dirty="0" smtClean="0">
+              <a:rPr lang="en-US" b="1" dirty="0">
                 <a:solidFill>
                   <a:srgbClr val="FF0000"/>
                 </a:solidFill>
@@ -6557,10 +6429,9 @@
               <a:t> theorem </a:t>
             </a:r>
             <a:r>
-              <a:rPr lang="en-US" dirty="0" smtClean="0"/>
+              <a:rPr lang="en-US" dirty="0"/>
               <a:t>for F of Legendre-type:</a:t>
             </a:r>
-            <a:endParaRPr lang="en-US" dirty="0"/>
           </a:p>
         </p:txBody>
       </p:sp>
@@ -6586,7 +6457,7 @@
           <a:lstStyle/>
           <a:p>
             <a:r>
-              <a:rPr lang="en-US" sz="2000" b="1" dirty="0" smtClean="0">
+              <a:rPr lang="en-US" sz="2000" b="1" dirty="0">
                 <a:solidFill>
                   <a:schemeClr val="accent6"/>
                 </a:solidFill>
@@ -6594,7 +6465,7 @@
               <a:t>[</a:t>
             </a:r>
             <a:r>
-              <a:rPr lang="en-US" sz="2000" b="1" dirty="0" err="1" smtClean="0">
+              <a:rPr lang="en-US" sz="2000" b="1" dirty="0" err="1">
                 <a:solidFill>
                   <a:schemeClr val="accent6"/>
                 </a:solidFill>
@@ -6602,7 +6473,7 @@
               <a:t>Touchette</a:t>
             </a:r>
             <a:r>
-              <a:rPr lang="en-US" sz="2000" b="1" dirty="0" smtClean="0">
+              <a:rPr lang="en-US" sz="2000" b="1" dirty="0">
                 <a:solidFill>
                   <a:schemeClr val="accent6"/>
                 </a:solidFill>
@@ -6610,7 +6481,7 @@
               <a:t> 2005] Legendre-</a:t>
             </a:r>
             <a:r>
-              <a:rPr lang="en-US" sz="2000" b="1" dirty="0" err="1" smtClean="0">
+              <a:rPr lang="en-US" sz="2000" b="1" dirty="0" err="1">
                 <a:solidFill>
                   <a:schemeClr val="accent6"/>
                 </a:solidFill>
@@ -6618,7 +6489,7 @@
               <a:t>Fenchel</a:t>
             </a:r>
             <a:r>
-              <a:rPr lang="en-US" sz="2000" b="1" dirty="0" smtClean="0">
+              <a:rPr lang="en-US" sz="2000" b="1" dirty="0">
                 <a:solidFill>
                   <a:schemeClr val="accent6"/>
                 </a:solidFill>
@@ -6628,7 +6499,7 @@
           </a:p>
           <a:p>
             <a:r>
-              <a:rPr lang="en-US" sz="2000" b="1" smtClean="0">
+              <a:rPr lang="en-US" sz="2000" b="1">
                 <a:solidFill>
                   <a:schemeClr val="accent6"/>
                 </a:solidFill>
@@ -6636,18 +6507,13 @@
               <a:t>[2010</a:t>
             </a:r>
             <a:r>
-              <a:rPr lang="en-US" sz="2000" b="1" dirty="0" smtClean="0">
+              <a:rPr lang="en-US" sz="2000" b="1" dirty="0">
                 <a:solidFill>
                   <a:schemeClr val="accent6"/>
                 </a:solidFill>
               </a:rPr>
               <a:t>] Legendre transformation and information geometry</a:t>
             </a:r>
-            <a:endParaRPr lang="en-US" sz="2000" b="1" dirty="0">
-              <a:solidFill>
-                <a:schemeClr val="accent6"/>
-              </a:solidFill>
-            </a:endParaRPr>
           </a:p>
         </p:txBody>
       </p:sp>
@@ -6746,10 +6612,9 @@
           <a:lstStyle/>
           <a:p>
             <a:r>
-              <a:rPr lang="en-US" sz="2400" u="sng" dirty="0" smtClean="0"/>
+              <a:rPr lang="en-US" sz="2400" u="sng" dirty="0"/>
               <a:t>Concave programming:</a:t>
             </a:r>
-            <a:endParaRPr lang="en-US" sz="2400" u="sng" dirty="0"/>
           </a:p>
         </p:txBody>
       </p:sp>
@@ -6800,7 +6665,7 @@
           <a:lstStyle/>
           <a:p>
             <a:r>
-              <a:rPr lang="en-US" smtClean="0"/>
+              <a:rPr lang="en-US"/>
               <a:t>Epigraph</a:t>
             </a:r>
             <a:endParaRPr lang="fr-FR"/>
@@ -6830,7 +6695,7 @@
           <a:lstStyle/>
           <a:p>
             <a:r>
-              <a:rPr lang="en-US" smtClean="0"/>
+              <a:rPr lang="en-US"/>
               <a:t>Slope</a:t>
             </a:r>
             <a:endParaRPr lang="fr-FR"/>
@@ -6847,13 +6712,6 @@
   <p:clrMapOvr>
     <a:masterClrMapping/>
   </p:clrMapOvr>
-  <p:timing>
-    <p:tnLst>
-      <p:par>
-        <p:cTn id="1" dur="indefinite" restart="never" nodeType="tmRoot"/>
-      </p:par>
-    </p:tnLst>
-  </p:timing>
 </p:sld>
 </file>
 
@@ -6953,11 +6811,7 @@
             </a:r>
             <a:r>
               <a:rPr lang="en-US"/>
-              <a:t>only </a:t>
-            </a:r>
-            <a:r>
-              <a:rPr lang="en-US" smtClean="0"/>
-              <a:t>if</a:t>
+              <a:t>only if</a:t>
             </a:r>
             <a:endParaRPr lang="en-US" dirty="0"/>
           </a:p>
@@ -7517,13 +7371,6 @@
       <p:transition spd="slow" advTm="38783"/>
     </mc:Fallback>
   </mc:AlternateContent>
-  <p:timing>
-    <p:tnLst>
-      <p:par>
-        <p:cTn id="1" dur="indefinite" restart="never" nodeType="tmRoot"/>
-      </p:par>
-    </p:tnLst>
-  </p:timing>
 </p:sld>
 </file>
 
@@ -7765,7 +7612,7 @@
           <a:p>
             <a:pPr algn="ctr"/>
             <a:r>
-              <a:rPr lang="en-US" sz="2400" b="1" smtClean="0">
+              <a:rPr lang="en-US" sz="2400" b="1">
                 <a:solidFill>
                   <a:srgbClr val="FFC000"/>
                 </a:solidFill>
@@ -8036,11 +7883,11 @@
           <a:lstStyle/>
           <a:p>
             <a:r>
-              <a:rPr lang="en-US" sz="2800" smtClean="0"/>
+              <a:rPr lang="en-US" sz="2800"/>
               <a:t>In general, </a:t>
             </a:r>
             <a:r>
-              <a:rPr lang="en-US" sz="2800" b="1" smtClean="0">
+              <a:rPr lang="en-US" sz="2800" b="1">
                 <a:solidFill>
                   <a:srgbClr val="FF0000"/>
                 </a:solidFill>
@@ -8061,18 +7908,10 @@
                   <a:srgbClr val="FF0000"/>
                 </a:solidFill>
               </a:rPr>
-              <a:t>three </a:t>
-            </a:r>
-            <a:r>
-              <a:rPr lang="en-US" sz="2800" b="1" smtClean="0">
-                <a:solidFill>
-                  <a:srgbClr val="FF0000"/>
-                </a:solidFill>
-              </a:rPr>
-              <a:t>parameters</a:t>
-            </a:r>
-            <a:r>
-              <a:rPr lang="en-US" sz="2800" smtClean="0"/>
+              <a:t>three parameters</a:t>
+            </a:r>
+            <a:r>
+              <a:rPr lang="en-US" sz="2800"/>
               <a:t> = law of cosines</a:t>
             </a:r>
             <a:endParaRPr lang="en-US" sz="2800" dirty="0"/>
@@ -8097,13 +7936,6 @@
       <p:transition spd="slow" advTm="50710"/>
     </mc:Fallback>
   </mc:AlternateContent>
-  <p:timing>
-    <p:tnLst>
-      <p:par>
-        <p:cTn id="1" dur="indefinite" restart="never" nodeType="tmRoot"/>
-      </p:par>
-    </p:tnLst>
-  </p:timing>
 </p:sld>
 </file>
 
@@ -8206,13 +8038,6 @@
   <p:clrMapOvr>
     <a:masterClrMapping/>
   </p:clrMapOvr>
-  <p:timing>
-    <p:tnLst>
-      <p:par>
-        <p:cTn id="1" dur="indefinite" restart="never" nodeType="tmRoot"/>
-      </p:par>
-    </p:tnLst>
-  </p:timing>
 </p:sld>
 </file>
 
@@ -8256,7 +8081,7 @@
           <a:lstStyle/>
           <a:p>
             <a:r>
-              <a:rPr lang="en-US" sz="4000" b="1" smtClean="0">
+              <a:rPr lang="en-US" sz="4000" b="1">
                 <a:solidFill>
                   <a:schemeClr val="accent1"/>
                 </a:solidFill>
@@ -8272,7 +8097,7 @@
               <a:t>θ</a:t>
             </a:r>
             <a:r>
-              <a:rPr lang="en-US" sz="4000" b="1" smtClean="0">
+              <a:rPr lang="en-US" sz="4000" b="1">
                 <a:solidFill>
                   <a:schemeClr val="accent1"/>
                 </a:solidFill>
@@ -8308,19 +8133,15 @@
           <a:lstStyle/>
           <a:p>
             <a:r>
-              <a:rPr lang="en-US" smtClean="0"/>
-              <a:t>A </a:t>
-            </a:r>
-            <a:r>
-              <a:rPr lang="en-US"/>
-              <a:t>smooth strictly convex function F(</a:t>
-            </a:r>
-            <a:r>
-              <a:rPr lang="el-GR" smtClean="0"/>
+              <a:rPr lang="en-US"/>
+              <a:t>A smooth strictly convex function F(</a:t>
+            </a:r>
+            <a:r>
+              <a:rPr lang="el-GR"/>
               <a:t>θ</a:t>
             </a:r>
             <a:r>
-              <a:rPr lang="en-US" smtClean="0"/>
+              <a:rPr lang="en-US"/>
               <a:t>) define a Bregman divergence and hence a dually flat space via Eguchi's divergence-based IG</a:t>
             </a:r>
           </a:p>
@@ -8328,14 +8149,14 @@
             <a:endParaRPr lang="en-US"/>
           </a:p>
           <a:p>
-            <a:endParaRPr lang="en-US" smtClean="0"/>
-          </a:p>
-          <a:p>
             <a:endParaRPr lang="en-US"/>
           </a:p>
           <a:p>
-            <a:r>
-              <a:rPr lang="en-US" smtClean="0"/>
+            <a:endParaRPr lang="en-US"/>
+          </a:p>
+          <a:p>
+            <a:r>
+              <a:rPr lang="en-US"/>
               <a:t>Examples of DFSs induced by convex functions:</a:t>
             </a:r>
             <a:endParaRPr lang="fr-FR"/>
@@ -8389,7 +8210,7 @@
           <a:lstStyle/>
           <a:p>
             <a:r>
-              <a:rPr lang="en-US" smtClean="0"/>
+              <a:rPr lang="en-US"/>
               <a:t>Domain</a:t>
             </a:r>
             <a:endParaRPr lang="fr-FR"/>
@@ -8491,7 +8312,7 @@
           <a:lstStyle/>
           <a:p>
             <a:r>
-              <a:rPr lang="en-US" smtClean="0"/>
+              <a:rPr lang="en-US"/>
               <a:t>dual Bregman divergences</a:t>
             </a:r>
             <a:endParaRPr lang="fr-FR"/>
@@ -8567,13 +8388,13 @@
           <a:lstStyle/>
           <a:p>
             <a:r>
-              <a:rPr lang="en-US" sz="1600" smtClean="0"/>
+              <a:rPr lang="en-US" sz="1600"/>
               <a:t>this direction</a:t>
             </a:r>
           </a:p>
           <a:p>
             <a:r>
-              <a:rPr lang="en-US" sz="1600" smtClean="0"/>
+              <a:rPr lang="en-US" sz="1600"/>
               <a:t>not unique</a:t>
             </a:r>
             <a:endParaRPr lang="fr-FR" sz="1600"/>
@@ -8614,13 +8435,6 @@
   <p:clrMapOvr>
     <a:masterClrMapping/>
   </p:clrMapOvr>
-  <p:timing>
-    <p:tnLst>
-      <p:par>
-        <p:cTn id="1" dur="indefinite" restart="never" nodeType="tmRoot"/>
-      </p:par>
-    </p:tnLst>
-  </p:timing>
 </p:sld>
 </file>
 
@@ -8662,7 +8476,7 @@
           <a:lstStyle/>
           <a:p>
             <a:r>
-              <a:rPr lang="en-US" b="1" smtClean="0">
+              <a:rPr lang="en-US" b="1">
                 <a:solidFill>
                   <a:schemeClr val="accent1"/>
                 </a:solidFill>
@@ -8670,14 +8484,14 @@
               <a:t>Dual geometry of information geometry:</a:t>
             </a:r>
             <a:br>
-              <a:rPr lang="en-US" b="1" smtClean="0">
+              <a:rPr lang="en-US" b="1">
                 <a:solidFill>
                   <a:schemeClr val="accent1"/>
                 </a:solidFill>
               </a:rPr>
             </a:br>
             <a:r>
-              <a:rPr lang="en-US" b="1" smtClean="0">
+              <a:rPr lang="en-US" b="1">
                 <a:solidFill>
                   <a:schemeClr val="accent1"/>
                 </a:solidFill>
@@ -8718,7 +8532,7 @@
               <a:buNone/>
             </a:pPr>
             <a:r>
-              <a:rPr lang="en-US" sz="2000" smtClean="0"/>
+              <a:rPr lang="en-US" sz="2000"/>
               <a:t>Geometrize</a:t>
             </a:r>
           </a:p>
@@ -8728,14 +8542,10 @@
             </a:pPr>
             <a:r>
               <a:rPr lang="en-US" sz="2000"/>
-              <a:t>Objects</a:t>
-            </a:r>
-            <a:r>
-              <a:rPr lang="en-US" sz="2000"/>
-              <a:t>: </a:t>
-            </a:r>
-            <a:r>
-              <a:rPr lang="en-US" sz="2000" b="1" smtClean="0">
+              <a:t>Objects: </a:t>
+            </a:r>
+            <a:r>
+              <a:rPr lang="en-US" sz="2000" b="1">
                 <a:solidFill>
                   <a:schemeClr val="accent2"/>
                 </a:solidFill>
@@ -8748,7 +8558,7 @@
               <a:buNone/>
             </a:pPr>
             <a:r>
-              <a:rPr lang="en-US" sz="2000" smtClean="0"/>
+              <a:rPr lang="en-US" sz="2000"/>
               <a:t>duality = reverse divergence D*</a:t>
             </a:r>
           </a:p>
@@ -8763,7 +8573,7 @@
               <a:buNone/>
             </a:pPr>
             <a:r>
-              <a:rPr lang="en-US" sz="2400" smtClean="0"/>
+              <a:rPr lang="en-US" sz="2400"/>
               <a:t>(D*)*=D</a:t>
             </a:r>
           </a:p>
@@ -8772,12 +8582,8 @@
               <a:buNone/>
             </a:pPr>
             <a:r>
-              <a:rPr lang="fr-FR" sz="2400" smtClean="0"/>
-              <a:t>(</a:t>
-            </a:r>
-            <a:r>
               <a:rPr lang="fr-FR" sz="2400"/>
-              <a:t>∇</a:t>
+              <a:t>(∇</a:t>
             </a:r>
             <a:r>
               <a:rPr lang="en-US" sz="2400" baseline="30000"/>
@@ -8805,13 +8611,13 @@
             <a:pPr marL="0" indent="0" algn="ctr">
               <a:buNone/>
             </a:pPr>
-            <a:endParaRPr lang="en-US" sz="2000" smtClean="0"/>
+            <a:endParaRPr lang="en-US" sz="2000"/>
           </a:p>
           <a:p>
             <a:pPr marL="0" indent="0" algn="ctr">
               <a:buNone/>
             </a:pPr>
-            <a:endParaRPr lang="en-US" sz="2000" smtClean="0"/>
+            <a:endParaRPr lang="en-US" sz="2000"/>
           </a:p>
         </p:txBody>
       </p:sp>
@@ -9006,7 +8812,7 @@
               <a:buNone/>
             </a:pPr>
             <a:r>
-              <a:rPr lang="en-US" sz="2000" smtClean="0"/>
+              <a:rPr lang="en-US" sz="2000"/>
               <a:t>Geometrize</a:t>
             </a:r>
           </a:p>
@@ -9024,33 +8830,17 @@
                   <a:schemeClr val="accent2"/>
                 </a:solidFill>
               </a:rPr>
-              <a:t>Legendre </a:t>
-            </a:r>
-            <a:r>
-              <a:rPr lang="en-US" sz="2000" b="1">
+              <a:t>Legendre type functions</a:t>
+            </a:r>
+            <a:r>
+              <a:rPr lang="fr-FR" sz="2000" b="1">
                 <a:solidFill>
                   <a:schemeClr val="accent2"/>
                 </a:solidFill>
               </a:rPr>
-              <a:t>type </a:t>
-            </a:r>
-            <a:r>
-              <a:rPr lang="en-US" sz="2000" b="1" smtClean="0">
-                <a:solidFill>
-                  <a:schemeClr val="accent2"/>
-                </a:solidFill>
-              </a:rPr>
-              <a:t>functions</a:t>
-            </a:r>
-            <a:r>
-              <a:rPr lang="fr-FR" sz="2000" b="1" smtClean="0">
-                <a:solidFill>
-                  <a:schemeClr val="accent2"/>
-                </a:solidFill>
-              </a:rPr>
               <a:t> F</a:t>
             </a:r>
-            <a:endParaRPr lang="en-US" sz="2000" b="1" smtClean="0">
+            <a:endParaRPr lang="en-US" sz="2000" b="1">
               <a:solidFill>
                 <a:schemeClr val="accent2"/>
               </a:solidFill>
@@ -9062,7 +8852,7 @@
               <a:buNone/>
             </a:pPr>
             <a:r>
-              <a:rPr lang="en-US" sz="2000" smtClean="0"/>
+              <a:rPr lang="en-US" sz="2000"/>
               <a:t>duality = convex conjugate F*</a:t>
             </a:r>
           </a:p>
@@ -9079,10 +8869,9 @@
               <a:buNone/>
             </a:pPr>
             <a:r>
-              <a:rPr lang="en-US" sz="2400" smtClean="0"/>
+              <a:rPr lang="en-US" sz="2400"/>
               <a:t>(F*)*=F</a:t>
             </a:r>
-            <a:endParaRPr lang="en-US" sz="2400"/>
           </a:p>
           <a:p>
             <a:pPr marL="0" indent="0" algn="ctr">
@@ -9090,30 +8879,26 @@
             </a:pPr>
             <a:r>
               <a:rPr lang="fr-FR" sz="2400"/>
-              <a:t>(</a:t>
-            </a:r>
-            <a:r>
-              <a:rPr lang="fr-FR" sz="2400" smtClean="0"/>
+              <a:t>(∇</a:t>
+            </a:r>
+            <a:r>
+              <a:rPr lang="en-US" sz="2400" baseline="30000"/>
+              <a:t>F</a:t>
+            </a:r>
+            <a:r>
+              <a:rPr lang="en-US" sz="2400"/>
+              <a:t>,</a:t>
+            </a:r>
+            <a:r>
+              <a:rPr lang="fr-FR" sz="2400"/>
               <a:t>∇</a:t>
             </a:r>
             <a:r>
-              <a:rPr lang="en-US" sz="2400" baseline="30000" smtClean="0"/>
-              <a:t>F</a:t>
-            </a:r>
-            <a:r>
-              <a:rPr lang="en-US" sz="2400" smtClean="0"/>
-              <a:t>,</a:t>
-            </a:r>
-            <a:r>
-              <a:rPr lang="fr-FR" sz="2400" smtClean="0"/>
-              <a:t>∇</a:t>
-            </a:r>
-            <a:r>
-              <a:rPr lang="en-US" sz="2400" baseline="30000" smtClean="0"/>
+              <a:rPr lang="en-US" sz="2400" baseline="30000"/>
               <a:t>F*</a:t>
             </a:r>
             <a:r>
-              <a:rPr lang="en-US" sz="2400" smtClean="0"/>
+              <a:rPr lang="en-US" sz="2400"/>
               <a:t>)</a:t>
             </a:r>
             <a:endParaRPr lang="fr-FR" sz="2400"/>
@@ -9123,7 +8908,7 @@
               <a:buFont typeface="Arial" panose="020B0604020202020204" pitchFamily="34" charset="0"/>
               <a:buNone/>
             </a:pPr>
-            <a:endParaRPr lang="en-US" sz="2000" smtClean="0"/>
+            <a:endParaRPr lang="en-US" sz="2000"/>
           </a:p>
         </p:txBody>
       </p:sp>
@@ -9318,7 +9103,7 @@
               <a:buNone/>
             </a:pPr>
             <a:r>
-              <a:rPr lang="en-US" sz="2000" smtClean="0"/>
+              <a:rPr lang="en-US" sz="2000"/>
               <a:t>Geometrize</a:t>
             </a:r>
           </a:p>
@@ -9328,14 +9113,10 @@
             </a:pPr>
             <a:r>
               <a:rPr lang="en-US" sz="2000"/>
-              <a:t>Type</a:t>
-            </a:r>
-            <a:r>
-              <a:rPr lang="en-US" sz="2000"/>
-              <a:t>: </a:t>
-            </a:r>
-            <a:r>
-              <a:rPr lang="en-US" sz="2000" b="1" smtClean="0">
+              <a:t>Type: </a:t>
+            </a:r>
+            <a:r>
+              <a:rPr lang="en-US" sz="2000" b="1">
                 <a:solidFill>
                   <a:schemeClr val="accent2"/>
                 </a:solidFill>
@@ -9349,11 +9130,11 @@
               <a:buNone/>
             </a:pPr>
             <a:r>
-              <a:rPr lang="en-US" sz="2000" smtClean="0"/>
+              <a:rPr lang="en-US" sz="2000"/>
               <a:t>duality f* = reciprocal f</a:t>
             </a:r>
             <a:r>
-              <a:rPr lang="en-US" sz="2000" baseline="30000" smtClean="0"/>
+              <a:rPr lang="en-US" sz="2000" baseline="30000"/>
               <a:t>-1</a:t>
             </a:r>
           </a:p>
@@ -9369,7 +9150,7 @@
               <a:buFont typeface="Arial" panose="020B0604020202020204" pitchFamily="34" charset="0"/>
               <a:buNone/>
             </a:pPr>
-            <a:endParaRPr lang="en-US" sz="2000" baseline="30000" smtClean="0"/>
+            <a:endParaRPr lang="en-US" sz="2000" baseline="30000"/>
           </a:p>
           <a:p>
             <a:pPr marL="0" indent="0" algn="ctr">
@@ -9378,17 +9159,8 @@
             </a:pPr>
             <a:r>
               <a:rPr lang="en-US" sz="2400"/>
-              <a:t>(f</a:t>
-            </a:r>
-            <a:r>
-              <a:rPr lang="en-US" sz="2400"/>
-              <a:t>*)*=</a:t>
-            </a:r>
-            <a:r>
-              <a:rPr lang="en-US" sz="2400" smtClean="0"/>
-              <a:t>f</a:t>
-            </a:r>
-            <a:endParaRPr lang="en-US" sz="2400"/>
+              <a:t>(f*)*=f</a:t>
+            </a:r>
           </a:p>
           <a:p>
             <a:pPr marL="0" indent="0" algn="ctr">
@@ -9425,7 +9197,7 @@
               <a:buFont typeface="Arial" panose="020B0604020202020204" pitchFamily="34" charset="0"/>
               <a:buNone/>
             </a:pPr>
-            <a:endParaRPr lang="en-US" sz="2000" baseline="30000" smtClean="0"/>
+            <a:endParaRPr lang="en-US" sz="2000" baseline="30000"/>
           </a:p>
           <a:p>
             <a:pPr marL="0" indent="0" algn="ctr">
@@ -9433,7 +9205,7 @@
               <a:buNone/>
             </a:pPr>
             <a:r>
-              <a:rPr lang="en-US" sz="2000" smtClean="0"/>
+              <a:rPr lang="en-US" sz="2000"/>
               <a:t> </a:t>
             </a:r>
             <a:endParaRPr lang="fr-FR" sz="2000"/>
@@ -9463,14 +9235,13 @@
           <a:lstStyle/>
           <a:p>
             <a:r>
-              <a:rPr lang="en-US" sz="2800" smtClean="0"/>
+              <a:rPr lang="en-US" sz="2800"/>
               <a:t>A pair of (torsion-free) affine connections (</a:t>
             </a:r>
             <a:r>
-              <a:rPr lang="fr-FR" sz="2800" smtClean="0"/>
+              <a:rPr lang="fr-FR" sz="2800"/>
               <a:t>∇,∇*) with (∇*)*=∇</a:t>
             </a:r>
-            <a:endParaRPr lang="fr-FR" sz="2800"/>
           </a:p>
         </p:txBody>
       </p:sp>
@@ -9497,11 +9268,11 @@
           <a:lstStyle/>
           <a:p>
             <a:r>
-              <a:rPr lang="en-US" sz="2400" u="sng" smtClean="0"/>
+              <a:rPr lang="en-US" sz="2400" u="sng"/>
               <a:t>Examples</a:t>
             </a:r>
             <a:r>
-              <a:rPr lang="en-US" smtClean="0"/>
+              <a:rPr lang="en-US"/>
               <a:t>:</a:t>
             </a:r>
             <a:endParaRPr lang="fr-FR"/>
@@ -9531,7 +9302,7 @@
           <a:lstStyle/>
           <a:p>
             <a:r>
-              <a:rPr lang="en-US" sz="2400" b="1" smtClean="0">
+              <a:rPr lang="en-US" sz="2400" b="1">
                 <a:solidFill>
                   <a:srgbClr val="00B0F0"/>
                 </a:solidFill>
@@ -9569,7 +9340,7 @@
           <a:lstStyle/>
           <a:p>
             <a:r>
-              <a:rPr lang="en-US" sz="2400" b="1" smtClean="0">
+              <a:rPr lang="en-US" sz="2400" b="1">
                 <a:solidFill>
                   <a:srgbClr val="00B0F0"/>
                 </a:solidFill>
@@ -9608,7 +9379,7 @@
           <a:p>
             <a:pPr algn="ctr"/>
             <a:r>
-              <a:rPr lang="en-US" sz="2400" b="1" smtClean="0">
+              <a:rPr lang="en-US" sz="2400" b="1">
                 <a:solidFill>
                   <a:srgbClr val="00B0F0"/>
                 </a:solidFill>
@@ -9619,7 +9390,7 @@
           <a:p>
             <a:pPr algn="ctr"/>
             <a:r>
-              <a:rPr lang="en-US" sz="2400" b="1" smtClean="0">
+              <a:rPr lang="en-US" sz="2400" b="1">
                 <a:solidFill>
                   <a:srgbClr val="00B0F0"/>
                 </a:solidFill>
@@ -9635,7 +9406,7 @@
               <a:t>±</a:t>
             </a:r>
             <a:r>
-              <a:rPr lang="el-GR" sz="2400" b="1" smtClean="0">
+              <a:rPr lang="el-GR" sz="2400" b="1">
                 <a:solidFill>
                   <a:srgbClr val="00B0F0"/>
                 </a:solidFill>
@@ -9643,7 +9414,7 @@
               <a:t>α</a:t>
             </a:r>
             <a:r>
-              <a:rPr lang="en-US" sz="2400" b="1" smtClean="0">
+              <a:rPr lang="en-US" sz="2400" b="1">
                 <a:solidFill>
                   <a:srgbClr val="00B0F0"/>
                 </a:solidFill>
@@ -9681,11 +9452,11 @@
           <a:lstStyle/>
           <a:p>
             <a:r>
-              <a:rPr lang="en-US" sz="2400" u="sng" smtClean="0"/>
+              <a:rPr lang="en-US" sz="2400" u="sng"/>
               <a:t>Geometric terminology</a:t>
             </a:r>
             <a:r>
-              <a:rPr lang="en-US" sz="2400" smtClean="0"/>
+              <a:rPr lang="en-US" sz="2400"/>
               <a:t>:</a:t>
             </a:r>
             <a:endParaRPr lang="fr-FR"/>
@@ -9889,13 +9660,6 @@
   <p:clrMapOvr>
     <a:masterClrMapping/>
   </p:clrMapOvr>
-  <p:timing>
-    <p:tnLst>
-      <p:par>
-        <p:cTn id="1" dur="indefinite" restart="never" nodeType="tmRoot"/>
-      </p:par>
-    </p:tnLst>
-  </p:timing>
 </p:sld>
 </file>
 
@@ -9937,18 +9701,13 @@
           <a:lstStyle/>
           <a:p>
             <a:r>
-              <a:rPr lang="fr-FR" b="1" smtClean="0">
+              <a:rPr lang="fr-FR" b="1">
                 <a:solidFill>
                   <a:schemeClr val="accent1"/>
                 </a:solidFill>
               </a:rPr>
               <a:t>Some references</a:t>
             </a:r>
-            <a:endParaRPr lang="fr-FR" b="1">
-              <a:solidFill>
-                <a:schemeClr val="accent1"/>
-              </a:solidFill>
-            </a:endParaRPr>
           </a:p>
         </p:txBody>
       </p:sp>
@@ -9994,21 +9753,13 @@
             </a:r>
             <a:r>
               <a:rPr lang="fr-FR"/>
-              <a:t>. Vol. 191. American Mathematical Soc., 2000</a:t>
-            </a:r>
-            <a:r>
-              <a:rPr lang="fr-FR" smtClean="0"/>
-              <a:t>.</a:t>
-            </a:r>
-          </a:p>
-          <a:p>
-            <a:r>
-              <a:rPr lang="en-US" smtClean="0"/>
-              <a:t>Amari</a:t>
-            </a:r>
-            <a:r>
-              <a:rPr lang="en-US"/>
-              <a:t>, Shun-ichi. </a:t>
+              <a:t>. Vol. 191. American Mathematical Soc., 2000.</a:t>
+            </a:r>
+          </a:p>
+          <a:p>
+            <a:r>
+              <a:rPr lang="en-US"/>
+              <a:t>Amari, Shun-ichi. </a:t>
             </a:r>
             <a:r>
               <a:rPr lang="en-US" b="1" i="1">
@@ -10020,20 +9771,16 @@
             </a:r>
             <a:r>
               <a:rPr lang="en-US"/>
-              <a:t>. Vol. 194. Springer, 2016</a:t>
-            </a:r>
-            <a:r>
-              <a:rPr lang="en-US" smtClean="0"/>
-              <a:t>.</a:t>
-            </a:r>
-          </a:p>
-          <a:p>
-            <a:r>
-              <a:rPr lang="en-US" smtClean="0"/>
+              <a:t>. Vol. 194. Springer, 2016.</a:t>
+            </a:r>
+          </a:p>
+          <a:p>
+            <a:r>
+              <a:rPr lang="en-US"/>
               <a:t>Calin, Ovidiu, and Constantin Udrişte. </a:t>
             </a:r>
             <a:r>
-              <a:rPr lang="en-US" b="1" i="1" smtClean="0">
+              <a:rPr lang="en-US" b="1" i="1">
                 <a:solidFill>
                   <a:schemeClr val="accent6"/>
                 </a:solidFill>
@@ -10041,18 +9788,14 @@
               <a:t>Geometric modeling in probability and statistics</a:t>
             </a:r>
             <a:r>
-              <a:rPr lang="en-US" smtClean="0"/>
+              <a:rPr lang="en-US"/>
               <a:t>. Vol. 121. Berlin, Germany:: Springer, 2014.</a:t>
             </a:r>
           </a:p>
           <a:p>
             <a:r>
-              <a:rPr lang="en-US" smtClean="0"/>
-              <a:t>Nielsen</a:t>
-            </a:r>
-            <a:r>
-              <a:rPr lang="en-US"/>
-              <a:t>, Frank. "An elementary introduction to information geometry." </a:t>
+              <a:rPr lang="en-US"/>
+              <a:t>Nielsen, Frank. "An elementary introduction to information geometry." </a:t>
             </a:r>
             <a:r>
               <a:rPr lang="en-US" i="1"/>
@@ -10060,21 +9803,13 @@
             </a:r>
             <a:r>
               <a:rPr lang="en-US"/>
-              <a:t> 22.10 (2020): 1100</a:t>
-            </a:r>
-            <a:r>
-              <a:rPr lang="en-US" smtClean="0"/>
-              <a:t>.</a:t>
-            </a:r>
-          </a:p>
-          <a:p>
-            <a:r>
-              <a:rPr lang="en-US" smtClean="0"/>
-              <a:t>Nielsen</a:t>
-            </a:r>
-            <a:r>
-              <a:rPr lang="en-US"/>
-              <a:t>, Frank. "Legendre transformation and information geometry." </a:t>
+              <a:t> 22.10 (2020): 1100.</a:t>
+            </a:r>
+          </a:p>
+          <a:p>
+            <a:r>
+              <a:rPr lang="en-US"/>
+              <a:t>Nielsen, Frank. "Legendre transformation and information geometry." </a:t>
             </a:r>
             <a:r>
               <a:rPr lang="en-US" i="1"/>
@@ -10082,11 +9817,7 @@
             </a:r>
             <a:r>
               <a:rPr lang="en-US"/>
-              <a:t> (2010</a:t>
-            </a:r>
-            <a:r>
-              <a:rPr lang="en-US" smtClean="0"/>
-              <a:t>).</a:t>
+              <a:t> (2010).</a:t>
             </a:r>
           </a:p>
           <a:p>
@@ -10100,15 +9831,7 @@
             </a:r>
             <a:r>
               <a:rPr lang="en-US"/>
-              <a:t>. </a:t>
-            </a:r>
-            <a:r>
-              <a:rPr lang="en-US" smtClean="0"/>
-              <a:t>  Springer, </a:t>
-            </a:r>
-            <a:r>
-              <a:rPr lang="en-US"/>
-              <a:t>2021. 153-190.</a:t>
+              <a:t>.   Springer, 2021. 153-190.</a:t>
             </a:r>
             <a:endParaRPr lang="fr-FR"/>
           </a:p>
@@ -10124,13 +9847,6 @@
   <p:clrMapOvr>
     <a:masterClrMapping/>
   </p:clrMapOvr>
-  <p:timing>
-    <p:tnLst>
-      <p:par>
-        <p:cTn id="1" dur="indefinite" restart="never" nodeType="tmRoot"/>
-      </p:par>
-    </p:tnLst>
-  </p:timing>
 </p:sld>
 </file>
 
@@ -10172,7 +9888,7 @@
           <a:lstStyle/>
           <a:p>
             <a:r>
-              <a:rPr lang="en-US" b="1" smtClean="0">
+              <a:rPr lang="en-US" b="1">
                 <a:solidFill>
                   <a:schemeClr val="accent1"/>
                 </a:solidFill>
@@ -10208,11 +9924,11 @@
           <a:lstStyle/>
           <a:p>
             <a:r>
-              <a:rPr lang="en-US" smtClean="0"/>
+              <a:rPr lang="en-US"/>
               <a:t>IG field originally born by investigating </a:t>
             </a:r>
             <a:r>
-              <a:rPr lang="en-US" b="1" smtClean="0">
+              <a:rPr lang="en-US" b="1">
                 <a:solidFill>
                   <a:srgbClr val="FF0000"/>
                 </a:solidFill>
@@ -10220,135 +9936,130 @@
               <a:t>geometric structures</a:t>
             </a:r>
             <a:r>
-              <a:rPr lang="en-US" smtClean="0"/>
+              <a:rPr lang="en-US"/>
               <a:t> of statistical/probability models (e.g, space of Gaussians, space of multinomials)</a:t>
             </a:r>
+          </a:p>
+          <a:p>
+            <a:r>
+              <a:rPr lang="en-US" b="1">
+                <a:solidFill>
+                  <a:srgbClr val="FF0000"/>
+                </a:solidFill>
+              </a:rPr>
+              <a:t>Statistical models</a:t>
+            </a:r>
+            <a:r>
+              <a:rPr lang="en-US"/>
+              <a:t>: parametric vs nonparametric models, regular vs singular (ML) models, hierarchical (ML) or simple models, ...</a:t>
+            </a:r>
+          </a:p>
+          <a:p>
+            <a:r>
+              <a:rPr lang="en-US"/>
+              <a:t>Define </a:t>
+            </a:r>
+            <a:r>
+              <a:rPr lang="en-US" b="1">
+                <a:solidFill>
+                  <a:srgbClr val="FF0000"/>
+                </a:solidFill>
+              </a:rPr>
+              <a:t>statistical invariance</a:t>
+            </a:r>
+            <a:r>
+              <a:rPr lang="en-US"/>
+              <a:t>, use </a:t>
+            </a:r>
+            <a:r>
+              <a:rPr lang="en-US" b="1">
+                <a:solidFill>
+                  <a:srgbClr val="FF0000"/>
+                </a:solidFill>
+              </a:rPr>
+              <a:t>language of geometry</a:t>
+            </a:r>
+            <a:r>
+              <a:rPr lang="en-US"/>
+              <a:t> (e.g., ball, projection, bisector) to design algorithms in statistics, information theory, statistical machine learning, etc.</a:t>
+            </a:r>
+          </a:p>
+          <a:p>
+            <a:r>
+              <a:rPr lang="en-US"/>
+              <a:t>IG study </a:t>
+            </a:r>
+            <a:r>
+              <a:rPr lang="en-US" b="1">
+                <a:solidFill>
+                  <a:srgbClr val="FF0000"/>
+                </a:solidFill>
+              </a:rPr>
+              <a:t>interplays</a:t>
+            </a:r>
+            <a:r>
+              <a:rPr lang="en-US"/>
+              <a:t> of </a:t>
+            </a:r>
+            <a:r>
+              <a:rPr lang="en-US" b="1">
+                <a:solidFill>
+                  <a:srgbClr val="FF0000"/>
+                </a:solidFill>
+              </a:rPr>
+              <a:t>statistical/parameter divergences</a:t>
+            </a:r>
+            <a:r>
+              <a:rPr lang="en-US"/>
+              <a:t> with geometric structures</a:t>
+            </a:r>
+          </a:p>
+          <a:p>
+            <a:r>
+              <a:rPr lang="en-US"/>
+              <a:t>Relationships between </a:t>
+            </a:r>
+            <a:r>
+              <a:rPr lang="en-US" b="1">
+                <a:solidFill>
+                  <a:srgbClr val="FF0000"/>
+                </a:solidFill>
+              </a:rPr>
+              <a:t>many types of dualities </a:t>
+            </a:r>
+            <a:r>
+              <a:rPr lang="en-US"/>
+              <a:t>in IG: dual connections, reference duality (dual f-divergences), Legendre duality, duality of representations/monotone embeddings, etc</a:t>
+            </a:r>
+          </a:p>
+          <a:p>
+            <a:r>
+              <a:rPr lang="en-US" b="1">
+                <a:solidFill>
+                  <a:srgbClr val="FF0000"/>
+                </a:solidFill>
+              </a:rPr>
+              <a:t>Pure geometric dual structures</a:t>
+            </a:r>
+            <a:r>
+              <a:rPr lang="en-US"/>
+              <a:t> which can be used in many different contexts</a:t>
+            </a:r>
+          </a:p>
+          <a:p>
             <a:endParaRPr lang="en-US"/>
-          </a:p>
-          <a:p>
-            <a:r>
-              <a:rPr lang="en-US" b="1" smtClean="0">
-                <a:solidFill>
-                  <a:srgbClr val="FF0000"/>
-                </a:solidFill>
-              </a:rPr>
-              <a:t>Statistical models</a:t>
-            </a:r>
-            <a:r>
-              <a:rPr lang="en-US" smtClean="0"/>
-              <a:t>: parametric vs nonparametric models, regular vs singular (ML) models, hierarchical (ML) or simple models, ...</a:t>
-            </a:r>
-          </a:p>
-          <a:p>
-            <a:r>
-              <a:rPr lang="en-US" smtClean="0"/>
-              <a:t>Define </a:t>
-            </a:r>
-            <a:r>
-              <a:rPr lang="en-US" b="1" smtClean="0">
-                <a:solidFill>
-                  <a:srgbClr val="FF0000"/>
-                </a:solidFill>
-              </a:rPr>
-              <a:t>statistical invariance</a:t>
-            </a:r>
-            <a:r>
-              <a:rPr lang="en-US" smtClean="0"/>
-              <a:t>, use </a:t>
-            </a:r>
-            <a:r>
-              <a:rPr lang="en-US" b="1" smtClean="0">
-                <a:solidFill>
-                  <a:srgbClr val="FF0000"/>
-                </a:solidFill>
-              </a:rPr>
-              <a:t>language of geometry</a:t>
-            </a:r>
-            <a:r>
-              <a:rPr lang="en-US" smtClean="0"/>
-              <a:t> (e.g., ball, projection, bisector) to design algorithms in statistics, information theory, statistical machine learning, etc.</a:t>
-            </a:r>
-          </a:p>
-          <a:p>
-            <a:r>
-              <a:rPr lang="en-US" smtClean="0"/>
-              <a:t>IG study </a:t>
-            </a:r>
-            <a:r>
-              <a:rPr lang="en-US" b="1" smtClean="0">
-                <a:solidFill>
-                  <a:srgbClr val="FF0000"/>
-                </a:solidFill>
-              </a:rPr>
-              <a:t>interplays</a:t>
-            </a:r>
-            <a:r>
-              <a:rPr lang="en-US" smtClean="0"/>
-              <a:t> of </a:t>
-            </a:r>
-            <a:r>
-              <a:rPr lang="en-US" b="1" smtClean="0">
-                <a:solidFill>
-                  <a:srgbClr val="FF0000"/>
-                </a:solidFill>
-              </a:rPr>
-              <a:t>statistical/parameter divergences</a:t>
-            </a:r>
-            <a:r>
-              <a:rPr lang="en-US" smtClean="0"/>
-              <a:t> with geometric structures</a:t>
-            </a:r>
-          </a:p>
-          <a:p>
-            <a:r>
-              <a:rPr lang="en-US"/>
-              <a:t>R</a:t>
-            </a:r>
-            <a:r>
-              <a:rPr lang="en-US" smtClean="0"/>
-              <a:t>elationships between </a:t>
-            </a:r>
-            <a:r>
-              <a:rPr lang="en-US" b="1" smtClean="0">
-                <a:solidFill>
-                  <a:srgbClr val="FF0000"/>
-                </a:solidFill>
-              </a:rPr>
-              <a:t>many types of dualities </a:t>
-            </a:r>
-            <a:r>
-              <a:rPr lang="en-US" smtClean="0"/>
-              <a:t>in IG: dual connections, reference duality (dual f-divergences), Legendre duality, duality of representations/monotone embeddings, etc</a:t>
-            </a:r>
-          </a:p>
-          <a:p>
-            <a:r>
-              <a:rPr lang="en-US" b="1" smtClean="0">
-                <a:solidFill>
-                  <a:srgbClr val="FF0000"/>
-                </a:solidFill>
-              </a:rPr>
-              <a:t>Pure geometric dual structures</a:t>
-            </a:r>
-            <a:r>
-              <a:rPr lang="en-US" smtClean="0"/>
-              <a:t> which can be used in many different contexts</a:t>
-            </a:r>
-          </a:p>
-          <a:p>
-            <a:endParaRPr lang="en-US" smtClean="0"/>
           </a:p>
           <a:p>
             <a:pPr marL="0" indent="0">
               <a:buNone/>
             </a:pPr>
             <a:r>
-              <a:rPr lang="en-US" smtClean="0"/>
+              <a:rPr lang="en-US"/>
               <a:t> </a:t>
             </a:r>
           </a:p>
           <a:p>
-            <a:endParaRPr lang="en-US" smtClean="0"/>
+            <a:endParaRPr lang="en-US"/>
           </a:p>
           <a:p>
             <a:endParaRPr lang="en-US"/>
@@ -10357,7 +10068,7 @@
             <a:pPr marL="0" indent="0">
               <a:buNone/>
             </a:pPr>
-            <a:endParaRPr lang="en-US" smtClean="0"/>
+            <a:endParaRPr lang="en-US"/>
           </a:p>
           <a:p>
             <a:endParaRPr lang="en-US"/>
@@ -10377,13 +10088,6 @@
   <p:clrMapOvr>
     <a:masterClrMapping/>
   </p:clrMapOvr>
-  <p:timing>
-    <p:tnLst>
-      <p:par>
-        <p:cTn id="1" dur="indefinite" restart="never" nodeType="tmRoot"/>
-      </p:par>
-    </p:tnLst>
-  </p:timing>
 </p:sld>
 </file>
 
@@ -10449,7 +10153,7 @@
           <a:lstStyle/>
           <a:p>
             <a:r>
-              <a:rPr lang="en-US" b="1" smtClean="0">
+              <a:rPr lang="en-US" b="1">
                 <a:solidFill>
                   <a:schemeClr val="accent1"/>
                 </a:solidFill>
@@ -10488,18 +10192,14 @@
           <a:p>
             <a:r>
               <a:rPr lang="fr-FR"/>
-              <a:t> </a:t>
-            </a:r>
-            <a:r>
-              <a:rPr lang="fr-FR" smtClean="0"/>
-              <a:t>① </a:t>
-            </a:r>
-            <a:r>
-              <a:rPr lang="en-US" sz="2400" smtClean="0"/>
+              <a:t> ① </a:t>
+            </a:r>
+            <a:r>
+              <a:rPr lang="en-US" sz="2400"/>
               <a:t>  </a:t>
             </a:r>
             <a:r>
-              <a:rPr lang="en-US" sz="2400" smtClean="0">
+              <a:rPr lang="en-US" sz="2400">
                 <a:solidFill>
                   <a:srgbClr val="0000FF"/>
                 </a:solidFill>
@@ -10537,15 +10237,15 @@
           <a:lstStyle/>
           <a:p>
             <a:r>
-              <a:rPr lang="fr-FR" smtClean="0"/>
+              <a:rPr lang="fr-FR"/>
               <a:t>② </a:t>
             </a:r>
             <a:r>
-              <a:rPr lang="en-US" sz="2400" smtClean="0"/>
+              <a:rPr lang="en-US" sz="2400"/>
               <a:t> </a:t>
             </a:r>
             <a:r>
-              <a:rPr lang="en-US" sz="2400" smtClean="0">
+              <a:rPr lang="en-US" sz="2400">
                 <a:solidFill>
                   <a:srgbClr val="0000FF"/>
                 </a:solidFill>
@@ -10583,11 +10283,11 @@
           <a:lstStyle/>
           <a:p>
             <a:r>
-              <a:rPr lang="fr-FR" smtClean="0"/>
+              <a:rPr lang="fr-FR"/>
               <a:t>③ </a:t>
             </a:r>
             <a:r>
-              <a:rPr lang="en-US" sz="2400" smtClean="0">
+              <a:rPr lang="en-US" sz="2400">
                 <a:solidFill>
                   <a:srgbClr val="0000FF"/>
                 </a:solidFill>
@@ -10603,7 +10303,7 @@
               <a:t>∇</a:t>
             </a:r>
             <a:r>
-              <a:rPr lang="en-US" sz="2400" smtClean="0">
+              <a:rPr lang="en-US" sz="2400">
                 <a:solidFill>
                   <a:srgbClr val="0000FF"/>
                 </a:solidFill>
@@ -10642,7 +10342,7 @@
           <a:p>
             <a:pPr algn="ctr"/>
             <a:r>
-              <a:rPr lang="en-US" sz="2400" b="1" smtClean="0">
+              <a:rPr lang="en-US" sz="2400" b="1">
                 <a:solidFill>
                   <a:srgbClr val="FF0000"/>
                 </a:solidFill>
@@ -10653,7 +10353,7 @@
           <a:p>
             <a:pPr algn="ctr"/>
             <a:r>
-              <a:rPr lang="en-US" sz="2400" b="1" smtClean="0">
+              <a:rPr lang="en-US" sz="2400" b="1">
                 <a:solidFill>
                   <a:srgbClr val="FF0000"/>
                 </a:solidFill>
@@ -10664,7 +10364,7 @@
           <a:p>
             <a:pPr algn="ctr"/>
             <a:r>
-              <a:rPr lang="fr-FR" sz="2400" b="1" smtClean="0">
+              <a:rPr lang="fr-FR" sz="2400" b="1">
                 <a:solidFill>
                   <a:srgbClr val="FF0000"/>
                 </a:solidFill>
@@ -10672,7 +10372,7 @@
               <a:t>(M,g,∇,∇</a:t>
             </a:r>
             <a:r>
-              <a:rPr lang="fr-FR" sz="2400" b="1" baseline="30000" smtClean="0">
+              <a:rPr lang="fr-FR" sz="2400" b="1" baseline="30000">
                 <a:solidFill>
                   <a:srgbClr val="FF0000"/>
                 </a:solidFill>
@@ -10680,18 +10380,13 @@
               <a:t>*</a:t>
             </a:r>
             <a:r>
-              <a:rPr lang="fr-FR" sz="2400" b="1" smtClean="0">
+              <a:rPr lang="fr-FR" sz="2400" b="1">
                 <a:solidFill>
                   <a:srgbClr val="FF0000"/>
                 </a:solidFill>
               </a:rPr>
               <a:t>)</a:t>
             </a:r>
-            <a:endParaRPr lang="fr-FR" sz="2400" b="1">
-              <a:solidFill>
-                <a:srgbClr val="FF0000"/>
-              </a:solidFill>
-            </a:endParaRPr>
           </a:p>
         </p:txBody>
       </p:sp>
@@ -10786,7 +10481,7 @@
           <a:p>
             <a:pPr algn="ctr"/>
             <a:r>
-              <a:rPr lang="en-US" smtClean="0"/>
+              <a:rPr lang="en-US"/>
               <a:t>du</a:t>
             </a:r>
             <a:endParaRPr lang="fr-FR"/>
@@ -10816,13 +10511,13 @@
           <a:lstStyle/>
           <a:p>
             <a:r>
-              <a:rPr lang="en-US" sz="2000" smtClean="0"/>
+              <a:rPr lang="en-US" sz="2000"/>
               <a:t>Examples:</a:t>
             </a:r>
           </a:p>
           <a:p>
             <a:r>
-              <a:rPr lang="en-US" sz="2000" smtClean="0">
+              <a:rPr lang="en-US" sz="2000">
                 <a:solidFill>
                   <a:schemeClr val="accent6"/>
                 </a:solidFill>
@@ -10832,7 +10527,7 @@
           </a:p>
           <a:p>
             <a:r>
-              <a:rPr lang="en-US" sz="2000" smtClean="0">
+              <a:rPr lang="en-US" sz="2000">
                 <a:solidFill>
                   <a:schemeClr val="accent6"/>
                 </a:solidFill>
@@ -10842,7 +10537,7 @@
           </a:p>
           <a:p>
             <a:r>
-              <a:rPr lang="en-US" sz="2000" smtClean="0">
+              <a:rPr lang="en-US" sz="2000">
                 <a:solidFill>
                   <a:schemeClr val="accent6"/>
                 </a:solidFill>
@@ -10880,13 +10575,13 @@
           <a:lstStyle/>
           <a:p>
             <a:r>
-              <a:rPr lang="en-US" sz="2000" smtClean="0"/>
+              <a:rPr lang="en-US" sz="2000"/>
               <a:t>Examples:</a:t>
             </a:r>
           </a:p>
           <a:p>
             <a:r>
-              <a:rPr lang="en-US" sz="2000" smtClean="0">
+              <a:rPr lang="en-US" sz="2000">
                 <a:solidFill>
                   <a:schemeClr val="accent6"/>
                 </a:solidFill>
@@ -10920,25 +10615,17 @@
               <a:t>D</a:t>
             </a:r>
             <a:r>
-              <a:rPr lang="en-US" sz="2000" smtClean="0">
+              <a:rPr lang="en-US" sz="2000">
                 <a:solidFill>
                   <a:schemeClr val="accent6"/>
                 </a:solidFill>
               </a:rPr>
-              <a:t> from </a:t>
-            </a:r>
+              <a:t> from divergence </a:t>
+            </a:r>
+          </a:p>
+          <a:p>
             <a:r>
               <a:rPr lang="en-US" sz="2000">
-                <a:solidFill>
-                  <a:schemeClr val="accent6"/>
-                </a:solidFill>
-              </a:rPr>
-              <a:t>divergence </a:t>
-            </a:r>
-          </a:p>
-          <a:p>
-            <a:r>
-              <a:rPr lang="en-US" sz="2000" smtClean="0">
                 <a:solidFill>
                   <a:schemeClr val="accent6"/>
                 </a:solidFill>
@@ -10971,13 +10658,13 @@
           <a:lstStyle/>
           <a:p>
             <a:r>
-              <a:rPr lang="en-US" sz="2000" smtClean="0"/>
+              <a:rPr lang="en-US" sz="2000"/>
               <a:t>Examples:</a:t>
             </a:r>
           </a:p>
           <a:p>
             <a:r>
-              <a:rPr lang="en-US" sz="2000" smtClean="0">
+              <a:rPr lang="en-US" sz="2000">
                 <a:solidFill>
                   <a:schemeClr val="accent6"/>
                 </a:solidFill>
@@ -10987,7 +10674,7 @@
           </a:p>
           <a:p>
             <a:r>
-              <a:rPr lang="en-US" sz="2000" smtClean="0">
+              <a:rPr lang="en-US" sz="2000">
                 <a:solidFill>
                   <a:schemeClr val="accent6"/>
                 </a:solidFill>
@@ -10997,7 +10684,7 @@
           </a:p>
           <a:p>
             <a:r>
-              <a:rPr lang="en-US" sz="2000" smtClean="0">
+              <a:rPr lang="en-US" sz="2000">
                 <a:solidFill>
                   <a:schemeClr val="accent6"/>
                 </a:solidFill>
@@ -11005,7 +10692,7 @@
               <a:t>metric connection </a:t>
             </a:r>
             <a:r>
-              <a:rPr lang="fr-FR" sz="2000" smtClean="0">
+              <a:rPr lang="fr-FR" sz="2000">
                 <a:solidFill>
                   <a:schemeClr val="accent6"/>
                 </a:solidFill>
@@ -11013,7 +10700,7 @@
               <a:t>∇</a:t>
             </a:r>
             <a:r>
-              <a:rPr lang="fr-FR" sz="2000" baseline="30000" smtClean="0">
+              <a:rPr lang="fr-FR" sz="2000" baseline="30000">
                 <a:solidFill>
                   <a:schemeClr val="accent6"/>
                 </a:solidFill>
@@ -11021,7 +10708,7 @@
               <a:t>g</a:t>
             </a:r>
             <a:r>
-              <a:rPr lang="en-US" sz="2000" smtClean="0">
+              <a:rPr lang="en-US" sz="2000">
                 <a:solidFill>
                   <a:schemeClr val="accent6"/>
                 </a:solidFill>
@@ -11031,7 +10718,7 @@
           </a:p>
           <a:p>
             <a:r>
-              <a:rPr lang="en-US" sz="2000" smtClean="0">
+              <a:rPr lang="en-US" sz="2000">
                 <a:solidFill>
                   <a:schemeClr val="accent6"/>
                 </a:solidFill>
@@ -11039,7 +10726,7 @@
               <a:t>divergence connection </a:t>
             </a:r>
             <a:r>
-              <a:rPr lang="fr-FR" sz="2000" smtClean="0">
+              <a:rPr lang="fr-FR" sz="2000">
                 <a:solidFill>
                   <a:schemeClr val="accent6"/>
                 </a:solidFill>
@@ -11047,7 +10734,7 @@
               <a:t>∇</a:t>
             </a:r>
             <a:r>
-              <a:rPr lang="fr-FR" sz="2000" baseline="30000" smtClean="0">
+              <a:rPr lang="fr-FR" sz="2000" baseline="30000">
                 <a:solidFill>
                   <a:schemeClr val="accent6"/>
                 </a:solidFill>
@@ -11055,7 +10742,7 @@
               <a:t>D</a:t>
             </a:r>
             <a:r>
-              <a:rPr lang="en-US" sz="2000" smtClean="0">
+              <a:rPr lang="en-US" sz="2000">
                 <a:solidFill>
                   <a:schemeClr val="accent6"/>
                 </a:solidFill>
@@ -11073,7 +10760,7 @@
               <a:t>α</a:t>
             </a:r>
             <a:r>
-              <a:rPr lang="en-US" sz="2000" smtClean="0">
+              <a:rPr lang="en-US" sz="2000">
                 <a:solidFill>
                   <a:schemeClr val="accent6"/>
                 </a:solidFill>
@@ -11106,13 +10793,13 @@
           <a:lstStyle/>
           <a:p>
             <a:r>
-              <a:rPr lang="en-US" smtClean="0"/>
+              <a:rPr lang="en-US"/>
               <a:t>Concepts: </a:t>
             </a:r>
           </a:p>
           <a:p>
             <a:r>
-              <a:rPr lang="en-US" smtClean="0">
+              <a:rPr lang="en-US">
                 <a:solidFill>
                   <a:schemeClr val="accent2"/>
                 </a:solidFill>
@@ -11122,7 +10809,7 @@
           </a:p>
           <a:p>
             <a:r>
-              <a:rPr lang="en-US" smtClean="0">
+              <a:rPr lang="en-US">
                 <a:solidFill>
                   <a:schemeClr val="accent2"/>
                 </a:solidFill>
@@ -11132,7 +10819,7 @@
           </a:p>
           <a:p>
             <a:r>
-              <a:rPr lang="en-US" smtClean="0">
+              <a:rPr lang="en-US">
                 <a:solidFill>
                   <a:schemeClr val="accent2"/>
                 </a:solidFill>
@@ -11142,7 +10829,7 @@
           </a:p>
           <a:p>
             <a:r>
-              <a:rPr lang="en-US" smtClean="0">
+              <a:rPr lang="en-US">
                 <a:solidFill>
                   <a:schemeClr val="accent2"/>
                 </a:solidFill>
@@ -11152,7 +10839,7 @@
           </a:p>
           <a:p>
             <a:r>
-              <a:rPr lang="fr-FR" smtClean="0">
+              <a:rPr lang="fr-FR">
                 <a:solidFill>
                   <a:schemeClr val="accent2"/>
                 </a:solidFill>
@@ -11160,18 +10847,13 @@
               <a:t>Levi-Civita connection ∇</a:t>
             </a:r>
             <a:r>
-              <a:rPr lang="fr-FR" baseline="30000" smtClean="0">
+              <a:rPr lang="fr-FR" baseline="30000">
                 <a:solidFill>
                   <a:schemeClr val="accent2"/>
                 </a:solidFill>
               </a:rPr>
               <a:t>g</a:t>
             </a:r>
-            <a:endParaRPr lang="fr-FR" baseline="30000">
-              <a:solidFill>
-                <a:schemeClr val="accent2"/>
-              </a:solidFill>
-            </a:endParaRPr>
           </a:p>
         </p:txBody>
       </p:sp>
@@ -11198,13 +10880,13 @@
           <a:lstStyle/>
           <a:p>
             <a:r>
-              <a:rPr lang="fr-FR" smtClean="0"/>
+              <a:rPr lang="fr-FR"/>
               <a:t>Concepts:</a:t>
             </a:r>
           </a:p>
           <a:p>
             <a:r>
-              <a:rPr lang="fr-FR" smtClean="0">
+              <a:rPr lang="fr-FR">
                 <a:solidFill>
                   <a:schemeClr val="accent2"/>
                 </a:solidFill>
@@ -11214,7 +10896,7 @@
           </a:p>
           <a:p>
             <a:r>
-              <a:rPr lang="fr-FR" smtClean="0">
+              <a:rPr lang="fr-FR">
                 <a:solidFill>
                   <a:schemeClr val="accent2"/>
                 </a:solidFill>
@@ -11222,7 +10904,7 @@
               <a:t>∇-</a:t>
             </a:r>
             <a:r>
-              <a:rPr lang="en-US" smtClean="0">
+              <a:rPr lang="en-US">
                 <a:solidFill>
                   <a:schemeClr val="accent2"/>
                 </a:solidFill>
@@ -11232,7 +10914,7 @@
           </a:p>
           <a:p>
             <a:r>
-              <a:rPr lang="fr-FR" smtClean="0">
+              <a:rPr lang="fr-FR">
                 <a:solidFill>
                   <a:schemeClr val="accent2"/>
                 </a:solidFill>
@@ -11240,7 +10922,7 @@
               <a:t>∇-</a:t>
             </a:r>
             <a:r>
-              <a:rPr lang="en-US" smtClean="0">
+              <a:rPr lang="en-US">
                 <a:solidFill>
                   <a:schemeClr val="accent2"/>
                 </a:solidFill>
@@ -11250,7 +10932,7 @@
           </a:p>
           <a:p>
             <a:r>
-              <a:rPr lang="en-US" smtClean="0">
+              <a:rPr lang="en-US">
                 <a:solidFill>
                   <a:schemeClr val="accent2"/>
                 </a:solidFill>
@@ -11432,7 +11114,7 @@
           <a:lstStyle/>
           <a:p>
             <a:r>
-              <a:rPr lang="en-US" smtClean="0"/>
+              <a:rPr lang="en-US"/>
               <a:t>chart</a:t>
             </a:r>
             <a:endParaRPr lang="fr-FR"/>
@@ -11463,14 +11145,14 @@
           <a:p>
             <a:pPr algn="ctr"/>
             <a:r>
-              <a:rPr lang="en-US" smtClean="0"/>
+              <a:rPr lang="en-US"/>
               <a:t>dual</a:t>
             </a:r>
           </a:p>
           <a:p>
             <a:pPr algn="ctr"/>
             <a:r>
-              <a:rPr lang="en-US" smtClean="0"/>
+              <a:rPr lang="en-US"/>
               <a:t>connection</a:t>
             </a:r>
             <a:endParaRPr lang="fr-FR"/>
@@ -11500,13 +11182,13 @@
           <a:lstStyle/>
           <a:p>
             <a:r>
-              <a:rPr lang="en-US" smtClean="0"/>
+              <a:rPr lang="en-US"/>
               <a:t>Concepts:</a:t>
             </a:r>
           </a:p>
           <a:p>
             <a:r>
-              <a:rPr lang="en-US" smtClean="0">
+              <a:rPr lang="en-US">
                 <a:solidFill>
                   <a:schemeClr val="accent2"/>
                 </a:solidFill>
@@ -11516,7 +11198,7 @@
           </a:p>
           <a:p>
             <a:r>
-              <a:rPr lang="en-US" smtClean="0">
+              <a:rPr lang="en-US">
                 <a:solidFill>
                   <a:schemeClr val="accent2"/>
                 </a:solidFill>
@@ -11554,16 +11236,12 @@
           <a:p>
             <a:r>
               <a:rPr lang="en-US"/>
-              <a:t>Concepts</a:t>
-            </a:r>
-            <a:r>
-              <a:rPr lang="en-US" smtClean="0"/>
-              <a:t>:</a:t>
-            </a:r>
-          </a:p>
-          <a:p>
-            <a:r>
-              <a:rPr lang="en-US" smtClean="0">
+              <a:t>Concepts:</a:t>
+            </a:r>
+          </a:p>
+          <a:p>
+            <a:r>
+              <a:rPr lang="en-US">
                 <a:solidFill>
                   <a:schemeClr val="accent2"/>
                 </a:solidFill>
@@ -11573,18 +11251,13 @@
           </a:p>
           <a:p>
             <a:r>
-              <a:rPr lang="en-US" smtClean="0">
+              <a:rPr lang="en-US">
                 <a:solidFill>
                   <a:schemeClr val="accent2"/>
                 </a:solidFill>
               </a:rPr>
               <a:t>locally Euclidean </a:t>
             </a:r>
-            <a:endParaRPr lang="en-US">
-              <a:solidFill>
-                <a:schemeClr val="accent2"/>
-              </a:solidFill>
-            </a:endParaRPr>
           </a:p>
         </p:txBody>
       </p:sp>
@@ -11598,13 +11271,6 @@
   <p:clrMapOvr>
     <a:masterClrMapping/>
   </p:clrMapOvr>
-  <p:timing>
-    <p:tnLst>
-      <p:par>
-        <p:cTn id="1" dur="indefinite" restart="never" nodeType="tmRoot"/>
-      </p:par>
-    </p:tnLst>
-  </p:timing>
 </p:sld>
 </file>
 
@@ -11646,7 +11312,7 @@
           <a:lstStyle/>
           <a:p>
             <a:r>
-              <a:rPr lang="en-US" b="1" smtClean="0">
+              <a:rPr lang="en-US" b="1">
                 <a:solidFill>
                   <a:schemeClr val="accent1"/>
                 </a:solidFill>
@@ -11662,7 +11328,7 @@
               <a:t>±</a:t>
             </a:r>
             <a:r>
-              <a:rPr lang="el-GR" b="1" smtClean="0">
+              <a:rPr lang="el-GR" b="1">
                 <a:solidFill>
                   <a:schemeClr val="accent1"/>
                 </a:solidFill>
@@ -11670,7 +11336,7 @@
               <a:t>α</a:t>
             </a:r>
             <a:r>
-              <a:rPr lang="en-US" b="1" smtClean="0">
+              <a:rPr lang="en-US" b="1">
                 <a:solidFill>
                   <a:schemeClr val="accent1"/>
                 </a:solidFill>
@@ -11678,7 +11344,7 @@
               <a:t>-geometry</a:t>
             </a:r>
             <a:r>
-              <a:rPr lang="en-US" sz="4000" b="1" smtClean="0">
+              <a:rPr lang="en-US" sz="4000" b="1">
                 <a:solidFill>
                   <a:schemeClr val="accent1"/>
                 </a:solidFill>
@@ -11686,7 +11352,7 @@
               <a:t>, </a:t>
             </a:r>
             <a:r>
-              <a:rPr lang="el-GR" sz="4000" b="1" smtClean="0">
+              <a:rPr lang="el-GR" sz="4000" b="1">
                 <a:solidFill>
                   <a:schemeClr val="accent1"/>
                 </a:solidFill>
@@ -11699,15 +11365,7 @@
                   <a:schemeClr val="accent1"/>
                 </a:solidFill>
               </a:rPr>
-              <a:t>∈</a:t>
-            </a:r>
-            <a:r>
-              <a:rPr lang="fr-FR" sz="4000" b="1" smtClean="0">
-                <a:solidFill>
-                  <a:schemeClr val="accent1"/>
-                </a:solidFill>
-              </a:rPr>
-              <a:t>ℝ</a:t>
+              <a:t>∈ℝ</a:t>
             </a:r>
             <a:endParaRPr lang="fr-FR" b="1">
               <a:solidFill>
@@ -11764,15 +11422,15 @@
           <a:lstStyle/>
           <a:p>
             <a:r>
-              <a:rPr lang="fr-FR" smtClean="0"/>
+              <a:rPr lang="fr-FR"/>
               <a:t>① </a:t>
             </a:r>
             <a:r>
-              <a:rPr lang="en-US" sz="2400" smtClean="0"/>
+              <a:rPr lang="en-US" sz="2400"/>
               <a:t>  </a:t>
             </a:r>
             <a:r>
-              <a:rPr lang="en-US" sz="2400" smtClean="0">
+              <a:rPr lang="en-US" sz="2400">
                 <a:solidFill>
                   <a:srgbClr val="0000FF"/>
                 </a:solidFill>
@@ -11810,15 +11468,15 @@
           <a:lstStyle/>
           <a:p>
             <a:r>
-              <a:rPr lang="fr-FR" smtClean="0"/>
+              <a:rPr lang="fr-FR"/>
               <a:t>② </a:t>
             </a:r>
             <a:r>
-              <a:rPr lang="en-US" sz="2400" smtClean="0"/>
+              <a:rPr lang="en-US" sz="2400"/>
               <a:t> </a:t>
             </a:r>
             <a:r>
-              <a:rPr lang="en-US" sz="2400" smtClean="0">
+              <a:rPr lang="en-US" sz="2400">
                 <a:solidFill>
                   <a:srgbClr val="0000FF"/>
                 </a:solidFill>
@@ -11856,11 +11514,11 @@
           <a:lstStyle/>
           <a:p>
             <a:r>
-              <a:rPr lang="fr-FR" smtClean="0"/>
+              <a:rPr lang="fr-FR"/>
               <a:t>③ </a:t>
             </a:r>
             <a:r>
-              <a:rPr lang="en-US" sz="2400" smtClean="0">
+              <a:rPr lang="en-US" sz="2400">
                 <a:solidFill>
                   <a:srgbClr val="0000FF"/>
                 </a:solidFill>
@@ -11868,7 +11526,7 @@
               <a:t>affine connection </a:t>
             </a:r>
             <a:r>
-              <a:rPr lang="fr-FR" sz="2400" smtClean="0">
+              <a:rPr lang="fr-FR" sz="2400">
                 <a:solidFill>
                   <a:srgbClr val="0000FF"/>
                 </a:solidFill>
@@ -11878,7 +11536,7 @@
           </a:p>
           <a:p>
             <a:r>
-              <a:rPr lang="fr-FR" sz="2400" smtClean="0">
+              <a:rPr lang="fr-FR" sz="2400">
                 <a:solidFill>
                   <a:srgbClr val="0000FF"/>
                 </a:solidFill>
@@ -11886,7 +11544,7 @@
               <a:t>     by defining Christoffel symbols</a:t>
             </a:r>
             <a:r>
-              <a:rPr lang="en-US" sz="2400" smtClean="0">
+              <a:rPr lang="en-US" sz="2400">
                 <a:solidFill>
                   <a:srgbClr val="0000FF"/>
                 </a:solidFill>
@@ -11925,7 +11583,7 @@
           <a:p>
             <a:pPr algn="ctr"/>
             <a:r>
-              <a:rPr lang="en-US" sz="2400" b="1" smtClean="0">
+              <a:rPr lang="en-US" sz="2400" b="1">
                 <a:solidFill>
                   <a:srgbClr val="FF0000"/>
                 </a:solidFill>
@@ -11936,7 +11594,7 @@
           <a:p>
             <a:pPr algn="ctr"/>
             <a:r>
-              <a:rPr lang="fr-FR" sz="2400" b="1" smtClean="0">
+              <a:rPr lang="fr-FR" sz="2400" b="1">
                 <a:solidFill>
                   <a:srgbClr val="FF0000"/>
                 </a:solidFill>
@@ -11944,7 +11602,7 @@
               <a:t>(M,g,∇,∇</a:t>
             </a:r>
             <a:r>
-              <a:rPr lang="fr-FR" sz="2400" b="1" baseline="30000" smtClean="0">
+              <a:rPr lang="fr-FR" sz="2400" b="1" baseline="30000">
                 <a:solidFill>
                   <a:srgbClr val="FF0000"/>
                 </a:solidFill>
@@ -11952,18 +11610,13 @@
               <a:t>*</a:t>
             </a:r>
             <a:r>
-              <a:rPr lang="fr-FR" sz="2400" b="1" smtClean="0">
+              <a:rPr lang="fr-FR" sz="2400" b="1">
                 <a:solidFill>
                   <a:srgbClr val="FF0000"/>
                 </a:solidFill>
               </a:rPr>
               <a:t>)</a:t>
             </a:r>
-            <a:endParaRPr lang="fr-FR" sz="2400" b="1">
-              <a:solidFill>
-                <a:srgbClr val="FF0000"/>
-              </a:solidFill>
-            </a:endParaRPr>
           </a:p>
         </p:txBody>
       </p:sp>
@@ -12082,7 +11735,7 @@
           <a:p>
             <a:pPr algn="ctr"/>
             <a:r>
-              <a:rPr lang="en-US" sz="2400" b="1" smtClean="0">
+              <a:rPr lang="en-US" sz="2400" b="1">
                 <a:solidFill>
                   <a:schemeClr val="tx1"/>
                 </a:solidFill>
@@ -12093,7 +11746,7 @@
           <a:p>
             <a:pPr algn="ctr"/>
             <a:r>
-              <a:rPr lang="en-US" sz="2400" b="1" smtClean="0">
+              <a:rPr lang="en-US" sz="2400" b="1">
                 <a:solidFill>
                   <a:schemeClr val="tx1"/>
                 </a:solidFill>
@@ -12240,13 +11893,13 @@
           <a:lstStyle/>
           <a:p>
             <a:r>
-              <a:rPr lang="en-US" sz="2000" smtClean="0"/>
+              <a:rPr lang="en-US" sz="2000"/>
               <a:t>Examples:</a:t>
             </a:r>
           </a:p>
           <a:p>
             <a:r>
-              <a:rPr lang="en-US" sz="2000" smtClean="0">
+              <a:rPr lang="en-US" sz="2000">
                 <a:solidFill>
                   <a:schemeClr val="accent6"/>
                 </a:solidFill>
@@ -12256,18 +11909,13 @@
           </a:p>
           <a:p>
             <a:r>
-              <a:rPr lang="en-US" sz="2000" smtClean="0">
+              <a:rPr lang="en-US" sz="2000">
                 <a:solidFill>
                   <a:schemeClr val="accent6"/>
                 </a:solidFill>
               </a:rPr>
               <a:t>Cubic tensor from divergence </a:t>
             </a:r>
-            <a:endParaRPr lang="en-US" sz="2000">
-              <a:solidFill>
-                <a:schemeClr val="accent6"/>
-              </a:solidFill>
-            </a:endParaRPr>
           </a:p>
         </p:txBody>
       </p:sp>
@@ -12294,14 +11942,10 @@
           <a:p>
             <a:r>
               <a:rPr lang="fr-FR"/>
-              <a:t>④</a:t>
-            </a:r>
-            <a:r>
-              <a:rPr lang="fr-FR" smtClean="0"/>
-              <a:t> </a:t>
-            </a:r>
-            <a:r>
-              <a:rPr lang="en-US" sz="2400" smtClean="0">
+              <a:t>④ </a:t>
+            </a:r>
+            <a:r>
+              <a:rPr lang="en-US" sz="2400">
                 <a:solidFill>
                   <a:srgbClr val="0000FF"/>
                 </a:solidFill>
@@ -12317,7 +11961,7 @@
               <a:t>α</a:t>
             </a:r>
             <a:r>
-              <a:rPr lang="en-US" sz="2400" smtClean="0">
+              <a:rPr lang="en-US" sz="2400">
                 <a:solidFill>
                   <a:srgbClr val="0000FF"/>
                 </a:solidFill>
@@ -12403,14 +12047,14 @@
           <a:lstStyle/>
           <a:p>
             <a:r>
-              <a:rPr lang="en-US" sz="2400" b="1" smtClean="0">
+              <a:rPr lang="en-US" sz="2400" b="1">
                 <a:solidFill>
                   <a:srgbClr val="FF0000"/>
                 </a:solidFill>
               </a:rPr>
               <a:t>Get a family of dual connections/IG</a:t>
             </a:r>
-            <a:endParaRPr lang="en-US" sz="2400" b="1" smtClean="0"/>
+            <a:endParaRPr lang="en-US" sz="2400" b="1"/>
           </a:p>
           <a:p>
             <a:r>
@@ -12419,15 +12063,31 @@
                   <a:srgbClr val="FF0000"/>
                 </a:solidFill>
               </a:rPr>
-              <a:t>(M,g,</a:t>
-            </a:r>
-            <a:r>
-              <a:rPr lang="fr-FR" sz="2400" b="1" smtClean="0">
+              <a:t>(M,g,∇</a:t>
+            </a:r>
+            <a:r>
+              <a:rPr lang="el-GR" sz="2400" b="1" baseline="30000">
                 <a:solidFill>
                   <a:srgbClr val="FF0000"/>
                 </a:solidFill>
               </a:rPr>
-              <a:t>∇</a:t>
+              <a:t>α</a:t>
+            </a:r>
+            <a:r>
+              <a:rPr lang="fr-FR" sz="2400" b="1">
+                <a:solidFill>
+                  <a:srgbClr val="FF0000"/>
+                </a:solidFill>
+              </a:rPr>
+              <a:t>,∇</a:t>
+            </a:r>
+            <a:r>
+              <a:rPr lang="fr-FR" sz="2400" b="1" baseline="30000">
+                <a:solidFill>
+                  <a:srgbClr val="FF0000"/>
+                </a:solidFill>
+              </a:rPr>
+              <a:t>-</a:t>
             </a:r>
             <a:r>
               <a:rPr lang="el-GR" sz="2400" b="1" baseline="30000">
@@ -12438,44 +12098,12 @@
               <a:t>α</a:t>
             </a:r>
             <a:r>
-              <a:rPr lang="fr-FR" sz="2400" b="1" smtClean="0">
+              <a:rPr lang="fr-FR" sz="2400" b="1">
                 <a:solidFill>
                   <a:srgbClr val="FF0000"/>
                 </a:solidFill>
               </a:rPr>
-              <a:t>,∇</a:t>
-            </a:r>
-            <a:r>
-              <a:rPr lang="fr-FR" sz="2400" b="1" baseline="30000" smtClean="0">
-                <a:solidFill>
-                  <a:srgbClr val="FF0000"/>
-                </a:solidFill>
-              </a:rPr>
-              <a:t>-</a:t>
-            </a:r>
-            <a:r>
-              <a:rPr lang="el-GR" sz="2400" b="1" baseline="30000">
-                <a:solidFill>
-                  <a:srgbClr val="FF0000"/>
-                </a:solidFill>
-              </a:rPr>
-              <a:t>α</a:t>
-            </a:r>
-            <a:r>
-              <a:rPr lang="fr-FR" sz="2400" b="1" smtClean="0">
-                <a:solidFill>
-                  <a:srgbClr val="FF0000"/>
-                </a:solidFill>
-              </a:rPr>
-              <a:t>): The </a:t>
-            </a:r>
-            <a:r>
-              <a:rPr lang="fr-FR" sz="2400" b="1">
-                <a:solidFill>
-                  <a:srgbClr val="FF0000"/>
-                </a:solidFill>
-              </a:rPr>
-              <a:t>±</a:t>
+              <a:t>): The ±</a:t>
             </a:r>
             <a:r>
               <a:rPr lang="el-GR" sz="2400" b="1">
@@ -12630,7 +12258,7 @@
           <a:p>
             <a:pPr algn="ctr"/>
             <a:r>
-              <a:rPr lang="en-US" sz="2000" b="1" smtClean="0">
+              <a:rPr lang="en-US" sz="2000" b="1">
                 <a:solidFill>
                   <a:srgbClr val="FF0000"/>
                 </a:solidFill>
@@ -12641,7 +12269,7 @@
           <a:p>
             <a:pPr algn="ctr"/>
             <a:r>
-              <a:rPr lang="en-US" sz="2000" b="1" smtClean="0">
+              <a:rPr lang="en-US" sz="2000" b="1">
                 <a:solidFill>
                   <a:srgbClr val="FF0000"/>
                 </a:solidFill>
@@ -12652,7 +12280,7 @@
           <a:p>
             <a:pPr algn="ctr"/>
             <a:r>
-              <a:rPr lang="en-US" sz="2000" b="1" smtClean="0">
+              <a:rPr lang="en-US" sz="2000" b="1">
                 <a:solidFill>
                   <a:srgbClr val="FF0000"/>
                 </a:solidFill>
@@ -12677,13 +12305,6 @@
   <p:clrMapOvr>
     <a:masterClrMapping/>
   </p:clrMapOvr>
-  <p:timing>
-    <p:tnLst>
-      <p:par>
-        <p:cTn id="1" dur="indefinite" restart="never" nodeType="tmRoot"/>
-      </p:par>
-    </p:tnLst>
-  </p:timing>
 </p:sld>
 </file>
 
@@ -12727,12 +12348,20 @@
           <a:lstStyle/>
           <a:p>
             <a:r>
-              <a:rPr lang="en-US" sz="4000" b="1" smtClean="0">
+              <a:rPr lang="en-US" sz="4000" b="1">
                 <a:solidFill>
                   <a:schemeClr val="accent1"/>
                 </a:solidFill>
               </a:rPr>
-              <a:t>Information geometry from </a:t>
+              <a:t>Information geometry from statistical models: (M,g</a:t>
+            </a:r>
+            <a:r>
+              <a:rPr lang="en-US" sz="4000" b="1" baseline="30000">
+                <a:solidFill>
+                  <a:schemeClr val="accent1"/>
+                </a:solidFill>
+              </a:rPr>
+              <a:t>F</a:t>
             </a:r>
             <a:r>
               <a:rPr lang="en-US" sz="4000" b="1">
@@ -12740,34 +12369,42 @@
                   <a:schemeClr val="accent1"/>
                 </a:solidFill>
               </a:rPr>
-              <a:t>statistical models: (</a:t>
-            </a:r>
-            <a:r>
-              <a:rPr lang="en-US" sz="4000" b="1" smtClean="0">
+              <a:t>,</a:t>
+            </a:r>
+            <a:r>
+              <a:rPr lang="fr-FR" sz="4000" b="1">
                 <a:solidFill>
                   <a:schemeClr val="accent1"/>
                 </a:solidFill>
               </a:rPr>
-              <a:t>M,g</a:t>
-            </a:r>
-            <a:r>
-              <a:rPr lang="en-US" sz="4000" b="1" baseline="30000" smtClean="0">
+              <a:t>∇</a:t>
+            </a:r>
+            <a:r>
+              <a:rPr lang="en-US" sz="4000" b="1" baseline="30000">
                 <a:solidFill>
                   <a:schemeClr val="accent1"/>
                 </a:solidFill>
               </a:rPr>
-              <a:t>F</a:t>
-            </a:r>
-            <a:r>
-              <a:rPr lang="en-US" sz="4000" b="1" smtClean="0">
+              <a:t>-</a:t>
+            </a:r>
+            <a:r>
+              <a:rPr lang="el-GR" b="1" baseline="30000">
                 <a:solidFill>
                   <a:schemeClr val="accent1"/>
                 </a:solidFill>
               </a:rPr>
+              <a:t>α</a:t>
+            </a:r>
+            <a:r>
+              <a:rPr lang="en-US" sz="4000" b="1">
+                <a:solidFill>
+                  <a:schemeClr val="accent1"/>
+                </a:solidFill>
+              </a:rPr>
               <a:t>,</a:t>
             </a:r>
             <a:r>
-              <a:rPr lang="fr-FR" sz="4000" b="1" smtClean="0">
+              <a:rPr lang="fr-FR" sz="4000" b="1">
                 <a:solidFill>
                   <a:schemeClr val="accent1"/>
                 </a:solidFill>
@@ -12775,47 +12412,15 @@
               <a:t>∇</a:t>
             </a:r>
             <a:r>
-              <a:rPr lang="en-US" sz="4000" b="1" baseline="30000" smtClean="0">
+              <a:rPr lang="el-GR" b="1" baseline="30000">
                 <a:solidFill>
                   <a:schemeClr val="accent1"/>
                 </a:solidFill>
               </a:rPr>
-              <a:t>-</a:t>
-            </a:r>
-            <a:r>
-              <a:rPr lang="el-GR" b="1" baseline="30000">
-                <a:solidFill>
-                  <a:schemeClr val="accent1"/>
-                </a:solidFill>
-              </a:rPr>
               <a:t>α</a:t>
             </a:r>
             <a:r>
-              <a:rPr lang="en-US" sz="4000" b="1" smtClean="0">
-                <a:solidFill>
-                  <a:schemeClr val="accent1"/>
-                </a:solidFill>
-              </a:rPr>
-              <a:t>,</a:t>
-            </a:r>
-            <a:r>
-              <a:rPr lang="fr-FR" sz="4000" b="1" smtClean="0">
-                <a:solidFill>
-                  <a:schemeClr val="accent1"/>
-                </a:solidFill>
-              </a:rPr>
-              <a:t>∇</a:t>
-            </a:r>
-            <a:r>
-              <a:rPr lang="el-GR" b="1" baseline="30000">
-                <a:solidFill>
-                  <a:schemeClr val="accent1"/>
-                </a:solidFill>
-              </a:rPr>
-              <a:t>α</a:t>
-            </a:r>
-            <a:r>
-              <a:rPr lang="en-US" sz="4000" b="1" smtClean="0">
+              <a:rPr lang="en-US" sz="4000" b="1">
                 <a:solidFill>
                   <a:schemeClr val="accent1"/>
                 </a:solidFill>
@@ -12851,11 +12456,11 @@
           <a:lstStyle/>
           <a:p>
             <a:r>
-              <a:rPr lang="en-US" smtClean="0"/>
+              <a:rPr lang="en-US"/>
               <a:t>Consider a parametric </a:t>
             </a:r>
             <a:r>
-              <a:rPr lang="en-US" b="1" smtClean="0">
+              <a:rPr lang="en-US" b="1">
                 <a:solidFill>
                   <a:srgbClr val="FF0000"/>
                 </a:solidFill>
@@ -12863,74 +12468,73 @@
               <a:t>statistical/probability model</a:t>
             </a:r>
             <a:r>
-              <a:rPr lang="en-US" smtClean="0"/>
+              <a:rPr lang="en-US"/>
               <a:t>:</a:t>
             </a:r>
+          </a:p>
+          <a:p>
+            <a:r>
+              <a:rPr lang="en-US"/>
+              <a:t>Define metric tensor g from </a:t>
+            </a:r>
+            <a:r>
+              <a:rPr lang="en-US">
+                <a:solidFill>
+                  <a:schemeClr val="accent4"/>
+                </a:solidFill>
+              </a:rPr>
+              <a:t>Fisher information</a:t>
+            </a:r>
+            <a:r>
+              <a:rPr lang="en-US"/>
+              <a:t> = </a:t>
+            </a:r>
+            <a:r>
+              <a:rPr lang="en-US" b="1">
+                <a:solidFill>
+                  <a:srgbClr val="FF0000"/>
+                </a:solidFill>
+              </a:rPr>
+              <a:t>Fisher metric  g</a:t>
+            </a:r>
+            <a:r>
+              <a:rPr lang="en-US" b="1" baseline="30000">
+                <a:solidFill>
+                  <a:srgbClr val="FF0000"/>
+                </a:solidFill>
+              </a:rPr>
+              <a:t>F</a:t>
+            </a:r>
+          </a:p>
+          <a:p>
             <a:endParaRPr lang="en-US"/>
           </a:p>
           <a:p>
-            <a:r>
-              <a:rPr lang="en-US" smtClean="0"/>
-              <a:t>Define metric tensor g from </a:t>
-            </a:r>
-            <a:r>
-              <a:rPr lang="en-US" smtClean="0">
-                <a:solidFill>
-                  <a:schemeClr val="accent4"/>
-                </a:solidFill>
-              </a:rPr>
-              <a:t>Fisher information</a:t>
-            </a:r>
-            <a:r>
-              <a:rPr lang="en-US" smtClean="0"/>
-              <a:t> = </a:t>
-            </a:r>
-            <a:r>
-              <a:rPr lang="en-US" b="1" smtClean="0">
+            <a:endParaRPr lang="en-US"/>
+          </a:p>
+          <a:p>
+            <a:r>
+              <a:rPr lang="en-US"/>
+              <a:t>Model is </a:t>
+            </a:r>
+            <a:r>
+              <a:rPr lang="en-US" b="1">
                 <a:solidFill>
                   <a:srgbClr val="FF0000"/>
                 </a:solidFill>
               </a:rPr>
-              <a:t>Fisher metric  g</a:t>
-            </a:r>
-            <a:r>
-              <a:rPr lang="en-US" b="1" baseline="30000" smtClean="0">
-                <a:solidFill>
-                  <a:srgbClr val="FF0000"/>
-                </a:solidFill>
-              </a:rPr>
-              <a:t>F</a:t>
-            </a:r>
-          </a:p>
-          <a:p>
-            <a:endParaRPr lang="en-US"/>
-          </a:p>
-          <a:p>
-            <a:endParaRPr lang="en-US" smtClean="0"/>
-          </a:p>
-          <a:p>
-            <a:r>
-              <a:rPr lang="en-US" smtClean="0"/>
-              <a:t>Model is </a:t>
-            </a:r>
-            <a:r>
-              <a:rPr lang="en-US" b="1" smtClean="0">
-                <a:solidFill>
-                  <a:srgbClr val="FF0000"/>
-                </a:solidFill>
-              </a:rPr>
               <a:t>regular</a:t>
             </a:r>
             <a:r>
-              <a:rPr lang="en-US" smtClean="0"/>
+              <a:rPr lang="en-US"/>
               <a:t> if partial derivatives of l</a:t>
             </a:r>
             <a:r>
-              <a:rPr lang="el-GR" baseline="-25000" smtClean="0"/>
+              <a:rPr lang="el-GR" baseline="-25000"/>
               <a:t>θ</a:t>
             </a:r>
             <a:r>
-              <a:rPr lang="en-US" smtClean="0"/>
+              <a:rPr lang="en-US"/>
               <a:t>(x) smooth and Fisher metric</a:t>
             </a:r>
           </a:p>
@@ -12939,13 +12543,13 @@
               <a:buNone/>
             </a:pPr>
             <a:r>
-              <a:rPr lang="en-US" smtClean="0"/>
+              <a:rPr lang="en-US"/>
               <a:t>is well-defined and positive-definite</a:t>
             </a:r>
           </a:p>
           <a:p>
             <a:r>
-              <a:rPr lang="en-US" b="1" smtClean="0">
+              <a:rPr lang="en-US" b="1">
                 <a:solidFill>
                   <a:srgbClr val="FF0000"/>
                 </a:solidFill>
@@ -12953,14 +12557,13 @@
               <a:t>Amari-Chentsov cubic tensor</a:t>
             </a:r>
             <a:r>
-              <a:rPr lang="en-US" smtClean="0"/>
+              <a:rPr lang="en-US"/>
               <a:t>: </a:t>
             </a:r>
-            <a:endParaRPr lang="en-US"/>
-          </a:p>
-          <a:p>
-            <a:r>
-              <a:rPr lang="el-GR" b="1" smtClean="0">
+          </a:p>
+          <a:p>
+            <a:r>
+              <a:rPr lang="el-GR" b="1">
                 <a:solidFill>
                   <a:srgbClr val="FF0000"/>
                 </a:solidFill>
@@ -12968,7 +12571,7 @@
               <a:t>α</a:t>
             </a:r>
             <a:r>
-              <a:rPr lang="en-US" b="1" smtClean="0">
+              <a:rPr lang="en-US" b="1">
                 <a:solidFill>
                   <a:srgbClr val="FF0000"/>
                 </a:solidFill>
@@ -12984,7 +12587,7 @@
             </a:endParaRPr>
           </a:p>
           <a:p>
-            <a:endParaRPr lang="en-US" b="1" smtClean="0">
+            <a:endParaRPr lang="en-US" b="1">
               <a:solidFill>
                 <a:srgbClr val="FF0000"/>
               </a:solidFill>
@@ -12992,7 +12595,7 @@
           </a:p>
           <a:p>
             <a:r>
-              <a:rPr lang="en-US" b="1" smtClean="0">
+              <a:rPr lang="en-US" b="1">
                 <a:solidFill>
                   <a:srgbClr val="FF0000"/>
                 </a:solidFill>
@@ -13000,7 +12603,7 @@
               <a:t>Fisher-Rao geometry when </a:t>
             </a:r>
             <a:r>
-              <a:rPr lang="el-GR" b="1" smtClean="0">
+              <a:rPr lang="el-GR" b="1">
                 <a:solidFill>
                   <a:srgbClr val="FF0000"/>
                 </a:solidFill>
@@ -13008,7 +12611,7 @@
               <a:t>α</a:t>
             </a:r>
             <a:r>
-              <a:rPr lang="en-US" b="1" smtClean="0">
+              <a:rPr lang="en-US" b="1">
                 <a:solidFill>
                   <a:srgbClr val="FF0000"/>
                 </a:solidFill>
@@ -13016,11 +12619,11 @@
               <a:t>=0, </a:t>
             </a:r>
             <a:r>
-              <a:rPr lang="en-US" smtClean="0"/>
+              <a:rPr lang="en-US"/>
               <a:t>get geodesic distance called</a:t>
             </a:r>
             <a:r>
-              <a:rPr lang="en-US" b="1" smtClean="0">
+              <a:rPr lang="en-US" b="1">
                 <a:solidFill>
                   <a:srgbClr val="FF0000"/>
                 </a:solidFill>
@@ -13032,7 +12635,7 @@
             <a:endParaRPr lang="en-US"/>
           </a:p>
           <a:p>
-            <a:endParaRPr lang="en-US" smtClean="0"/>
+            <a:endParaRPr lang="en-US"/>
           </a:p>
           <a:p>
             <a:endParaRPr lang="fr-FR"/>
@@ -13157,13 +12760,13 @@
           </a:bodyPr>
           <a:lstStyle/>
           <a:p>
-            <a:endParaRPr lang="en-US" smtClean="0"/>
-          </a:p>
-          <a:p>
             <a:endParaRPr lang="en-US"/>
           </a:p>
           <a:p>
-            <a:endParaRPr lang="en-US" smtClean="0"/>
+            <a:endParaRPr lang="en-US"/>
+          </a:p>
+          <a:p>
+            <a:endParaRPr lang="en-US"/>
           </a:p>
           <a:p>
             <a:endParaRPr lang="fr-FR"/>
@@ -13368,11 +12971,11 @@
           <a:lstStyle/>
           <a:p>
             <a:r>
-              <a:rPr lang="el-GR" smtClean="0"/>
+              <a:rPr lang="el-GR"/>
               <a:t>α</a:t>
             </a:r>
             <a:r>
-              <a:rPr lang="en-US" smtClean="0"/>
+              <a:rPr lang="en-US"/>
               <a:t>=1</a:t>
             </a:r>
             <a:endParaRPr lang="fr-FR"/>
@@ -13401,11 +13004,11 @@
           <a:lstStyle/>
           <a:p>
             <a:r>
-              <a:rPr lang="el-GR" smtClean="0"/>
+              <a:rPr lang="el-GR"/>
               <a:t>α</a:t>
             </a:r>
             <a:r>
-              <a:rPr lang="en-US" smtClean="0"/>
+              <a:rPr lang="en-US"/>
               <a:t>=-1</a:t>
             </a:r>
             <a:endParaRPr lang="fr-FR"/>
@@ -13435,11 +13038,11 @@
           <a:lstStyle/>
           <a:p>
             <a:r>
-              <a:rPr lang="fr-FR" smtClean="0"/>
+              <a:rPr lang="fr-FR"/>
               <a:t>← </a:t>
             </a:r>
             <a:r>
-              <a:rPr lang="en-US" b="1" smtClean="0">
+              <a:rPr lang="en-US" b="1">
                 <a:solidFill>
                   <a:srgbClr val="FF0000"/>
                 </a:solidFill>
@@ -13477,11 +13080,11 @@
           <a:lstStyle/>
           <a:p>
             <a:r>
-              <a:rPr lang="fr-FR" smtClean="0"/>
+              <a:rPr lang="fr-FR"/>
               <a:t>← </a:t>
             </a:r>
             <a:r>
-              <a:rPr lang="en-US" b="1" smtClean="0">
+              <a:rPr lang="en-US" b="1">
                 <a:solidFill>
                   <a:srgbClr val="FF0000"/>
                 </a:solidFill>
@@ -13519,7 +13122,7 @@
           <a:lstStyle/>
           <a:p>
             <a:r>
-              <a:rPr lang="en-US" b="1" smtClean="0">
+              <a:rPr lang="en-US" b="1">
                 <a:solidFill>
                   <a:schemeClr val="accent4"/>
                 </a:solidFill>
@@ -13581,7 +13184,7 @@
           <a:lstStyle/>
           <a:p>
             <a:r>
-              <a:rPr lang="en-US" b="1" smtClean="0">
+              <a:rPr lang="en-US" b="1">
                 <a:solidFill>
                   <a:schemeClr val="accent4"/>
                 </a:solidFill>
@@ -13619,7 +13222,7 @@
           <a:lstStyle/>
           <a:p>
             <a:r>
-              <a:rPr lang="en-US" sz="2000" b="1" smtClean="0">
+              <a:rPr lang="en-US" sz="2000" b="1">
                 <a:solidFill>
                   <a:schemeClr val="accent6"/>
                 </a:solidFill>
@@ -13657,7 +13260,7 @@
           <a:lstStyle/>
           <a:p>
             <a:r>
-              <a:rPr lang="en-US" sz="2000" b="1" smtClean="0">
+              <a:rPr lang="en-US" sz="2000" b="1">
                 <a:solidFill>
                   <a:schemeClr val="accent6"/>
                 </a:solidFill>
@@ -13695,7 +13298,7 @@
           <a:lstStyle/>
           <a:p>
             <a:r>
-              <a:rPr lang="en-US" sz="2000" b="1" smtClean="0">
+              <a:rPr lang="en-US" sz="2000" b="1">
                 <a:solidFill>
                   <a:schemeClr val="accent6"/>
                 </a:solidFill>
@@ -13827,7 +13430,7 @@
           <a:lstStyle/>
           <a:p>
             <a:r>
-              <a:rPr lang="en-US" sz="2400" b="1" smtClean="0">
+              <a:rPr lang="en-US" sz="2400" b="1">
                 <a:solidFill>
                   <a:schemeClr val="accent2"/>
                 </a:solidFill>
@@ -13852,13 +13455,6 @@
   <p:clrMapOvr>
     <a:masterClrMapping/>
   </p:clrMapOvr>
-  <p:timing>
-    <p:tnLst>
-      <p:par>
-        <p:cTn id="1" dur="indefinite" restart="never" nodeType="tmRoot"/>
-      </p:par>
-    </p:tnLst>
-  </p:timing>
 </p:sld>
 </file>
 
@@ -13996,11 +13592,7 @@
             </a:r>
             <a:r>
               <a:rPr lang="en-US" sz="2400"/>
-              <a:t>to </a:t>
-            </a:r>
-            <a:r>
-              <a:rPr lang="en-US" sz="2400" smtClean="0"/>
-              <a:t>calculate </a:t>
+              <a:t>to calculate </a:t>
             </a:r>
             <a:r>
               <a:rPr lang="en-US" sz="2400" dirty="0"/>
@@ -14012,11 +13604,7 @@
             </a:r>
             <a:r>
               <a:rPr lang="en-US" sz="2000"/>
-              <a:t> </a:t>
-            </a:r>
-            <a:r>
-              <a:rPr lang="en-US" sz="2000" smtClean="0"/>
-              <a:t>(or equivalently </a:t>
+              <a:t> (or equivalently </a:t>
             </a:r>
             <a:r>
               <a:rPr lang="en-US" sz="2000" dirty="0"/>
@@ -14035,11 +13623,7 @@
             </a:r>
             <a:r>
               <a:rPr lang="en-US" sz="2400"/>
-              <a:t>non-trivial </a:t>
-            </a:r>
-            <a:r>
-              <a:rPr lang="en-US" sz="2400" smtClean="0"/>
-              <a:t>tasks.</a:t>
+              <a:t>non-trivial tasks.</a:t>
             </a:r>
           </a:p>
           <a:p>
@@ -14048,28 +13632,12 @@
               <a:buChar char="•"/>
             </a:pPr>
             <a:r>
-              <a:rPr lang="en-US" sz="2400" b="1" smtClean="0">
+              <a:rPr lang="en-US" sz="2400" b="1">
                 <a:solidFill>
                   <a:srgbClr val="FF0000"/>
                 </a:solidFill>
               </a:rPr>
-              <a:t>New in 2023:  closed-form geodesics with boundary conditions for  </a:t>
-            </a:r>
-            <a:r>
-              <a:rPr lang="en-US" sz="2400" b="1">
-                <a:solidFill>
-                  <a:srgbClr val="FF0000"/>
-                </a:solidFill>
-              </a:rPr>
-              <a:t>M</a:t>
-            </a:r>
-            <a:r>
-              <a:rPr lang="en-US" sz="2400" b="1" smtClean="0">
-                <a:solidFill>
-                  <a:srgbClr val="FF0000"/>
-                </a:solidFill>
-              </a:rPr>
-              <a:t>ultiVariate Normals </a:t>
+              <a:t>New in 2023:  closed-form geodesics with boundary conditions for  MultiVariate Normals </a:t>
             </a:r>
             <a:endParaRPr lang="en-US" sz="2400" b="1" dirty="0">
               <a:solidFill>
@@ -14102,7 +13670,7 @@
           <a:lstStyle/>
           <a:p>
             <a:r>
-              <a:rPr lang="en-US" sz="2800" b="1" smtClean="0">
+              <a:rPr lang="en-US" sz="2800" b="1">
                 <a:solidFill>
                   <a:srgbClr val="FF0000"/>
                 </a:solidFill>
@@ -14295,36 +13863,15 @@
               </a:rPr>
               <a:t>Fisher-Rao and pullback Hilbert cone distances on the multivariate Gaussian manifold </a:t>
             </a:r>
-            <a:endParaRPr lang="en-US" b="1" smtClean="0">
-              <a:solidFill>
-                <a:schemeClr val="accent6"/>
-              </a:solidFill>
-            </a:endParaRPr>
-          </a:p>
-          <a:p>
-            <a:r>
-              <a:rPr lang="en-US" b="1" smtClean="0">
+          </a:p>
+          <a:p>
+            <a:r>
+              <a:rPr lang="en-US" b="1">
                 <a:solidFill>
                   <a:schemeClr val="accent6"/>
                 </a:solidFill>
               </a:rPr>
-              <a:t>with </a:t>
-            </a:r>
-            <a:r>
-              <a:rPr lang="en-US" b="1">
-                <a:solidFill>
-                  <a:schemeClr val="accent6"/>
-                </a:solidFill>
-              </a:rPr>
-              <a:t>applications to simplification and quantization of </a:t>
-            </a:r>
-            <a:r>
-              <a:rPr lang="en-US" b="1" smtClean="0">
-                <a:solidFill>
-                  <a:schemeClr val="accent6"/>
-                </a:solidFill>
-              </a:rPr>
-              <a:t>mixtures, ICML ws TAGML 2023</a:t>
+              <a:t>with applications to simplification and quantization of mixtures, ICML ws TAGML 2023</a:t>
             </a:r>
             <a:endParaRPr lang="fr-FR" b="1">
               <a:solidFill>
@@ -14352,13 +13899,6 @@
       <p:transition spd="slow" advTm="62563"/>
     </mc:Fallback>
   </mc:AlternateContent>
-  <p:timing>
-    <p:tnLst>
-      <p:par>
-        <p:cTn id="1" dur="indefinite" restart="never" nodeType="tmRoot"/>
-      </p:par>
-    </p:tnLst>
-  </p:timing>
 </p:sld>
 </file>
 
@@ -14400,7 +13940,7 @@
           <a:lstStyle/>
           <a:p>
             <a:r>
-              <a:rPr lang="en-US" b="1" smtClean="0">
+              <a:rPr lang="en-US" b="1">
                 <a:solidFill>
                   <a:schemeClr val="accent1"/>
                 </a:solidFill>
@@ -14408,7 +13948,7 @@
               <a:t>Information geometry from divergences: </a:t>
             </a:r>
             <a:r>
-              <a:rPr lang="en-US" sz="4000" b="1" smtClean="0">
+              <a:rPr lang="en-US" sz="4000" b="1">
                 <a:solidFill>
                   <a:schemeClr val="accent1"/>
                 </a:solidFill>
@@ -14416,7 +13956,7 @@
               <a:t>(M,g</a:t>
             </a:r>
             <a:r>
-              <a:rPr lang="en-US" sz="4000" b="1" baseline="30000" smtClean="0">
+              <a:rPr lang="en-US" sz="4000" b="1" baseline="30000">
                 <a:solidFill>
                   <a:schemeClr val="accent1"/>
                 </a:solidFill>
@@ -14424,7 +13964,7 @@
               <a:t>D</a:t>
             </a:r>
             <a:r>
-              <a:rPr lang="en-US" sz="4000" b="1" smtClean="0">
+              <a:rPr lang="en-US" sz="4000" b="1">
                 <a:solidFill>
                   <a:schemeClr val="accent1"/>
                 </a:solidFill>
@@ -14432,7 +13972,7 @@
               <a:t>,</a:t>
             </a:r>
             <a:r>
-              <a:rPr lang="fr-FR" sz="4000" smtClean="0">
+              <a:rPr lang="fr-FR" sz="4000">
                 <a:solidFill>
                   <a:schemeClr val="accent1"/>
                 </a:solidFill>
@@ -14440,7 +13980,7 @@
               <a:t>∇</a:t>
             </a:r>
             <a:r>
-              <a:rPr lang="en-US" sz="4000" b="1" baseline="30000" smtClean="0">
+              <a:rPr lang="en-US" sz="4000" b="1" baseline="30000">
                 <a:solidFill>
                   <a:schemeClr val="accent1"/>
                 </a:solidFill>
@@ -14448,7 +13988,7 @@
               <a:t>D</a:t>
             </a:r>
             <a:r>
-              <a:rPr lang="en-US" sz="4000" b="1" smtClean="0">
+              <a:rPr lang="en-US" sz="4000" b="1">
                 <a:solidFill>
                   <a:schemeClr val="accent1"/>
                 </a:solidFill>
@@ -14456,7 +13996,7 @@
               <a:t>,</a:t>
             </a:r>
             <a:r>
-              <a:rPr lang="fr-FR" sz="4000" smtClean="0">
+              <a:rPr lang="fr-FR" sz="4000">
                 <a:solidFill>
                   <a:schemeClr val="accent1"/>
                 </a:solidFill>
@@ -14464,7 +14004,7 @@
               <a:t>∇</a:t>
             </a:r>
             <a:r>
-              <a:rPr lang="en-US" sz="4000" b="1" baseline="30000" smtClean="0">
+              <a:rPr lang="en-US" sz="4000" b="1" baseline="30000">
                 <a:solidFill>
                   <a:schemeClr val="accent1"/>
                 </a:solidFill>
@@ -14472,7 +14012,7 @@
               <a:t>D*</a:t>
             </a:r>
             <a:r>
-              <a:rPr lang="en-US" sz="4000" b="1" smtClean="0">
+              <a:rPr lang="en-US" sz="4000" b="1">
                 <a:solidFill>
                   <a:schemeClr val="accent1"/>
                 </a:solidFill>
@@ -14508,11 +14048,11 @@
           <a:lstStyle/>
           <a:p>
             <a:r>
-              <a:rPr lang="en-US" smtClean="0"/>
+              <a:rPr lang="en-US"/>
               <a:t>A </a:t>
             </a:r>
             <a:r>
-              <a:rPr lang="en-US" b="1" smtClean="0">
+              <a:rPr lang="en-US" b="1">
                 <a:solidFill>
                   <a:srgbClr val="FF0000"/>
                 </a:solidFill>
@@ -14520,7 +14060,7 @@
               <a:t>statistical divergence</a:t>
             </a:r>
             <a:r>
-              <a:rPr lang="en-US" smtClean="0"/>
+              <a:rPr lang="en-US"/>
               <a:t> like the Kullback-Leibler divergence is a smooth non-metric distance between probability measures</a:t>
             </a:r>
           </a:p>
@@ -14528,15 +14068,15 @@
             <a:endParaRPr lang="en-US"/>
           </a:p>
           <a:p>
-            <a:endParaRPr lang="en-US" smtClean="0"/>
-          </a:p>
-          <a:p>
-            <a:r>
-              <a:rPr lang="en-US" smtClean="0"/>
+            <a:endParaRPr lang="en-US"/>
+          </a:p>
+          <a:p>
+            <a:r>
+              <a:rPr lang="en-US"/>
               <a:t>A statistical divergence between two densities of a statistical model is a </a:t>
             </a:r>
             <a:r>
-              <a:rPr lang="en-US" b="1" smtClean="0">
+              <a:rPr lang="en-US" b="1">
                 <a:solidFill>
                   <a:srgbClr val="FF0000"/>
                 </a:solidFill>
@@ -14544,51 +14084,51 @@
               <a:t>parametric divergence </a:t>
             </a:r>
             <a:r>
-              <a:rPr lang="en-US" smtClean="0"/>
+              <a:rPr lang="en-US"/>
               <a:t>(e.g., KLD between two normal distributions)</a:t>
             </a:r>
           </a:p>
           <a:p>
-            <a:endParaRPr lang="en-US" smtClean="0"/>
-          </a:p>
-          <a:p>
-            <a:r>
-              <a:rPr lang="en-US" smtClean="0"/>
+            <a:endParaRPr lang="en-US"/>
+          </a:p>
+          <a:p>
+            <a:r>
+              <a:rPr lang="en-US"/>
               <a:t>Construction of </a:t>
             </a:r>
             <a:r>
-              <a:rPr lang="en-US" i="1" smtClean="0"/>
+              <a:rPr lang="en-US" i="1"/>
               <a:t>dual geometry from asymmetric parametric divergence D(</a:t>
             </a:r>
             <a:r>
-              <a:rPr lang="el-GR" smtClean="0"/>
+              <a:rPr lang="el-GR"/>
               <a:t>θ</a:t>
             </a:r>
             <a:r>
-              <a:rPr lang="en-US" baseline="-25000" smtClean="0"/>
+              <a:rPr lang="en-US" baseline="-25000"/>
               <a:t>1</a:t>
             </a:r>
             <a:r>
-              <a:rPr lang="en-US" smtClean="0"/>
+              <a:rPr lang="en-US"/>
               <a:t>:</a:t>
             </a:r>
             <a:r>
-              <a:rPr lang="el-GR" smtClean="0"/>
+              <a:rPr lang="el-GR"/>
               <a:t>θ</a:t>
             </a:r>
             <a:r>
-              <a:rPr lang="en-US" baseline="-25000" smtClean="0"/>
+              <a:rPr lang="en-US" baseline="-25000"/>
               <a:t>2</a:t>
             </a:r>
             <a:r>
-              <a:rPr lang="en-US" i="1" smtClean="0"/>
+              <a:rPr lang="en-US" i="1"/>
               <a:t>)</a:t>
             </a:r>
             <a:endParaRPr lang="en-US"/>
           </a:p>
           <a:p>
             <a:r>
-              <a:rPr lang="en-US" b="1" smtClean="0">
+              <a:rPr lang="en-US" b="1">
                 <a:solidFill>
                   <a:srgbClr val="FF0000"/>
                 </a:solidFill>
@@ -14596,43 +14136,43 @@
               <a:t>Dual divergence</a:t>
             </a:r>
             <a:r>
-              <a:rPr lang="en-US" smtClean="0"/>
+              <a:rPr lang="en-US"/>
               <a:t> is </a:t>
             </a:r>
             <a:r>
-              <a:rPr lang="en-US" i="1" smtClean="0"/>
+              <a:rPr lang="en-US" i="1"/>
               <a:t>D*(</a:t>
             </a:r>
             <a:r>
-              <a:rPr lang="el-GR" smtClean="0"/>
+              <a:rPr lang="el-GR"/>
               <a:t>θ</a:t>
             </a:r>
             <a:r>
-              <a:rPr lang="en-US" baseline="-25000" smtClean="0"/>
+              <a:rPr lang="en-US" baseline="-25000"/>
               <a:t>1</a:t>
             </a:r>
             <a:r>
-              <a:rPr lang="en-US" smtClean="0"/>
+              <a:rPr lang="en-US"/>
               <a:t>:</a:t>
             </a:r>
             <a:r>
-              <a:rPr lang="el-GR" smtClean="0"/>
+              <a:rPr lang="el-GR"/>
               <a:t>θ</a:t>
             </a:r>
             <a:r>
-              <a:rPr lang="en-US" baseline="-25000" smtClean="0"/>
+              <a:rPr lang="en-US" baseline="-25000"/>
               <a:t>2</a:t>
             </a:r>
             <a:r>
-              <a:rPr lang="en-US" i="1" smtClean="0"/>
+              <a:rPr lang="en-US" i="1"/>
               <a:t>)=D(</a:t>
             </a:r>
             <a:r>
-              <a:rPr lang="el-GR" smtClean="0"/>
+              <a:rPr lang="el-GR"/>
               <a:t>θ</a:t>
             </a:r>
             <a:r>
-              <a:rPr lang="en-US" baseline="-25000" smtClean="0"/>
+              <a:rPr lang="en-US" baseline="-25000"/>
               <a:t>2</a:t>
             </a:r>
             <a:r>
@@ -14640,15 +14180,15 @@
               <a:t>:</a:t>
             </a:r>
             <a:r>
-              <a:rPr lang="el-GR" smtClean="0"/>
+              <a:rPr lang="el-GR"/>
               <a:t>θ</a:t>
             </a:r>
             <a:r>
-              <a:rPr lang="en-US" baseline="-25000" smtClean="0"/>
+              <a:rPr lang="en-US" baseline="-25000"/>
               <a:t>1</a:t>
             </a:r>
             <a:r>
-              <a:rPr lang="en-US" i="1" smtClean="0"/>
+              <a:rPr lang="en-US" i="1"/>
               <a:t>), reverse divergence</a:t>
             </a:r>
           </a:p>
@@ -14656,13 +14196,13 @@
             <a:pPr marL="0" indent="0">
               <a:buNone/>
             </a:pPr>
-            <a:endParaRPr lang="en-US" smtClean="0"/>
-          </a:p>
-          <a:p>
             <a:endParaRPr lang="en-US"/>
           </a:p>
           <a:p>
-            <a:endParaRPr lang="en-US" smtClean="0"/>
+            <a:endParaRPr lang="en-US"/>
+          </a:p>
+          <a:p>
+            <a:endParaRPr lang="en-US"/>
           </a:p>
           <a:p>
             <a:endParaRPr lang="fr-FR"/>
@@ -14764,7 +14304,7 @@
           <a:lstStyle/>
           <a:p>
             <a:r>
-              <a:rPr lang="en-US" sz="2400" smtClean="0"/>
+              <a:rPr lang="en-US" sz="2400"/>
               <a:t>Cubic tensor C or T:</a:t>
             </a:r>
             <a:endParaRPr lang="fr-FR" sz="2400"/>
@@ -14794,7 +14334,7 @@
           <a:lstStyle/>
           <a:p>
             <a:r>
-              <a:rPr lang="en-US" sz="2400" smtClean="0"/>
+              <a:rPr lang="en-US" sz="2400"/>
               <a:t>Dual structure:</a:t>
             </a:r>
             <a:endParaRPr lang="fr-FR" sz="2400"/>
@@ -14848,7 +14388,7 @@
           <a:lstStyle/>
           <a:p>
             <a:r>
-              <a:rPr lang="en-US" sz="2400" b="1" smtClean="0">
+              <a:rPr lang="en-US" sz="2400" b="1">
                 <a:solidFill>
                   <a:schemeClr val="accent6"/>
                 </a:solidFill>
@@ -14982,7 +14522,7 @@
           <a:lstStyle/>
           <a:p>
             <a:r>
-              <a:rPr lang="en-US" sz="2400" b="1" smtClean="0">
+              <a:rPr lang="en-US" sz="2400" b="1">
                 <a:solidFill>
                   <a:schemeClr val="accent2"/>
                 </a:solidFill>
@@ -15020,13 +14560,13 @@
           <a:lstStyle/>
           <a:p>
             <a:r>
-              <a:rPr lang="en-US" smtClean="0"/>
+              <a:rPr lang="en-US"/>
               <a:t>Hellinger divergence, chi-square divergence</a:t>
             </a:r>
           </a:p>
           <a:p>
             <a:r>
-              <a:rPr lang="en-US" smtClean="0"/>
+              <a:rPr lang="en-US"/>
               <a:t>f-divergence, </a:t>
             </a:r>
             <a:r>
@@ -15034,7 +14574,7 @@
               <a:t>α</a:t>
             </a:r>
             <a:r>
-              <a:rPr lang="en-US" smtClean="0"/>
+              <a:rPr lang="en-US"/>
               <a:t>-divergence, etc.</a:t>
             </a:r>
             <a:endParaRPr lang="fr-FR"/>
@@ -15097,13 +14637,6 @@
   <p:clrMapOvr>
     <a:masterClrMapping/>
   </p:clrMapOvr>
-  <p:timing>
-    <p:tnLst>
-      <p:par>
-        <p:cTn id="1" dur="indefinite" restart="never" nodeType="tmRoot"/>
-      </p:par>
-    </p:tnLst>
-  </p:timing>
 </p:sld>
 </file>
 
@@ -15145,7 +14678,7 @@
           <a:lstStyle/>
           <a:p>
             <a:r>
-              <a:rPr lang="en-US" b="1" smtClean="0">
+              <a:rPr lang="en-US" b="1">
                 <a:solidFill>
                   <a:schemeClr val="accent1"/>
                 </a:solidFill>
@@ -15203,46 +14736,26 @@
           </a:p>
           <a:p>
             <a:r>
-              <a:rPr lang="en-US" smtClean="0"/>
-              <a:t>Realize  </a:t>
-            </a:r>
-            <a:r>
-              <a:rPr lang="en-US"/>
-              <a:t>(</a:t>
-            </a:r>
-            <a:r>
-              <a:rPr lang="en-US" smtClean="0"/>
-              <a:t>M,g,</a:t>
-            </a:r>
-            <a:r>
-              <a:rPr lang="fr-FR" smtClean="0"/>
-              <a:t>∇</a:t>
-            </a:r>
-            <a:r>
-              <a:rPr lang="en-US" smtClean="0"/>
-              <a:t>,</a:t>
-            </a:r>
-            <a:r>
-              <a:rPr lang="fr-FR" smtClean="0"/>
-              <a:t>∇</a:t>
-            </a:r>
-            <a:r>
-              <a:rPr lang="en-US" smtClean="0"/>
-              <a:t>) as a divergence information geometry (M,g</a:t>
-            </a:r>
-            <a:r>
-              <a:rPr lang="en-US" baseline="30000" smtClean="0"/>
-              <a:t>D</a:t>
-            </a:r>
-            <a:r>
-              <a:rPr lang="en-US"/>
-              <a:t>,</a:t>
+              <a:rPr lang="en-US"/>
+              <a:t>Realize  (M,g,</a:t>
             </a:r>
             <a:r>
               <a:rPr lang="fr-FR"/>
               <a:t>∇</a:t>
             </a:r>
             <a:r>
+              <a:rPr lang="en-US"/>
+              <a:t>,</a:t>
+            </a:r>
+            <a:r>
+              <a:rPr lang="fr-FR"/>
+              <a:t>∇</a:t>
+            </a:r>
+            <a:r>
+              <a:rPr lang="en-US"/>
+              <a:t>) as a divergence information geometry (M,g</a:t>
+            </a:r>
+            <a:r>
               <a:rPr lang="en-US" baseline="30000"/>
               <a:t>D</a:t>
             </a:r>
@@ -15259,11 +14772,19 @@
               <a:t>D</a:t>
             </a:r>
             <a:r>
-              <a:rPr lang="en-US" baseline="30000" smtClean="0"/>
-              <a:t>*</a:t>
-            </a:r>
-            <a:r>
-              <a:rPr lang="en-US" smtClean="0"/>
+              <a:rPr lang="en-US"/>
+              <a:t>,</a:t>
+            </a:r>
+            <a:r>
+              <a:rPr lang="fr-FR"/>
+              <a:t>∇</a:t>
+            </a:r>
+            <a:r>
+              <a:rPr lang="en-US" baseline="30000"/>
+              <a:t>D*</a:t>
+            </a:r>
+            <a:r>
+              <a:rPr lang="en-US"/>
               <a:t>):  </a:t>
             </a:r>
           </a:p>
@@ -15272,12 +14793,8 @@
               <a:buNone/>
             </a:pPr>
             <a:r>
-              <a:rPr lang="en-US" smtClean="0"/>
-              <a:t>	always exists a divergence D such that </a:t>
-            </a:r>
-            <a:r>
-              <a:rPr lang="en-US"/>
-              <a:t>(M,g,</a:t>
+              <a:rPr lang="en-US"/>
+              <a:t>	always exists a divergence D such that (M,g,</a:t>
             </a:r>
             <a:r>
               <a:rPr lang="fr-FR"/>
@@ -15292,12 +14809,8 @@
               <a:t>∇</a:t>
             </a:r>
             <a:r>
-              <a:rPr lang="en-US" smtClean="0"/>
-              <a:t>)=</a:t>
-            </a:r>
-            <a:r>
-              <a:rPr lang="en-US"/>
-              <a:t>(M,g</a:t>
+              <a:rPr lang="en-US"/>
+              <a:t>)=(M,g</a:t>
             </a:r>
             <a:r>
               <a:rPr lang="en-US" baseline="30000"/>
@@ -15325,248 +14838,10 @@
             </a:r>
             <a:r>
               <a:rPr lang="en-US" baseline="30000"/>
-              <a:t>D</a:t>
-            </a:r>
-            <a:r>
-              <a:rPr lang="en-US" baseline="30000" smtClean="0"/>
-              <a:t>*</a:t>
-            </a:r>
-            <a:r>
-              <a:rPr lang="en-US" smtClean="0"/>
-              <a:t>)</a:t>
-            </a:r>
-          </a:p>
-          <a:p>
-            <a:pPr marL="0" indent="0">
-              <a:buNone/>
-            </a:pPr>
-            <a:endParaRPr lang="en-US" smtClean="0"/>
-          </a:p>
-          <a:p>
-            <a:pPr marL="0" indent="0">
-              <a:buNone/>
-            </a:pPr>
-            <a:r>
-              <a:rPr lang="en-US" sz="2400" b="1" smtClean="0">
-                <a:solidFill>
-                  <a:schemeClr val="accent6"/>
-                </a:solidFill>
-              </a:rPr>
-              <a:t>Matumoto, </a:t>
-            </a:r>
-            <a:r>
-              <a:rPr lang="en-US" sz="2400" b="1">
-                <a:solidFill>
-                  <a:schemeClr val="accent6"/>
-                </a:solidFill>
-              </a:rPr>
-              <a:t>"Any statistical manifold has a contrast function—On the C3-functions taking the minimum at the </a:t>
-            </a:r>
-            <a:r>
-              <a:rPr lang="en-US" sz="2400" b="1" u="sng">
-                <a:solidFill>
-                  <a:schemeClr val="accent6"/>
-                </a:solidFill>
-              </a:rPr>
-              <a:t>diagonal of the product manifold</a:t>
-            </a:r>
-            <a:r>
-              <a:rPr lang="en-US" sz="2400" b="1">
-                <a:solidFill>
-                  <a:schemeClr val="accent6"/>
-                </a:solidFill>
-              </a:rPr>
-              <a:t>." </a:t>
-            </a:r>
-            <a:r>
-              <a:rPr lang="en-US" sz="2400" b="1" i="1">
-                <a:solidFill>
-                  <a:schemeClr val="accent6"/>
-                </a:solidFill>
-              </a:rPr>
-              <a:t>Hiroshima Math. J</a:t>
-            </a:r>
-            <a:r>
-              <a:rPr lang="en-US" sz="2400" b="1">
-                <a:solidFill>
-                  <a:schemeClr val="accent6"/>
-                </a:solidFill>
-              </a:rPr>
-              <a:t> 23.2 (1993</a:t>
-            </a:r>
-            <a:r>
-              <a:rPr lang="en-US" sz="2400" b="1" smtClean="0">
-                <a:solidFill>
-                  <a:schemeClr val="accent6"/>
-                </a:solidFill>
-              </a:rPr>
-              <a:t>) </a:t>
-            </a:r>
-            <a:endParaRPr lang="en-US" sz="2400" b="1">
-              <a:solidFill>
-                <a:schemeClr val="accent6"/>
-              </a:solidFill>
-            </a:endParaRPr>
-          </a:p>
-          <a:p>
-            <a:endParaRPr lang="en-US" smtClean="0"/>
-          </a:p>
-          <a:p>
-            <a:r>
-              <a:rPr lang="en-US" smtClean="0"/>
-              <a:t>Realize </a:t>
-            </a:r>
-            <a:r>
-              <a:rPr lang="en-US"/>
-              <a:t>(M,g,</a:t>
-            </a:r>
-            <a:r>
-              <a:rPr lang="fr-FR"/>
-              <a:t>∇</a:t>
-            </a:r>
-            <a:r>
-              <a:rPr lang="en-US"/>
-              <a:t>,</a:t>
-            </a:r>
-            <a:r>
-              <a:rPr lang="fr-FR"/>
-              <a:t>∇</a:t>
-            </a:r>
-            <a:r>
-              <a:rPr lang="en-US" smtClean="0"/>
-              <a:t>) as a model information geometry (M,g</a:t>
-            </a:r>
-            <a:r>
-              <a:rPr lang="en-US" baseline="30000" smtClean="0"/>
-              <a:t>F</a:t>
-            </a:r>
-            <a:r>
-              <a:rPr lang="en-US"/>
-              <a:t>,</a:t>
-            </a:r>
-            <a:r>
-              <a:rPr lang="fr-FR"/>
-              <a:t>∇</a:t>
-            </a:r>
-            <a:r>
-              <a:rPr lang="en-US" baseline="30000"/>
-              <a:t>-</a:t>
-            </a:r>
-            <a:r>
-              <a:rPr lang="el-GR" baseline="30000"/>
-              <a:t>α</a:t>
-            </a:r>
-            <a:r>
-              <a:rPr lang="en-US"/>
-              <a:t>,</a:t>
-            </a:r>
-            <a:r>
-              <a:rPr lang="fr-FR"/>
-              <a:t>∇</a:t>
-            </a:r>
-            <a:r>
-              <a:rPr lang="el-GR" baseline="30000"/>
-              <a:t>α</a:t>
-            </a:r>
-            <a:r>
-              <a:rPr lang="en-US" smtClean="0"/>
-              <a:t>)</a:t>
-            </a:r>
-          </a:p>
-          <a:p>
-            <a:pPr marL="0" indent="0">
-              <a:buNone/>
-            </a:pPr>
-            <a:r>
-              <a:rPr lang="en-US" smtClean="0"/>
-              <a:t>	always </a:t>
-            </a:r>
-            <a:r>
-              <a:rPr lang="en-US"/>
-              <a:t>exists a </a:t>
-            </a:r>
-            <a:r>
-              <a:rPr lang="en-US" smtClean="0"/>
-              <a:t>statistical model M </a:t>
-            </a:r>
-            <a:r>
-              <a:rPr lang="en-US"/>
-              <a:t>such that (M,g,</a:t>
-            </a:r>
-            <a:r>
-              <a:rPr lang="fr-FR"/>
-              <a:t>∇</a:t>
-            </a:r>
-            <a:r>
-              <a:rPr lang="en-US"/>
-              <a:t>,</a:t>
-            </a:r>
-            <a:r>
-              <a:rPr lang="fr-FR"/>
-              <a:t>∇</a:t>
-            </a:r>
-            <a:r>
-              <a:rPr lang="en-US" smtClean="0"/>
-              <a:t>)=</a:t>
-            </a:r>
-            <a:r>
-              <a:rPr lang="en-US"/>
-              <a:t>(</a:t>
-            </a:r>
-            <a:r>
-              <a:rPr lang="en-US" smtClean="0"/>
-              <a:t>M,</a:t>
-            </a:r>
-            <a:r>
-              <a:rPr lang="en-US" baseline="-25000" smtClean="0"/>
-              <a:t>P</a:t>
-            </a:r>
-            <a:r>
-              <a:rPr lang="en-US" smtClean="0"/>
-              <a:t>g</a:t>
-            </a:r>
-            <a:r>
-              <a:rPr lang="en-US" baseline="30000" smtClean="0"/>
-              <a:t>F</a:t>
-            </a:r>
-            <a:r>
-              <a:rPr lang="en-US" smtClean="0"/>
-              <a:t>,</a:t>
-            </a:r>
-            <a:r>
-              <a:rPr lang="en-US" baseline="-25000" smtClean="0"/>
-              <a:t>P</a:t>
-            </a:r>
-            <a:r>
-              <a:rPr lang="fr-FR" smtClean="0"/>
-              <a:t>∇</a:t>
-            </a:r>
-            <a:r>
-              <a:rPr lang="en-US" baseline="30000"/>
-              <a:t>-</a:t>
-            </a:r>
-            <a:r>
-              <a:rPr lang="el-GR" baseline="30000"/>
-              <a:t>α</a:t>
-            </a:r>
-            <a:r>
-              <a:rPr lang="en-US" smtClean="0"/>
-              <a:t>,</a:t>
-            </a:r>
-            <a:r>
-              <a:rPr lang="en-US" baseline="-25000" smtClean="0"/>
-              <a:t>P</a:t>
-            </a:r>
-            <a:r>
-              <a:rPr lang="fr-FR" smtClean="0"/>
-              <a:t>∇</a:t>
-            </a:r>
-            <a:r>
-              <a:rPr lang="el-GR" baseline="30000"/>
-              <a:t>α</a:t>
-            </a:r>
-            <a:r>
-              <a:rPr lang="en-US" smtClean="0"/>
+              <a:t>D*</a:t>
+            </a:r>
+            <a:r>
+              <a:rPr lang="en-US"/>
               <a:t>)</a:t>
             </a:r>
           </a:p>
@@ -15581,12 +14856,20 @@
               <a:buNone/>
             </a:pPr>
             <a:r>
-              <a:rPr lang="en-US" sz="2400" b="1" smtClean="0">
+              <a:rPr lang="en-US" sz="2400" b="1">
                 <a:solidFill>
                   <a:schemeClr val="accent6"/>
                 </a:solidFill>
               </a:rPr>
-              <a:t>Lê, Hông Vân</a:t>
+              <a:t>Matumoto, "Any statistical manifold has a contrast function—On the C3-functions taking the minimum at the </a:t>
+            </a:r>
+            <a:r>
+              <a:rPr lang="en-US" sz="2400" b="1" u="sng">
+                <a:solidFill>
+                  <a:schemeClr val="accent6"/>
+                </a:solidFill>
+              </a:rPr>
+              <a:t>diagonal of the product manifold</a:t>
             </a:r>
             <a:r>
               <a:rPr lang="en-US" sz="2400" b="1">
@@ -15594,7 +14877,7 @@
                   <a:schemeClr val="accent6"/>
                 </a:solidFill>
               </a:rPr>
-              <a:t>. "Statistical manifolds are statistical models." </a:t>
+              <a:t>." </a:t>
             </a:r>
             <a:r>
               <a:rPr lang="en-US" sz="2400" b="1" i="1">
@@ -15602,6 +14885,179 @@
                   <a:schemeClr val="accent6"/>
                 </a:solidFill>
               </a:rPr>
+              <a:t>Hiroshima Math. J</a:t>
+            </a:r>
+            <a:r>
+              <a:rPr lang="en-US" sz="2400" b="1">
+                <a:solidFill>
+                  <a:schemeClr val="accent6"/>
+                </a:solidFill>
+              </a:rPr>
+              <a:t> 23.2 (1993) </a:t>
+            </a:r>
+          </a:p>
+          <a:p>
+            <a:endParaRPr lang="en-US"/>
+          </a:p>
+          <a:p>
+            <a:r>
+              <a:rPr lang="en-US"/>
+              <a:t>Realize (M,g,</a:t>
+            </a:r>
+            <a:r>
+              <a:rPr lang="fr-FR"/>
+              <a:t>∇</a:t>
+            </a:r>
+            <a:r>
+              <a:rPr lang="en-US"/>
+              <a:t>,</a:t>
+            </a:r>
+            <a:r>
+              <a:rPr lang="fr-FR"/>
+              <a:t>∇</a:t>
+            </a:r>
+            <a:r>
+              <a:rPr lang="en-US"/>
+              <a:t>) as a model information geometry (M,g</a:t>
+            </a:r>
+            <a:r>
+              <a:rPr lang="en-US" baseline="30000"/>
+              <a:t>F</a:t>
+            </a:r>
+            <a:r>
+              <a:rPr lang="en-US"/>
+              <a:t>,</a:t>
+            </a:r>
+            <a:r>
+              <a:rPr lang="fr-FR"/>
+              <a:t>∇</a:t>
+            </a:r>
+            <a:r>
+              <a:rPr lang="en-US" baseline="30000"/>
+              <a:t>-</a:t>
+            </a:r>
+            <a:r>
+              <a:rPr lang="el-GR" baseline="30000"/>
+              <a:t>α</a:t>
+            </a:r>
+            <a:r>
+              <a:rPr lang="en-US"/>
+              <a:t>,</a:t>
+            </a:r>
+            <a:r>
+              <a:rPr lang="fr-FR"/>
+              <a:t>∇</a:t>
+            </a:r>
+            <a:r>
+              <a:rPr lang="el-GR" baseline="30000"/>
+              <a:t>α</a:t>
+            </a:r>
+            <a:r>
+              <a:rPr lang="en-US"/>
+              <a:t>)</a:t>
+            </a:r>
+          </a:p>
+          <a:p>
+            <a:pPr marL="0" indent="0">
+              <a:buNone/>
+            </a:pPr>
+            <a:r>
+              <a:rPr lang="en-US"/>
+              <a:t>	always exists a statistical model M such that (M,g,</a:t>
+            </a:r>
+            <a:r>
+              <a:rPr lang="fr-FR"/>
+              <a:t>∇</a:t>
+            </a:r>
+            <a:r>
+              <a:rPr lang="en-US"/>
+              <a:t>,</a:t>
+            </a:r>
+            <a:r>
+              <a:rPr lang="fr-FR"/>
+              <a:t>∇</a:t>
+            </a:r>
+            <a:r>
+              <a:rPr lang="en-US"/>
+              <a:t>)=(M,</a:t>
+            </a:r>
+            <a:r>
+              <a:rPr lang="en-US" baseline="-25000"/>
+              <a:t>P</a:t>
+            </a:r>
+            <a:r>
+              <a:rPr lang="en-US"/>
+              <a:t>g</a:t>
+            </a:r>
+            <a:r>
+              <a:rPr lang="en-US" baseline="30000"/>
+              <a:t>F</a:t>
+            </a:r>
+            <a:r>
+              <a:rPr lang="en-US"/>
+              <a:t>,</a:t>
+            </a:r>
+            <a:r>
+              <a:rPr lang="en-US" baseline="-25000"/>
+              <a:t>P</a:t>
+            </a:r>
+            <a:r>
+              <a:rPr lang="fr-FR"/>
+              <a:t>∇</a:t>
+            </a:r>
+            <a:r>
+              <a:rPr lang="en-US" baseline="30000"/>
+              <a:t>-</a:t>
+            </a:r>
+            <a:r>
+              <a:rPr lang="el-GR" baseline="30000"/>
+              <a:t>α</a:t>
+            </a:r>
+            <a:r>
+              <a:rPr lang="en-US"/>
+              <a:t>,</a:t>
+            </a:r>
+            <a:r>
+              <a:rPr lang="en-US" baseline="-25000"/>
+              <a:t>P</a:t>
+            </a:r>
+            <a:r>
+              <a:rPr lang="fr-FR"/>
+              <a:t>∇</a:t>
+            </a:r>
+            <a:r>
+              <a:rPr lang="el-GR" baseline="30000"/>
+              <a:t>α</a:t>
+            </a:r>
+            <a:r>
+              <a:rPr lang="en-US"/>
+              <a:t>)</a:t>
+            </a:r>
+          </a:p>
+          <a:p>
+            <a:pPr marL="0" indent="0">
+              <a:buNone/>
+            </a:pPr>
+            <a:endParaRPr lang="en-US"/>
+          </a:p>
+          <a:p>
+            <a:pPr marL="0" indent="0">
+              <a:buNone/>
+            </a:pPr>
+            <a:r>
+              <a:rPr lang="en-US" sz="2400" b="1">
+                <a:solidFill>
+                  <a:schemeClr val="accent6"/>
+                </a:solidFill>
+              </a:rPr>
+              <a:t>Lê, Hông Vân. "Statistical manifolds are statistical models." </a:t>
+            </a:r>
+            <a:r>
+              <a:rPr lang="en-US" sz="2400" b="1" i="1">
+                <a:solidFill>
+                  <a:schemeClr val="accent6"/>
+                </a:solidFill>
+              </a:rPr>
               <a:t>Journal of Geometry</a:t>
             </a:r>
             <a:r>
@@ -15612,11 +15068,6 @@
               </a:rPr>
               <a:t> 84 (2006): 83-93.</a:t>
             </a:r>
-            <a:endParaRPr lang="en-US" sz="2400" b="1" smtClean="0">
-              <a:solidFill>
-                <a:schemeClr val="accent6"/>
-              </a:solidFill>
-            </a:endParaRPr>
           </a:p>
           <a:p>
             <a:endParaRPr lang="fr-FR"/>
@@ -15633,13 +15084,6 @@
   <p:clrMapOvr>
     <a:masterClrMapping/>
   </p:clrMapOvr>
-  <p:timing>
-    <p:tnLst>
-      <p:par>
-        <p:cTn id="1" dur="indefinite" restart="never" nodeType="tmRoot"/>
-      </p:par>
-    </p:tnLst>
-  </p:timing>
 </p:sld>
 </file>
 
@@ -15707,7 +15151,7 @@
           <a:lstStyle/>
           <a:p>
             <a:r>
-              <a:rPr lang="en-US" sz="4000" b="1" smtClean="0">
+              <a:rPr lang="en-US" sz="4000" b="1">
                 <a:solidFill>
                   <a:schemeClr val="accent1"/>
                 </a:solidFill>
@@ -15715,7 +15159,7 @@
               <a:t>Equivalence: model </a:t>
             </a:r>
             <a:r>
-              <a:rPr lang="el-GR" sz="4000" b="1" smtClean="0">
+              <a:rPr lang="el-GR" sz="4000" b="1">
                 <a:solidFill>
                   <a:schemeClr val="accent1"/>
                 </a:solidFill>
@@ -15723,7 +15167,7 @@
               <a:t>α</a:t>
             </a:r>
             <a:r>
-              <a:rPr lang="en-US" sz="4000" b="1" smtClean="0">
+              <a:rPr lang="en-US" sz="4000" b="1">
                 <a:solidFill>
                   <a:schemeClr val="accent1"/>
                 </a:solidFill>
@@ -15731,7 +15175,7 @@
               <a:t>-IG </a:t>
             </a:r>
             <a:r>
-              <a:rPr lang="fr-FR" sz="4000" b="1" smtClean="0">
+              <a:rPr lang="fr-FR" sz="4000" b="1">
                 <a:solidFill>
                   <a:schemeClr val="accent1"/>
                 </a:solidFill>
@@ -15739,7 +15183,7 @@
               <a:t>↔ </a:t>
             </a:r>
             <a:r>
-              <a:rPr lang="en-US" sz="4000" b="1" smtClean="0">
+              <a:rPr lang="en-US" sz="4000" b="1">
                 <a:solidFill>
                   <a:schemeClr val="accent1"/>
                 </a:solidFill>
@@ -15775,7 +15219,7 @@
           <a:lstStyle/>
           <a:p>
             <a:r>
-              <a:rPr lang="en-US" smtClean="0"/>
+              <a:rPr lang="en-US"/>
               <a:t>Let P={p</a:t>
             </a:r>
             <a:r>
@@ -15783,7 +15227,7 @@
               <a:t>θ</a:t>
             </a:r>
             <a:r>
-              <a:rPr lang="en-US" smtClean="0"/>
+              <a:rPr lang="en-US"/>
               <a:t>} be a statistical model of probability distributions dominated by </a:t>
             </a:r>
             <a:r>
@@ -15794,11 +15238,11 @@
           </a:p>
           <a:p>
             <a:r>
-              <a:rPr lang="en-US" smtClean="0"/>
+              <a:rPr lang="en-US"/>
               <a:t>Consider the </a:t>
             </a:r>
             <a:r>
-              <a:rPr lang="en-US" b="1" smtClean="0">
+              <a:rPr lang="en-US" b="1">
                 <a:solidFill>
                   <a:srgbClr val="FF0000"/>
                 </a:solidFill>
@@ -15806,11 +15250,11 @@
               <a:t>f-divergence</a:t>
             </a:r>
             <a:r>
-              <a:rPr lang="en-US" smtClean="0"/>
+              <a:rPr lang="en-US"/>
               <a:t> for a convex generator f(u) with f(1)=0, f'(1)=1, </a:t>
             </a:r>
             <a:r>
-              <a:rPr lang="en-US" smtClean="0">
+              <a:rPr lang="en-US">
                 <a:solidFill>
                   <a:srgbClr val="00B0F0"/>
                 </a:solidFill>
@@ -15818,7 +15262,7 @@
               <a:t>f''(1)=1 </a:t>
             </a:r>
             <a:r>
-              <a:rPr lang="fr-FR" smtClean="0">
+              <a:rPr lang="fr-FR">
                 <a:solidFill>
                   <a:srgbClr val="00B0F0"/>
                 </a:solidFill>
@@ -15826,7 +15270,7 @@
               <a:t>← </a:t>
             </a:r>
             <a:r>
-              <a:rPr lang="en-US" smtClean="0">
+              <a:rPr lang="en-US">
                 <a:solidFill>
                   <a:srgbClr val="00B0F0"/>
                 </a:solidFill>
@@ -15834,7 +15278,7 @@
               <a:t>standard f-divergence</a:t>
             </a:r>
             <a:r>
-              <a:rPr lang="en-US" smtClean="0">
+              <a:rPr lang="en-US">
                 <a:solidFill>
                   <a:srgbClr val="0070C0"/>
                 </a:solidFill>
@@ -15842,7 +15286,7 @@
               <a:t>  </a:t>
             </a:r>
             <a:r>
-              <a:rPr lang="en-US" smtClean="0"/>
+              <a:rPr lang="en-US"/>
               <a:t>(can always rescale g(u)=f(u)/f''(1))</a:t>
             </a:r>
           </a:p>
@@ -15854,7 +15298,7 @@
             </a:endParaRPr>
           </a:p>
           <a:p>
-            <a:endParaRPr lang="en-US" smtClean="0">
+            <a:endParaRPr lang="en-US">
               <a:solidFill>
                 <a:schemeClr val="tx2"/>
               </a:solidFill>
@@ -15862,11 +15306,11 @@
           </a:p>
           <a:p>
             <a:r>
-              <a:rPr lang="en-US" smtClean="0"/>
+              <a:rPr lang="en-US"/>
               <a:t>The f-divergence between</a:t>
             </a:r>
             <a:r>
-              <a:rPr lang="en-US" smtClean="0">
+              <a:rPr lang="en-US">
                 <a:solidFill>
                   <a:schemeClr val="tx2"/>
                 </a:solidFill>
@@ -15878,11 +15322,11 @@
               <a:t>p</a:t>
             </a:r>
             <a:r>
-              <a:rPr lang="el-GR" baseline="-25000" smtClean="0"/>
+              <a:rPr lang="el-GR" baseline="-25000"/>
               <a:t>θ</a:t>
             </a:r>
             <a:r>
-              <a:rPr lang="en-US" baseline="-25000" smtClean="0"/>
+              <a:rPr lang="en-US" baseline="-25000"/>
               <a:t>1 </a:t>
             </a:r>
             <a:r>
@@ -15890,7 +15334,7 @@
               <a:t>and</a:t>
             </a:r>
             <a:r>
-              <a:rPr lang="en-US" baseline="-25000" smtClean="0"/>
+              <a:rPr lang="en-US" baseline="-25000"/>
               <a:t> </a:t>
             </a:r>
             <a:r>
@@ -15898,20 +15342,16 @@
               <a:t>p</a:t>
             </a:r>
             <a:r>
-              <a:rPr lang="el-GR" baseline="-25000" smtClean="0"/>
+              <a:rPr lang="el-GR" baseline="-25000"/>
               <a:t>θ</a:t>
             </a:r>
             <a:r>
-              <a:rPr lang="en-US" baseline="-25000" smtClean="0"/>
+              <a:rPr lang="en-US" baseline="-25000"/>
               <a:t>2 </a:t>
             </a:r>
             <a:r>
               <a:rPr lang="en-US"/>
-              <a:t>is a parameter </a:t>
-            </a:r>
-            <a:r>
-              <a:rPr lang="en-US" smtClean="0"/>
-              <a:t>divergence D(</a:t>
+              <a:t>is a parameter divergence D(</a:t>
             </a:r>
             <a:r>
               <a:rPr lang="el-GR"/>
@@ -15926,15 +15366,15 @@
               <a:t>:</a:t>
             </a:r>
             <a:r>
-              <a:rPr lang="el-GR" smtClean="0"/>
+              <a:rPr lang="el-GR"/>
               <a:t>θ</a:t>
             </a:r>
             <a:r>
-              <a:rPr lang="en-US" baseline="-25000" smtClean="0"/>
+              <a:rPr lang="en-US" baseline="-25000"/>
               <a:t>2</a:t>
             </a:r>
             <a:r>
-              <a:rPr lang="en-US" smtClean="0"/>
+              <a:rPr lang="en-US"/>
               <a:t>)</a:t>
             </a:r>
           </a:p>
@@ -15946,12 +15386,8 @@
               <a:buNone/>
             </a:pPr>
             <a:r>
-              <a:rPr lang="en-US" smtClean="0"/>
-              <a:t>from which we can build the divergence information geometry </a:t>
-            </a:r>
-            <a:r>
-              <a:rPr lang="en-US"/>
-              <a:t>(M,g</a:t>
+              <a:rPr lang="en-US"/>
+              <a:t>from which we can build the divergence information geometry (M,g</a:t>
             </a:r>
             <a:r>
               <a:rPr lang="en-US" baseline="30000"/>
@@ -15979,90 +15415,93 @@
             </a:r>
             <a:r>
               <a:rPr lang="en-US" baseline="30000"/>
-              <a:t>D</a:t>
-            </a:r>
-            <a:r>
-              <a:rPr lang="en-US" baseline="30000" smtClean="0"/>
-              <a:t>*</a:t>
-            </a:r>
-            <a:r>
-              <a:rPr lang="en-US" smtClean="0"/>
+              <a:t>D*</a:t>
+            </a:r>
+            <a:r>
+              <a:rPr lang="en-US"/>
               <a:t>)</a:t>
             </a:r>
+          </a:p>
+          <a:p>
+            <a:r>
+              <a:rPr lang="en-US"/>
+              <a:t>Then </a:t>
+            </a:r>
+            <a:r>
+              <a:rPr lang="en-US" b="1">
+                <a:solidFill>
+                  <a:srgbClr val="00B0F0"/>
+                </a:solidFill>
+              </a:rPr>
+              <a:t>model  </a:t>
+            </a:r>
+            <a:r>
+              <a:rPr lang="el-GR" b="1">
+                <a:solidFill>
+                  <a:srgbClr val="00B0F0"/>
+                </a:solidFill>
+              </a:rPr>
+              <a:t>α</a:t>
+            </a:r>
+            <a:r>
+              <a:rPr lang="en-US" b="1">
+                <a:solidFill>
+                  <a:srgbClr val="00B0F0"/>
+                </a:solidFill>
+              </a:rPr>
+              <a:t>-geometry</a:t>
+            </a:r>
+            <a:r>
+              <a:rPr lang="en-US"/>
+              <a:t> for </a:t>
+            </a:r>
+            <a:r>
+              <a:rPr lang="el-GR"/>
+              <a:t>α</a:t>
+            </a:r>
+            <a:r>
+              <a:rPr lang="en-US"/>
+              <a:t>=2 f'''(1)+3 coincide with </a:t>
+            </a:r>
+            <a:r>
+              <a:rPr lang="en-US" b="1">
+                <a:solidFill>
+                  <a:srgbClr val="00B0F0"/>
+                </a:solidFill>
+              </a:rPr>
+              <a:t>divergence IG</a:t>
+            </a:r>
+            <a:r>
+              <a:rPr lang="en-US"/>
+              <a:t>:</a:t>
+            </a:r>
+          </a:p>
+          <a:p>
             <a:endParaRPr lang="en-US"/>
-          </a:p>
-          <a:p>
-            <a:r>
-              <a:rPr lang="en-US" smtClean="0"/>
-              <a:t>Then </a:t>
-            </a:r>
-            <a:r>
-              <a:rPr lang="en-US" b="1" smtClean="0">
-                <a:solidFill>
-                  <a:srgbClr val="00B0F0"/>
-                </a:solidFill>
-              </a:rPr>
-              <a:t>model  </a:t>
-            </a:r>
-            <a:r>
-              <a:rPr lang="el-GR" b="1" smtClean="0">
-                <a:solidFill>
-                  <a:srgbClr val="00B0F0"/>
-                </a:solidFill>
-              </a:rPr>
-              <a:t>α</a:t>
-            </a:r>
-            <a:r>
-              <a:rPr lang="en-US" b="1" smtClean="0">
-                <a:solidFill>
-                  <a:srgbClr val="00B0F0"/>
-                </a:solidFill>
-              </a:rPr>
-              <a:t>-geometry</a:t>
-            </a:r>
-            <a:r>
-              <a:rPr lang="en-US" smtClean="0"/>
-              <a:t> for </a:t>
-            </a:r>
-            <a:r>
-              <a:rPr lang="el-GR" smtClean="0"/>
-              <a:t>α</a:t>
-            </a:r>
-            <a:r>
-              <a:rPr lang="en-US" smtClean="0"/>
-              <a:t>=2 f'''(1)+3 coincide with </a:t>
-            </a:r>
-            <a:r>
-              <a:rPr lang="en-US" b="1" smtClean="0">
-                <a:solidFill>
-                  <a:srgbClr val="00B0F0"/>
-                </a:solidFill>
-              </a:rPr>
-              <a:t>divergence IG</a:t>
-            </a:r>
-            <a:r>
-              <a:rPr lang="en-US" smtClean="0"/>
-              <a:t>:</a:t>
-            </a:r>
-          </a:p>
-          <a:p>
-            <a:endParaRPr lang="en-US" smtClean="0"/>
           </a:p>
           <a:p>
             <a:pPr marL="0" indent="0">
               <a:buNone/>
             </a:pPr>
             <a:r>
-              <a:rPr lang="en-US" smtClean="0"/>
+              <a:rPr lang="en-US"/>
               <a:t>                              </a:t>
             </a:r>
             <a:r>
-              <a:rPr lang="en-US" b="1" smtClean="0">
+              <a:rPr lang="en-US" b="1">
                 <a:solidFill>
                   <a:srgbClr val="FF0000"/>
                 </a:solidFill>
               </a:rPr>
-              <a:t>(</a:t>
+              <a:t>(M,g</a:t>
+            </a:r>
+            <a:r>
+              <a:rPr lang="en-US" b="1" baseline="30000">
+                <a:solidFill>
+                  <a:srgbClr val="FF0000"/>
+                </a:solidFill>
+              </a:rPr>
+              <a:t>D</a:t>
             </a:r>
             <a:r>
               <a:rPr lang="en-US" b="1">
@@ -16070,7 +15509,15 @@
                   <a:srgbClr val="FF0000"/>
                 </a:solidFill>
               </a:rPr>
-              <a:t>M,g</a:t>
+              <a:t>,</a:t>
+            </a:r>
+            <a:r>
+              <a:rPr lang="fr-FR" b="1">
+                <a:solidFill>
+                  <a:srgbClr val="FF0000"/>
+                </a:solidFill>
+              </a:rPr>
+              <a:t>∇</a:t>
             </a:r>
             <a:r>
               <a:rPr lang="en-US" b="1" baseline="30000">
@@ -16102,7 +15549,7 @@
                   <a:srgbClr val="FF0000"/>
                 </a:solidFill>
               </a:rPr>
-              <a:t>D</a:t>
+              <a:t>D*</a:t>
             </a:r>
             <a:r>
               <a:rPr lang="en-US" b="1">
@@ -16110,6 +15557,22 @@
                   <a:srgbClr val="FF0000"/>
                 </a:solidFill>
               </a:rPr>
+              <a:t>) = (M,g</a:t>
+            </a:r>
+            <a:r>
+              <a:rPr lang="en-US" b="1" baseline="30000">
+                <a:solidFill>
+                  <a:srgbClr val="FF0000"/>
+                </a:solidFill>
+              </a:rPr>
+              <a:t>F</a:t>
+            </a:r>
+            <a:r>
+              <a:rPr lang="en-US" b="1">
+                <a:solidFill>
+                  <a:srgbClr val="FF0000"/>
+                </a:solidFill>
+              </a:rPr>
               <a:t>,</a:t>
             </a:r>
             <a:r>
@@ -16126,23 +15589,39 @@
                   <a:srgbClr val="FF0000"/>
                 </a:solidFill>
               </a:rPr>
-              <a:t>D</a:t>
-            </a:r>
-            <a:r>
-              <a:rPr lang="en-US" b="1" baseline="30000" smtClean="0">
+              <a:t>-</a:t>
+            </a:r>
+            <a:r>
+              <a:rPr lang="el-GR" b="1" baseline="30000">
                 <a:solidFill>
                   <a:srgbClr val="FF0000"/>
                 </a:solidFill>
               </a:rPr>
-              <a:t>*</a:t>
-            </a:r>
-            <a:r>
-              <a:rPr lang="en-US" b="1" smtClean="0">
+              <a:t>α</a:t>
+            </a:r>
+            <a:r>
+              <a:rPr lang="en-US" b="1">
                 <a:solidFill>
                   <a:srgbClr val="FF0000"/>
                 </a:solidFill>
               </a:rPr>
-              <a:t>) = </a:t>
+              <a:t>,</a:t>
+            </a:r>
+            <a:r>
+              <a:rPr lang="fr-FR" b="1">
+                <a:solidFill>
+                  <a:srgbClr val="FF0000"/>
+                </a:solidFill>
+              </a:rPr>
+              <a:t>∇</a:t>
+            </a:r>
+            <a:r>
+              <a:rPr lang="el-GR" b="1" baseline="30000">
+                <a:solidFill>
+                  <a:srgbClr val="FF0000"/>
+                </a:solidFill>
+              </a:rPr>
+              <a:t>α</a:t>
             </a:r>
             <a:r>
               <a:rPr lang="en-US" b="1">
@@ -16150,15 +15629,15 @@
                   <a:srgbClr val="FF0000"/>
                 </a:solidFill>
               </a:rPr>
-              <a:t>(M,g</a:t>
-            </a:r>
-            <a:r>
-              <a:rPr lang="en-US" b="1" baseline="30000">
+              <a:t>) for </a:t>
+            </a:r>
+            <a:r>
+              <a:rPr lang="el-GR" b="1">
                 <a:solidFill>
                   <a:srgbClr val="FF0000"/>
                 </a:solidFill>
               </a:rPr>
-              <a:t>F</a:t>
+              <a:t>α</a:t>
             </a:r>
             <a:r>
               <a:rPr lang="en-US" b="1">
@@ -16166,97 +15645,9 @@
                   <a:srgbClr val="FF0000"/>
                 </a:solidFill>
               </a:rPr>
-              <a:t>,</a:t>
-            </a:r>
-            <a:r>
-              <a:rPr lang="fr-FR" b="1">
-                <a:solidFill>
-                  <a:srgbClr val="FF0000"/>
-                </a:solidFill>
-              </a:rPr>
-              <a:t>∇</a:t>
-            </a:r>
-            <a:r>
-              <a:rPr lang="en-US" b="1" baseline="30000">
-                <a:solidFill>
-                  <a:srgbClr val="FF0000"/>
-                </a:solidFill>
-              </a:rPr>
-              <a:t>-</a:t>
-            </a:r>
-            <a:r>
-              <a:rPr lang="el-GR" b="1" baseline="30000">
-                <a:solidFill>
-                  <a:srgbClr val="FF0000"/>
-                </a:solidFill>
-              </a:rPr>
-              <a:t>α</a:t>
-            </a:r>
-            <a:r>
-              <a:rPr lang="en-US" b="1">
-                <a:solidFill>
-                  <a:srgbClr val="FF0000"/>
-                </a:solidFill>
-              </a:rPr>
-              <a:t>,</a:t>
-            </a:r>
-            <a:r>
-              <a:rPr lang="fr-FR" b="1">
-                <a:solidFill>
-                  <a:srgbClr val="FF0000"/>
-                </a:solidFill>
-              </a:rPr>
-              <a:t>∇</a:t>
-            </a:r>
-            <a:r>
-              <a:rPr lang="el-GR" b="1" baseline="30000">
-                <a:solidFill>
-                  <a:srgbClr val="FF0000"/>
-                </a:solidFill>
-              </a:rPr>
-              <a:t>α</a:t>
-            </a:r>
-            <a:r>
-              <a:rPr lang="en-US" b="1">
-                <a:solidFill>
-                  <a:srgbClr val="FF0000"/>
-                </a:solidFill>
-              </a:rPr>
-              <a:t>)</a:t>
-            </a:r>
-            <a:r>
-              <a:rPr lang="en-US" b="1" smtClean="0">
-                <a:solidFill>
-                  <a:srgbClr val="FF0000"/>
-                </a:solidFill>
-              </a:rPr>
-              <a:t> for </a:t>
-            </a:r>
-            <a:r>
-              <a:rPr lang="el-GR" b="1">
-                <a:solidFill>
-                  <a:srgbClr val="FF0000"/>
-                </a:solidFill>
-              </a:rPr>
-              <a:t>α</a:t>
-            </a:r>
-            <a:r>
-              <a:rPr lang="en-US" b="1">
-                <a:solidFill>
-                  <a:srgbClr val="FF0000"/>
-                </a:solidFill>
-              </a:rPr>
-              <a:t>=2 f'''(1)+</a:t>
-            </a:r>
-            <a:r>
-              <a:rPr lang="en-US" b="1" smtClean="0">
-                <a:solidFill>
-                  <a:srgbClr val="FF0000"/>
-                </a:solidFill>
-              </a:rPr>
-              <a:t>3 </a:t>
-            </a:r>
-            <a:endParaRPr lang="en-US" sz="2000" smtClean="0"/>
+              <a:t>=2 f'''(1)+3 </a:t>
+            </a:r>
+            <a:endParaRPr lang="en-US" sz="2000"/>
           </a:p>
           <a:p>
             <a:pPr marL="0" indent="0">
@@ -16264,26 +15655,22 @@
             </a:pPr>
             <a:r>
               <a:rPr lang="en-US" sz="2000"/>
-              <a:t> </a:t>
-            </a:r>
-            <a:r>
-              <a:rPr lang="en-US" sz="2000" smtClean="0"/>
-              <a:t>            metric tensor  g</a:t>
-            </a:r>
-            <a:r>
-              <a:rPr lang="en-US" sz="2000" baseline="30000" smtClean="0"/>
+              <a:t>             metric tensor  g</a:t>
+            </a:r>
+            <a:r>
+              <a:rPr lang="en-US" sz="2000" baseline="30000"/>
               <a:t>D </a:t>
             </a:r>
             <a:r>
-              <a:rPr lang="en-US" sz="2000" smtClean="0"/>
+              <a:rPr lang="en-US" sz="2000"/>
               <a:t>and cubic tensor T</a:t>
             </a:r>
             <a:r>
-              <a:rPr lang="en-US" sz="2000" baseline="30000" smtClean="0"/>
+              <a:rPr lang="en-US" sz="2000" baseline="30000"/>
               <a:t>D</a:t>
             </a:r>
             <a:r>
-              <a:rPr lang="en-US" sz="2000" smtClean="0"/>
+              <a:rPr lang="en-US" sz="2000"/>
               <a:t> coincides with Fisher metric g</a:t>
             </a:r>
             <a:r>
@@ -16291,7 +15678,7 @@
               <a:t>F</a:t>
             </a:r>
             <a:r>
-              <a:rPr lang="en-US" sz="2000" smtClean="0"/>
+              <a:rPr lang="en-US" sz="2000"/>
               <a:t> and Amari-Chentsov tensor T</a:t>
             </a:r>
             <a:endParaRPr lang="fr-FR" sz="2000"/>
@@ -16393,7 +15780,7 @@
           <a:lstStyle/>
           <a:p>
             <a:r>
-              <a:rPr lang="en-US" smtClean="0"/>
+              <a:rPr lang="en-US"/>
               <a:t>Dual reverse f-divergence is a f-divergence for </a:t>
             </a:r>
             <a:endParaRPr lang="fr-FR"/>
@@ -16410,13 +15797,6 @@
   <p:clrMapOvr>
     <a:masterClrMapping/>
   </p:clrMapOvr>
-  <p:timing>
-    <p:tnLst>
-      <p:par>
-        <p:cTn id="1" dur="indefinite" restart="never" nodeType="tmRoot"/>
-      </p:par>
-    </p:tnLst>
-  </p:timing>
 </p:sld>
 </file>
 
@@ -16940,4 +16320,10 @@
     </a:ext>
   </a:extLst>
 </a:theme>
+</file>
+
+<file path=docMetadata/LabelInfo.xml><?xml version="1.0" encoding="utf-8"?>
+<clbl:labelList xmlns:clbl="http://schemas.microsoft.com/office/2020/mipLabelMetadata">
+  <clbl:label id="{1f8e20e6-048a-4bad-a26b-318dd1cd4d47}" enabled="1" method="Privileged" siteId="{66c65d8a-9158-4521-a2d8-664963db48e4}" contentBits="0" removed="0"/>
+</clbl:labelList>
 </file>